--- a/docs/Verity-Supply-Chain-Finance-Overview.pptx
+++ b/docs/Verity-Supply-Chain-Finance-Overview.pptx
@@ -4,6 +4,9 @@
   <p:sldMasterIdLst>
     <p:sldMasterId id="2147483648" r:id="rId1"/>
   </p:sldMasterIdLst>
+  <p:notesMasterIdLst>
+    <p:notesMasterId r:id="rId7"/>
+  </p:notesMasterIdLst>
   <p:sldIdLst>
     <p:sldId id="256" r:id="rId2"/>
     <p:sldId id="257" r:id="rId3"/>
@@ -11,11 +14,8 @@
     <p:sldId id="259" r:id="rId5"/>
     <p:sldId id="260" r:id="rId6"/>
   </p:sldIdLst>
-  <p:notesMasterIdLst>
-    <p:notesMasterId r:id="rId7"/>
-  </p:notesMasterIdLst>
-  <p:sldSz cx="12191695" cy="6858000"/>
-  <p:notesSz cx="6858000" cy="12191695"/>
+  <p:sldSz cx="12192000" cy="6858000"/>
+  <p:notesSz cx="6858000" cy="12192000"/>
   <p:defaultTextStyle>
     <a:lvl1pPr marL="0" algn="l" defTabSz="914400" rtl="0" eaLnBrk="1" latinLnBrk="0" hangingPunct="1">
       <a:defRPr sz="1800" kern="1200">
@@ -108,6 +108,11 @@
       </a:defRPr>
     </a:lvl9pPr>
   </p:defaultTextStyle>
+  <p:extLst>
+    <p:ext uri="{EFAFB233-063F-42B5-8137-9DF3F51BA10A}">
+      <p15:sldGuideLst xmlns:p15="http://schemas.microsoft.com/office/powerpoint/2012/main"/>
+    </p:ext>
+  </p:extLst>
 </p:presentation>
 </file>
 
@@ -133,234 +138,10 @@
           <a:chExt cx="0" cy="0"/>
         </a:xfrm>
       </p:grpSpPr>
-      <p:sp>
-        <p:nvSpPr>
-          <p:cNvPr id="2" name="Header Placeholder 1"/>
-          <p:cNvSpPr>
-            <a:spLocks noGrp="1"/>
-          </p:cNvSpPr>
-          <p:nvPr>
-            <p:ph type="hdr" sz="quarter"/>
-          </p:nvPr>
-        </p:nvSpPr>
-        <p:spPr>
-          <a:xfrm>
-            <a:off x="0" y="0"/>
-            <a:ext cx="2971800" cy="458788"/>
-          </a:xfrm>
-          <a:prstGeom prst="rect">
-            <a:avLst/>
-          </a:prstGeom>
-        </p:spPr>
-        <p:txBody>
-          <a:bodyPr vert="horz" lIns="91440" tIns="45720" rIns="91440" bIns="45720" rtlCol="0"/>
-          <a:lstStyle>
-            <a:lvl1pPr algn="l">
-              <a:defRPr sz="1200"/>
-            </a:lvl1pPr>
-          </a:lstStyle>
-          <a:p>
-            <a:endParaRPr lang="en-US"/>
-          </a:p>
-        </p:txBody>
-      </p:sp>
-      <p:sp>
-        <p:nvSpPr>
-          <p:cNvPr id="3" name="Date Placeholder 2"/>
-          <p:cNvSpPr>
-            <a:spLocks noGrp="1"/>
-          </p:cNvSpPr>
-          <p:nvPr>
-            <p:ph type="dt" idx="1"/>
-          </p:nvPr>
-        </p:nvSpPr>
-        <p:spPr>
-          <a:xfrm>
-            <a:off x="3884613" y="0"/>
-            <a:ext cx="2971800" cy="458788"/>
-          </a:xfrm>
-          <a:prstGeom prst="rect">
-            <a:avLst/>
-          </a:prstGeom>
-        </p:spPr>
-        <p:txBody>
-          <a:bodyPr vert="horz" lIns="91440" tIns="45720" rIns="91440" bIns="45720" rtlCol="0"/>
-          <a:lstStyle>
-            <a:lvl1pPr algn="r">
-              <a:defRPr sz="1200"/>
-            </a:lvl1pPr>
-          </a:lstStyle>
-          <a:p>
-            <a:fld id="{5282F153-3F37-0F45-9E97-73ACFA13230C}" type="datetimeFigureOut">
-              <a:rPr lang="en-US"/>
-              <a:t>7/23/19</a:t>
-            </a:fld>
-            <a:endParaRPr lang="en-US"/>
-          </a:p>
-        </p:txBody>
-      </p:sp>
-      <p:sp>
-        <p:nvSpPr>
-          <p:cNvPr id="4" name="Slide Image Placeholder 3"/>
-          <p:cNvSpPr>
-            <a:spLocks noGrp="1" noRot="1" noChangeAspect="1"/>
-          </p:cNvSpPr>
-          <p:nvPr>
-            <p:ph type="sldImg" idx="2"/>
-          </p:nvPr>
-        </p:nvSpPr>
-        <p:spPr>
-          <a:xfrm>
-            <a:off x="685800" y="1143000"/>
-            <a:ext cx="5486400" cy="3086100"/>
-          </a:xfrm>
-          <a:prstGeom prst="rect">
-            <a:avLst/>
-          </a:prstGeom>
-          <a:noFill/>
-          <a:ln w="12700">
-            <a:solidFill>
-              <a:prstClr val="black"/>
-            </a:solidFill>
-          </a:ln>
-        </p:spPr>
-        <p:txBody>
-          <a:bodyPr vert="horz" lIns="91440" tIns="45720" rIns="91440" bIns="45720" rtlCol="0" anchor="ctr"/>
-          <a:lstStyle/>
-          <a:p>
-            <a:endParaRPr lang="en-US"/>
-          </a:p>
-        </p:txBody>
-      </p:sp>
-      <p:sp>
-        <p:nvSpPr>
-          <p:cNvPr id="5" name="Notes Placeholder 4"/>
-          <p:cNvSpPr>
-            <a:spLocks noGrp="1"/>
-          </p:cNvSpPr>
-          <p:nvPr>
-            <p:ph type="body" sz="quarter" idx="3"/>
-          </p:nvPr>
-        </p:nvSpPr>
-        <p:spPr>
-          <a:xfrm>
-            <a:off x="685800" y="4400550"/>
-            <a:ext cx="5486400" cy="3600450"/>
-          </a:xfrm>
-          <a:prstGeom prst="rect">
-            <a:avLst/>
-          </a:prstGeom>
-        </p:spPr>
-        <p:txBody>
-          <a:bodyPr vert="horz" lIns="91440" tIns="45720" rIns="91440" bIns="45720" rtlCol="0"/>
-          <a:lstStyle/>
-          <a:p>
-            <a:pPr lvl="0"/>
-            <a:r>
-              <a:rPr lang="en-US"/>
-              <a:t>Click to edit Master text styles</a:t>
-            </a:r>
-          </a:p>
-          <a:p>
-            <a:pPr lvl="1"/>
-            <a:r>
-              <a:rPr lang="en-US"/>
-              <a:t>Second level</a:t>
-            </a:r>
-          </a:p>
-          <a:p>
-            <a:pPr lvl="2"/>
-            <a:r>
-              <a:rPr lang="en-US"/>
-              <a:t>Third level</a:t>
-            </a:r>
-          </a:p>
-          <a:p>
-            <a:pPr lvl="3"/>
-            <a:r>
-              <a:rPr lang="en-US"/>
-              <a:t>Fourth level</a:t>
-            </a:r>
-          </a:p>
-          <a:p>
-            <a:pPr lvl="4"/>
-            <a:r>
-              <a:rPr lang="en-US"/>
-              <a:t>Fifth level</a:t>
-            </a:r>
-          </a:p>
-        </p:txBody>
-      </p:sp>
-      <p:sp>
-        <p:nvSpPr>
-          <p:cNvPr id="6" name="Footer Placeholder 5"/>
-          <p:cNvSpPr>
-            <a:spLocks noGrp="1"/>
-          </p:cNvSpPr>
-          <p:nvPr>
-            <p:ph type="ftr" sz="quarter" idx="4"/>
-          </p:nvPr>
-        </p:nvSpPr>
-        <p:spPr>
-          <a:xfrm>
-            <a:off x="0" y="8685213"/>
-            <a:ext cx="2971800" cy="458787"/>
-          </a:xfrm>
-          <a:prstGeom prst="rect">
-            <a:avLst/>
-          </a:prstGeom>
-        </p:spPr>
-        <p:txBody>
-          <a:bodyPr vert="horz" lIns="91440" tIns="45720" rIns="91440" bIns="45720" rtlCol="0" anchor="b"/>
-          <a:lstStyle>
-            <a:lvl1pPr algn="l">
-              <a:defRPr sz="1200"/>
-            </a:lvl1pPr>
-          </a:lstStyle>
-          <a:p>
-            <a:endParaRPr lang="en-US"/>
-          </a:p>
-        </p:txBody>
-      </p:sp>
-      <p:sp>
-        <p:nvSpPr>
-          <p:cNvPr id="7" name="Slide Number Placeholder 6"/>
-          <p:cNvSpPr>
-            <a:spLocks noGrp="1"/>
-          </p:cNvSpPr>
-          <p:nvPr>
-            <p:ph type="sldNum" sz="quarter" idx="5"/>
-          </p:nvPr>
-        </p:nvSpPr>
-        <p:spPr>
-          <a:xfrm>
-            <a:off x="3884613" y="8685213"/>
-            <a:ext cx="2971800" cy="458787"/>
-          </a:xfrm>
-          <a:prstGeom prst="rect">
-            <a:avLst/>
-          </a:prstGeom>
-        </p:spPr>
-        <p:txBody>
-          <a:bodyPr vert="horz" lIns="91440" tIns="45720" rIns="91440" bIns="45720" rtlCol="0" anchor="b"/>
-          <a:lstStyle>
-            <a:lvl1pPr algn="r">
-              <a:defRPr sz="1200"/>
-            </a:lvl1pPr>
-          </a:lstStyle>
-          <a:p>
-            <a:fld id="{CE5E9CC1-C706-0F49-92D6-E571CC5EEA8F}" type="slidenum">
-              <a:rPr lang="en-US"/>
-              <a:t>‹#›</a:t>
-            </a:fld>
-            <a:endParaRPr lang="en-US"/>
-          </a:p>
-        </p:txBody>
-      </p:sp>
     </p:spTree>
     <p:extLst>
       <p:ext uri="{BB962C8B-B14F-4D97-AF65-F5344CB8AC3E}">
-        <p14:creationId xmlns:p14="http://schemas.microsoft.com/office/powerpoint/2010/main" val="1024086991"/>
+        <p14:creationId xmlns:p14="http://schemas.microsoft.com/office/powerpoint/2010/main" val="3312869088"/>
       </p:ext>
     </p:extLst>
   </p:cSld>
@@ -504,10 +285,6 @@
           <a:bodyPr/>
           <a:lstStyle/>
           <a:p>
-            <a:r>
-              <a:rPr lang="en-US" dirty="0"/>
-              <a:t/>
-            </a:r>
             <a:endParaRPr lang="en-US" dirty="0"/>
           </a:p>
         </p:txBody>
@@ -592,10 +369,6 @@
           <a:bodyPr/>
           <a:lstStyle/>
           <a:p>
-            <a:r>
-              <a:rPr lang="en-US" dirty="0"/>
-              <a:t/>
-            </a:r>
             <a:endParaRPr lang="en-US" dirty="0"/>
           </a:p>
         </p:txBody>
@@ -680,10 +453,6 @@
           <a:bodyPr/>
           <a:lstStyle/>
           <a:p>
-            <a:r>
-              <a:rPr lang="en-US" dirty="0"/>
-              <a:t/>
-            </a:r>
             <a:endParaRPr lang="en-US" dirty="0"/>
           </a:p>
         </p:txBody>
@@ -768,10 +537,6 @@
           <a:bodyPr/>
           <a:lstStyle/>
           <a:p>
-            <a:r>
-              <a:rPr lang="en-US" dirty="0"/>
-              <a:t/>
-            </a:r>
             <a:endParaRPr lang="en-US" dirty="0"/>
           </a:p>
         </p:txBody>
@@ -856,10 +621,6 @@
           <a:bodyPr/>
           <a:lstStyle/>
           <a:p>
-            <a:r>
-              <a:rPr lang="en-US" dirty="0"/>
-              <a:t/>
-            </a:r>
             <a:endParaRPr lang="en-US" dirty="0"/>
           </a:p>
         </p:txBody>
@@ -933,6 +694,11 @@
 <file path=ppt/slideMasters/slideMaster1.xml><?xml version="1.0" encoding="utf-8"?>
 <p:sldMaster xmlns:a="http://schemas.openxmlformats.org/drawingml/2006/main" xmlns:r="http://schemas.openxmlformats.org/officeDocument/2006/relationships" xmlns:p="http://schemas.openxmlformats.org/presentationml/2006/main">
   <p:cSld>
+    <p:bg>
+      <p:bgRef idx="1001">
+        <a:schemeClr val="bg1"/>
+      </p:bgRef>
+    </p:bg>
     <p:spTree>
       <p:nvGrpSpPr>
         <p:cNvPr id="1" name=""/>
@@ -1215,6 +981,7 @@
         <a:solidFill>
           <a:srgbClr val="F8FBF8"/>
         </a:solidFill>
+        <a:effectLst/>
       </p:bgPr>
     </p:bg>
     <p:spTree>
@@ -1233,33 +1000,6 @@
       </p:grpSpPr>
       <p:sp>
         <p:nvSpPr>
-          <p:cNvPr id="2" name="Shape 0"/>
-          <p:cNvSpPr/>
-          <p:nvPr/>
-        </p:nvSpPr>
-        <p:spPr>
-          <a:xfrm>
-            <a:off x="0" y="0"/>
-            <a:ext cx="12191695" cy="6858000"/>
-          </a:xfrm>
-          <a:prstGeom prst="rect">
-            <a:avLst/>
-          </a:prstGeom>
-          <a:solidFill>
-            <a:srgbClr val="F8FBF8"/>
-          </a:solidFill>
-          <a:ln w="12700">
-            <a:solidFill>
-              <a:srgbClr val="333333">
-                <a:alpha val="0"/>
-              </a:srgbClr>
-            </a:solidFill>
-            <a:prstDash val="solid"/>
-          </a:ln>
-        </p:spPr>
-      </p:sp>
-      <p:sp>
-        <p:nvSpPr>
           <p:cNvPr id="3" name="Text 1"/>
           <p:cNvSpPr/>
           <p:nvPr/>
@@ -1279,7 +1019,7 @@
           <a:bodyPr wrap="square" lIns="0" tIns="0" rIns="0" bIns="0" rtlCol="0" anchor="ctr"/>
           <a:lstStyle/>
           <a:p>
-            <a:pPr indent="0" marL="0">
+            <a:pPr marL="0" indent="0">
               <a:buNone/>
             </a:pPr>
             <a:r>
@@ -1315,7 +1055,7 @@
           <a:bodyPr wrap="square" lIns="0" tIns="0" rIns="0" bIns="0" rtlCol="0" anchor="ctr"/>
           <a:lstStyle/>
           <a:p>
-            <a:pPr indent="0" marL="0">
+            <a:pPr marL="0" indent="0">
               <a:buNone/>
             </a:pPr>
             <a:r>
@@ -1356,7 +1096,7 @@
           </a:bodyPr>
           <a:lstStyle/>
           <a:p>
-            <a:pPr indent="0" marL="0">
+            <a:pPr marL="0" indent="0">
               <a:buNone/>
             </a:pPr>
             <a:r>
@@ -1394,7 +1134,7 @@
           </a:bodyPr>
           <a:lstStyle/>
           <a:p>
-            <a:pPr indent="0" marL="0">
+            <a:pPr marL="0" indent="0">
               <a:buNone/>
             </a:pPr>
             <a:r>
@@ -1417,7 +1157,7 @@
         </p:nvSpPr>
         <p:spPr>
           <a:xfrm>
-            <a:off x="6537960" y="932688"/>
+            <a:off x="6858000" y="1024128"/>
             <a:ext cx="4846320" cy="4498848"/>
           </a:xfrm>
           <a:prstGeom prst="roundRect">
@@ -1435,6 +1175,13 @@
             <a:prstDash val="solid"/>
           </a:ln>
         </p:spPr>
+        <p:txBody>
+          <a:bodyPr/>
+          <a:lstStyle/>
+          <a:p>
+            <a:endParaRPr lang="en-US"/>
+          </a:p>
+        </p:txBody>
       </p:sp>
       <p:sp>
         <p:nvSpPr>
@@ -1444,7 +1191,7 @@
         </p:nvSpPr>
         <p:spPr>
           <a:xfrm>
-            <a:off x="6903720" y="1261872"/>
+            <a:off x="7223760" y="1353312"/>
             <a:ext cx="91440" cy="603504"/>
           </a:xfrm>
           <a:prstGeom prst="rect">
@@ -1462,6 +1209,13 @@
             <a:prstDash val="solid"/>
           </a:ln>
         </p:spPr>
+        <p:txBody>
+          <a:bodyPr/>
+          <a:lstStyle/>
+          <a:p>
+            <a:endParaRPr lang="en-US"/>
+          </a:p>
+        </p:txBody>
       </p:sp>
       <p:sp>
         <p:nvSpPr>
@@ -1471,7 +1225,7 @@
         </p:nvSpPr>
         <p:spPr>
           <a:xfrm>
-            <a:off x="7150608" y="1252728"/>
+            <a:off x="7470648" y="1344168"/>
             <a:ext cx="1051560" cy="201168"/>
           </a:xfrm>
           <a:prstGeom prst="rect">
@@ -1484,7 +1238,7 @@
           <a:bodyPr wrap="square" lIns="0" tIns="0" rIns="0" bIns="0" rtlCol="0" anchor="ctr"/>
           <a:lstStyle/>
           <a:p>
-            <a:pPr indent="0" marL="0">
+            <a:pPr marL="0" indent="0">
               <a:buNone/>
             </a:pPr>
             <a:r>
@@ -1507,7 +1261,7 @@
         </p:nvSpPr>
         <p:spPr>
           <a:xfrm>
-            <a:off x="8275320" y="1188720"/>
+            <a:off x="8595360" y="1280160"/>
             <a:ext cx="2651760" cy="713232"/>
           </a:xfrm>
           <a:prstGeom prst="roundRect">
@@ -1525,6 +1279,13 @@
             <a:prstDash val="solid"/>
           </a:ln>
         </p:spPr>
+        <p:txBody>
+          <a:bodyPr/>
+          <a:lstStyle/>
+          <a:p>
+            <a:endParaRPr lang="en-US"/>
+          </a:p>
+        </p:txBody>
       </p:sp>
       <p:sp>
         <p:nvSpPr>
@@ -1534,7 +1295,7 @@
         </p:nvSpPr>
         <p:spPr>
           <a:xfrm>
-            <a:off x="8449056" y="1353312"/>
+            <a:off x="8769096" y="1444752"/>
             <a:ext cx="2304288" cy="310896"/>
           </a:xfrm>
           <a:prstGeom prst="rect">
@@ -1549,7 +1310,7 @@
           </a:bodyPr>
           <a:lstStyle/>
           <a:p>
-            <a:pPr algn="ctr" indent="0" marL="0">
+            <a:pPr marL="0" indent="0" algn="ctr">
               <a:buNone/>
             </a:pPr>
             <a:r>
@@ -1572,7 +1333,7 @@
         </p:nvSpPr>
         <p:spPr>
           <a:xfrm>
-            <a:off x="6903720" y="2221992"/>
+            <a:off x="7223760" y="2313432"/>
             <a:ext cx="91440" cy="603504"/>
           </a:xfrm>
           <a:prstGeom prst="rect">
@@ -1590,6 +1351,13 @@
             <a:prstDash val="solid"/>
           </a:ln>
         </p:spPr>
+        <p:txBody>
+          <a:bodyPr/>
+          <a:lstStyle/>
+          <a:p>
+            <a:endParaRPr lang="en-US"/>
+          </a:p>
+        </p:txBody>
       </p:sp>
       <p:sp>
         <p:nvSpPr>
@@ -1599,7 +1367,7 @@
         </p:nvSpPr>
         <p:spPr>
           <a:xfrm>
-            <a:off x="7150608" y="2212848"/>
+            <a:off x="7470648" y="2304288"/>
             <a:ext cx="1051560" cy="201168"/>
           </a:xfrm>
           <a:prstGeom prst="rect">
@@ -1612,7 +1380,7 @@
           <a:bodyPr wrap="square" lIns="0" tIns="0" rIns="0" bIns="0" rtlCol="0" anchor="ctr"/>
           <a:lstStyle/>
           <a:p>
-            <a:pPr indent="0" marL="0">
+            <a:pPr marL="0" indent="0">
               <a:buNone/>
             </a:pPr>
             <a:r>
@@ -1635,7 +1403,7 @@
         </p:nvSpPr>
         <p:spPr>
           <a:xfrm>
-            <a:off x="8275320" y="2148840"/>
+            <a:off x="8595360" y="2240280"/>
             <a:ext cx="2651760" cy="713232"/>
           </a:xfrm>
           <a:prstGeom prst="roundRect">
@@ -1653,6 +1421,13 @@
             <a:prstDash val="solid"/>
           </a:ln>
         </p:spPr>
+        <p:txBody>
+          <a:bodyPr/>
+          <a:lstStyle/>
+          <a:p>
+            <a:endParaRPr lang="en-US"/>
+          </a:p>
+        </p:txBody>
       </p:sp>
       <p:sp>
         <p:nvSpPr>
@@ -1662,7 +1437,7 @@
         </p:nvSpPr>
         <p:spPr>
           <a:xfrm>
-            <a:off x="8449056" y="2313432"/>
+            <a:off x="8769096" y="2404872"/>
             <a:ext cx="2304288" cy="310896"/>
           </a:xfrm>
           <a:prstGeom prst="rect">
@@ -1677,7 +1452,7 @@
           </a:bodyPr>
           <a:lstStyle/>
           <a:p>
-            <a:pPr algn="ctr" indent="0" marL="0">
+            <a:pPr marL="0" indent="0" algn="ctr">
               <a:buNone/>
             </a:pPr>
             <a:r>
@@ -1700,7 +1475,7 @@
         </p:nvSpPr>
         <p:spPr>
           <a:xfrm>
-            <a:off x="6903720" y="3182112"/>
+            <a:off x="7223760" y="3273552"/>
             <a:ext cx="91440" cy="603504"/>
           </a:xfrm>
           <a:prstGeom prst="rect">
@@ -1718,6 +1493,13 @@
             <a:prstDash val="solid"/>
           </a:ln>
         </p:spPr>
+        <p:txBody>
+          <a:bodyPr/>
+          <a:lstStyle/>
+          <a:p>
+            <a:endParaRPr lang="en-US"/>
+          </a:p>
+        </p:txBody>
       </p:sp>
       <p:sp>
         <p:nvSpPr>
@@ -1727,7 +1509,7 @@
         </p:nvSpPr>
         <p:spPr>
           <a:xfrm>
-            <a:off x="7150608" y="3172968"/>
+            <a:off x="7470648" y="3264408"/>
             <a:ext cx="1051560" cy="201168"/>
           </a:xfrm>
           <a:prstGeom prst="rect">
@@ -1740,7 +1522,7 @@
           <a:bodyPr wrap="square" lIns="0" tIns="0" rIns="0" bIns="0" rtlCol="0" anchor="ctr"/>
           <a:lstStyle/>
           <a:p>
-            <a:pPr indent="0" marL="0">
+            <a:pPr marL="0" indent="0">
               <a:buNone/>
             </a:pPr>
             <a:r>
@@ -1763,7 +1545,7 @@
         </p:nvSpPr>
         <p:spPr>
           <a:xfrm>
-            <a:off x="8275320" y="3108960"/>
+            <a:off x="8595360" y="3200400"/>
             <a:ext cx="2651760" cy="713232"/>
           </a:xfrm>
           <a:prstGeom prst="roundRect">
@@ -1781,6 +1563,13 @@
             <a:prstDash val="solid"/>
           </a:ln>
         </p:spPr>
+        <p:txBody>
+          <a:bodyPr/>
+          <a:lstStyle/>
+          <a:p>
+            <a:endParaRPr lang="en-US"/>
+          </a:p>
+        </p:txBody>
       </p:sp>
       <p:sp>
         <p:nvSpPr>
@@ -1790,7 +1579,7 @@
         </p:nvSpPr>
         <p:spPr>
           <a:xfrm>
-            <a:off x="8449056" y="3273552"/>
+            <a:off x="8769096" y="3364992"/>
             <a:ext cx="2304288" cy="310896"/>
           </a:xfrm>
           <a:prstGeom prst="rect">
@@ -1805,7 +1594,7 @@
           </a:bodyPr>
           <a:lstStyle/>
           <a:p>
-            <a:pPr algn="ctr" indent="0" marL="0">
+            <a:pPr marL="0" indent="0" algn="ctr">
               <a:buNone/>
             </a:pPr>
             <a:r>
@@ -1828,7 +1617,7 @@
         </p:nvSpPr>
         <p:spPr>
           <a:xfrm>
-            <a:off x="6903720" y="4142232"/>
+            <a:off x="7223760" y="4233672"/>
             <a:ext cx="91440" cy="603504"/>
           </a:xfrm>
           <a:prstGeom prst="rect">
@@ -1846,6 +1635,13 @@
             <a:prstDash val="solid"/>
           </a:ln>
         </p:spPr>
+        <p:txBody>
+          <a:bodyPr/>
+          <a:lstStyle/>
+          <a:p>
+            <a:endParaRPr lang="en-US"/>
+          </a:p>
+        </p:txBody>
       </p:sp>
       <p:sp>
         <p:nvSpPr>
@@ -1855,7 +1651,7 @@
         </p:nvSpPr>
         <p:spPr>
           <a:xfrm>
-            <a:off x="7150608" y="4133088"/>
+            <a:off x="7470648" y="4224528"/>
             <a:ext cx="1051560" cy="201168"/>
           </a:xfrm>
           <a:prstGeom prst="rect">
@@ -1868,7 +1664,7 @@
           <a:bodyPr wrap="square" lIns="0" tIns="0" rIns="0" bIns="0" rtlCol="0" anchor="ctr"/>
           <a:lstStyle/>
           <a:p>
-            <a:pPr indent="0" marL="0">
+            <a:pPr marL="0" indent="0">
               <a:buNone/>
             </a:pPr>
             <a:r>
@@ -1891,7 +1687,7 @@
         </p:nvSpPr>
         <p:spPr>
           <a:xfrm>
-            <a:off x="8275320" y="4069080"/>
+            <a:off x="8595360" y="4160520"/>
             <a:ext cx="2651760" cy="713232"/>
           </a:xfrm>
           <a:prstGeom prst="roundRect">
@@ -1909,6 +1705,13 @@
             <a:prstDash val="solid"/>
           </a:ln>
         </p:spPr>
+        <p:txBody>
+          <a:bodyPr/>
+          <a:lstStyle/>
+          <a:p>
+            <a:endParaRPr lang="en-US"/>
+          </a:p>
+        </p:txBody>
       </p:sp>
       <p:sp>
         <p:nvSpPr>
@@ -1918,7 +1721,7 @@
         </p:nvSpPr>
         <p:spPr>
           <a:xfrm>
-            <a:off x="8449056" y="4233672"/>
+            <a:off x="8769096" y="4325112"/>
             <a:ext cx="2304288" cy="310896"/>
           </a:xfrm>
           <a:prstGeom prst="rect">
@@ -1933,7 +1736,7 @@
           </a:bodyPr>
           <a:lstStyle/>
           <a:p>
-            <a:pPr algn="ctr" indent="0" marL="0">
+            <a:pPr marL="0" indent="0" algn="ctr">
               <a:buNone/>
             </a:pPr>
             <a:r>
@@ -1969,7 +1772,7 @@
           <a:bodyPr wrap="square" lIns="0" tIns="0" rIns="0" bIns="0" rtlCol="0" anchor="ctr"/>
           <a:lstStyle/>
           <a:p>
-            <a:pPr indent="0" marL="0">
+            <a:pPr marL="0" indent="0">
               <a:buNone/>
             </a:pPr>
             <a:r>
@@ -2005,7 +1808,7 @@
           <a:bodyPr wrap="square" lIns="0" tIns="0" rIns="0" bIns="0" rtlCol="0" anchor="ctr"/>
           <a:lstStyle/>
           <a:p>
-            <a:pPr indent="0" marL="0">
+            <a:pPr marL="0" indent="0">
               <a:buNone/>
             </a:pPr>
             <a:r>
@@ -2042,6 +1845,13 @@
             <a:prstDash val="solid"/>
           </a:ln>
         </p:spPr>
+        <p:txBody>
+          <a:bodyPr/>
+          <a:lstStyle/>
+          <a:p>
+            <a:endParaRPr lang="en-US"/>
+          </a:p>
+        </p:txBody>
       </p:sp>
       <p:sp>
         <p:nvSpPr>
@@ -2064,7 +1874,7 @@
           <a:bodyPr wrap="square" lIns="0" tIns="0" rIns="0" bIns="0" rtlCol="0" anchor="ctr"/>
           <a:lstStyle/>
           <a:p>
-            <a:pPr indent="0" marL="0">
+            <a:pPr marL="0" indent="0">
               <a:buNone/>
             </a:pPr>
             <a:r>
@@ -2103,7 +1913,7 @@
           <a:bodyPr wrap="square" lIns="0" tIns="0" rIns="0" bIns="0" rtlCol="0" anchor="ctr"/>
           <a:lstStyle/>
           <a:p>
-            <a:pPr algn="r" indent="0" marL="0">
+            <a:pPr marL="0" indent="0" algn="r">
               <a:buNone/>
             </a:pPr>
             <a:r>
@@ -2137,6 +1947,7 @@
         <a:solidFill>
           <a:srgbClr val="FFFFFF"/>
         </a:solidFill>
+        <a:effectLst/>
       </p:bgPr>
     </p:bg>
     <p:spTree>
@@ -2174,7 +1985,7 @@
           <a:bodyPr wrap="square" lIns="0" tIns="0" rIns="0" bIns="0" rtlCol="0" anchor="ctr"/>
           <a:lstStyle/>
           <a:p>
-            <a:pPr indent="0" marL="0">
+            <a:pPr marL="0" indent="0">
               <a:buNone/>
             </a:pPr>
             <a:r>
@@ -2215,7 +2026,7 @@
           </a:bodyPr>
           <a:lstStyle/>
           <a:p>
-            <a:pPr indent="0" marL="0">
+            <a:pPr marL="0" indent="0">
               <a:buNone/>
             </a:pPr>
             <a:r>
@@ -2259,6 +2070,13 @@
             <a:prstDash val="solid"/>
           </a:ln>
         </p:spPr>
+        <p:txBody>
+          <a:bodyPr/>
+          <a:lstStyle/>
+          <a:p>
+            <a:endParaRPr lang="en-US"/>
+          </a:p>
+        </p:txBody>
       </p:sp>
       <p:sp>
         <p:nvSpPr>
@@ -2281,7 +2099,7 @@
           <a:bodyPr wrap="square" lIns="0" tIns="0" rIns="0" bIns="0" rtlCol="0" anchor="ctr"/>
           <a:lstStyle/>
           <a:p>
-            <a:pPr algn="ctr" indent="0" marL="0">
+            <a:pPr marL="0" indent="0" algn="ctr">
               <a:buNone/>
             </a:pPr>
             <a:r>
@@ -2317,7 +2135,7 @@
           <a:bodyPr wrap="square" lIns="0" tIns="0" rIns="0" bIns="0" rtlCol="0" anchor="ctr"/>
           <a:lstStyle/>
           <a:p>
-            <a:pPr algn="ctr" indent="0" marL="0">
+            <a:pPr marL="0" indent="0" algn="ctr">
               <a:buNone/>
             </a:pPr>
             <a:r>
@@ -2358,6 +2176,13 @@
             <a:prstDash val="solid"/>
           </a:ln>
         </p:spPr>
+        <p:txBody>
+          <a:bodyPr/>
+          <a:lstStyle/>
+          <a:p>
+            <a:endParaRPr lang="en-US"/>
+          </a:p>
+        </p:txBody>
       </p:sp>
       <p:sp>
         <p:nvSpPr>
@@ -2385,6 +2210,13 @@
             <a:prstDash val="solid"/>
           </a:ln>
         </p:spPr>
+        <p:txBody>
+          <a:bodyPr/>
+          <a:lstStyle/>
+          <a:p>
+            <a:endParaRPr lang="en-US"/>
+          </a:p>
+        </p:txBody>
       </p:sp>
       <p:sp>
         <p:nvSpPr>
@@ -2407,7 +2239,7 @@
           <a:bodyPr wrap="square" lIns="0" tIns="0" rIns="0" bIns="0" rtlCol="0" anchor="ctr"/>
           <a:lstStyle/>
           <a:p>
-            <a:pPr algn="ctr" indent="0" marL="0">
+            <a:pPr marL="0" indent="0" algn="ctr">
               <a:buNone/>
             </a:pPr>
             <a:r>
@@ -2443,7 +2275,7 @@
           <a:bodyPr wrap="square" lIns="0" tIns="0" rIns="0" bIns="0" rtlCol="0" anchor="ctr"/>
           <a:lstStyle/>
           <a:p>
-            <a:pPr algn="ctr" indent="0" marL="0">
+            <a:pPr marL="0" indent="0" algn="ctr">
               <a:buNone/>
             </a:pPr>
             <a:r>
@@ -2484,6 +2316,13 @@
             <a:prstDash val="solid"/>
           </a:ln>
         </p:spPr>
+        <p:txBody>
+          <a:bodyPr/>
+          <a:lstStyle/>
+          <a:p>
+            <a:endParaRPr lang="en-US"/>
+          </a:p>
+        </p:txBody>
       </p:sp>
       <p:sp>
         <p:nvSpPr>
@@ -2511,6 +2350,13 @@
             <a:prstDash val="solid"/>
           </a:ln>
         </p:spPr>
+        <p:txBody>
+          <a:bodyPr/>
+          <a:lstStyle/>
+          <a:p>
+            <a:endParaRPr lang="en-US"/>
+          </a:p>
+        </p:txBody>
       </p:sp>
       <p:sp>
         <p:nvSpPr>
@@ -2533,7 +2379,7 @@
           <a:bodyPr wrap="square" lIns="0" tIns="0" rIns="0" bIns="0" rtlCol="0" anchor="ctr"/>
           <a:lstStyle/>
           <a:p>
-            <a:pPr algn="ctr" indent="0" marL="0">
+            <a:pPr marL="0" indent="0" algn="ctr">
               <a:buNone/>
             </a:pPr>
             <a:r>
@@ -2569,7 +2415,7 @@
           <a:bodyPr wrap="square" lIns="0" tIns="0" rIns="0" bIns="0" rtlCol="0" anchor="ctr"/>
           <a:lstStyle/>
           <a:p>
-            <a:pPr algn="ctr" indent="0" marL="0">
+            <a:pPr marL="0" indent="0" algn="ctr">
               <a:buNone/>
             </a:pPr>
             <a:r>
@@ -2610,6 +2456,13 @@
             <a:prstDash val="solid"/>
           </a:ln>
         </p:spPr>
+        <p:txBody>
+          <a:bodyPr/>
+          <a:lstStyle/>
+          <a:p>
+            <a:endParaRPr lang="en-US"/>
+          </a:p>
+        </p:txBody>
       </p:sp>
       <p:sp>
         <p:nvSpPr>
@@ -2637,6 +2490,13 @@
             <a:prstDash val="solid"/>
           </a:ln>
         </p:spPr>
+        <p:txBody>
+          <a:bodyPr/>
+          <a:lstStyle/>
+          <a:p>
+            <a:endParaRPr lang="en-US"/>
+          </a:p>
+        </p:txBody>
       </p:sp>
       <p:sp>
         <p:nvSpPr>
@@ -2659,7 +2519,7 @@
           <a:bodyPr wrap="square" lIns="0" tIns="0" rIns="0" bIns="0" rtlCol="0" anchor="ctr"/>
           <a:lstStyle/>
           <a:p>
-            <a:pPr algn="ctr" indent="0" marL="0">
+            <a:pPr marL="0" indent="0" algn="ctr">
               <a:buNone/>
             </a:pPr>
             <a:r>
@@ -2695,7 +2555,7 @@
           <a:bodyPr wrap="square" lIns="0" tIns="0" rIns="0" bIns="0" rtlCol="0" anchor="ctr"/>
           <a:lstStyle/>
           <a:p>
-            <a:pPr algn="ctr" indent="0" marL="0">
+            <a:pPr marL="0" indent="0" algn="ctr">
               <a:buNone/>
             </a:pPr>
             <a:r>
@@ -2736,6 +2596,13 @@
             <a:prstDash val="solid"/>
           </a:ln>
         </p:spPr>
+        <p:txBody>
+          <a:bodyPr/>
+          <a:lstStyle/>
+          <a:p>
+            <a:endParaRPr lang="en-US"/>
+          </a:p>
+        </p:txBody>
       </p:sp>
       <p:sp>
         <p:nvSpPr>
@@ -2763,6 +2630,13 @@
             <a:prstDash val="solid"/>
           </a:ln>
         </p:spPr>
+        <p:txBody>
+          <a:bodyPr/>
+          <a:lstStyle/>
+          <a:p>
+            <a:endParaRPr lang="en-US"/>
+          </a:p>
+        </p:txBody>
       </p:sp>
       <p:sp>
         <p:nvSpPr>
@@ -2785,7 +2659,7 @@
           <a:bodyPr wrap="square" lIns="0" tIns="0" rIns="0" bIns="0" rtlCol="0" anchor="ctr"/>
           <a:lstStyle/>
           <a:p>
-            <a:pPr algn="ctr" indent="0" marL="0">
+            <a:pPr marL="0" indent="0" algn="ctr">
               <a:buNone/>
             </a:pPr>
             <a:r>
@@ -2821,7 +2695,7 @@
           <a:bodyPr wrap="square" lIns="0" tIns="0" rIns="0" bIns="0" rtlCol="0" anchor="ctr"/>
           <a:lstStyle/>
           <a:p>
-            <a:pPr algn="ctr" indent="0" marL="0">
+            <a:pPr marL="0" indent="0" algn="ctr">
               <a:buNone/>
             </a:pPr>
             <a:r>
@@ -2862,6 +2736,13 @@
             <a:prstDash val="solid"/>
           </a:ln>
         </p:spPr>
+        <p:txBody>
+          <a:bodyPr/>
+          <a:lstStyle/>
+          <a:p>
+            <a:endParaRPr lang="en-US"/>
+          </a:p>
+        </p:txBody>
       </p:sp>
       <p:sp>
         <p:nvSpPr>
@@ -2889,6 +2770,13 @@
             <a:prstDash val="solid"/>
           </a:ln>
         </p:spPr>
+        <p:txBody>
+          <a:bodyPr/>
+          <a:lstStyle/>
+          <a:p>
+            <a:endParaRPr lang="en-US"/>
+          </a:p>
+        </p:txBody>
       </p:sp>
       <p:sp>
         <p:nvSpPr>
@@ -2911,7 +2799,7 @@
           <a:bodyPr wrap="square" lIns="0" tIns="0" rIns="0" bIns="0" rtlCol="0" anchor="ctr"/>
           <a:lstStyle/>
           <a:p>
-            <a:pPr algn="ctr" indent="0" marL="0">
+            <a:pPr marL="0" indent="0" algn="ctr">
               <a:buNone/>
             </a:pPr>
             <a:r>
@@ -2947,7 +2835,7 @@
           <a:bodyPr wrap="square" lIns="0" tIns="0" rIns="0" bIns="0" rtlCol="0" anchor="ctr"/>
           <a:lstStyle/>
           <a:p>
-            <a:pPr algn="ctr" indent="0" marL="0">
+            <a:pPr marL="0" indent="0" algn="ctr">
               <a:buNone/>
             </a:pPr>
             <a:r>
@@ -2984,6 +2872,13 @@
             <a:prstDash val="solid"/>
           </a:ln>
         </p:spPr>
+        <p:txBody>
+          <a:bodyPr/>
+          <a:lstStyle/>
+          <a:p>
+            <a:endParaRPr lang="en-US"/>
+          </a:p>
+        </p:txBody>
       </p:sp>
       <p:sp>
         <p:nvSpPr>
@@ -3006,7 +2901,7 @@
           <a:bodyPr wrap="square" lIns="0" tIns="0" rIns="0" bIns="0" rtlCol="0" anchor="ctr"/>
           <a:lstStyle/>
           <a:p>
-            <a:pPr indent="0" marL="0">
+            <a:pPr marL="0" indent="0">
               <a:buNone/>
             </a:pPr>
             <a:r>
@@ -3044,7 +2939,7 @@
           </a:bodyPr>
           <a:lstStyle/>
           <a:p>
-            <a:pPr indent="0" marL="0">
+            <a:pPr marL="0" indent="0">
               <a:buNone/>
             </a:pPr>
             <a:r>
@@ -3080,7 +2975,7 @@
           <a:bodyPr wrap="square" lIns="0" tIns="0" rIns="0" bIns="0" rtlCol="0" anchor="ctr"/>
           <a:lstStyle/>
           <a:p>
-            <a:pPr indent="0" marL="0">
+            <a:pPr marL="0" indent="0">
               <a:buNone/>
             </a:pPr>
             <a:r>
@@ -3118,7 +3013,7 @@
           </a:bodyPr>
           <a:lstStyle/>
           <a:p>
-            <a:pPr indent="0" marL="0">
+            <a:pPr marL="0" indent="0">
               <a:buNone/>
             </a:pPr>
             <a:r>
@@ -3154,7 +3049,7 @@
           <a:bodyPr wrap="square" lIns="0" tIns="0" rIns="0" bIns="0" rtlCol="0" anchor="ctr"/>
           <a:lstStyle/>
           <a:p>
-            <a:pPr indent="0" marL="0">
+            <a:pPr marL="0" indent="0">
               <a:buNone/>
             </a:pPr>
             <a:r>
@@ -3192,7 +3087,7 @@
           </a:bodyPr>
           <a:lstStyle/>
           <a:p>
-            <a:pPr indent="0" marL="0">
+            <a:pPr marL="0" indent="0">
               <a:buNone/>
             </a:pPr>
             <a:r>
@@ -3229,6 +3124,13 @@
             <a:prstDash val="solid"/>
           </a:ln>
         </p:spPr>
+        <p:txBody>
+          <a:bodyPr/>
+          <a:lstStyle/>
+          <a:p>
+            <a:endParaRPr lang="en-US"/>
+          </a:p>
+        </p:txBody>
       </p:sp>
       <p:sp>
         <p:nvSpPr>
@@ -3251,7 +3153,7 @@
           <a:bodyPr wrap="square" lIns="0" tIns="0" rIns="0" bIns="0" rtlCol="0" anchor="ctr"/>
           <a:lstStyle/>
           <a:p>
-            <a:pPr indent="0" marL="0">
+            <a:pPr marL="0" indent="0">
               <a:buNone/>
             </a:pPr>
             <a:r>
@@ -3290,7 +3192,7 @@
           <a:bodyPr wrap="square" lIns="0" tIns="0" rIns="0" bIns="0" rtlCol="0" anchor="ctr"/>
           <a:lstStyle/>
           <a:p>
-            <a:pPr algn="r" indent="0" marL="0">
+            <a:pPr marL="0" indent="0" algn="r">
               <a:buNone/>
             </a:pPr>
             <a:r>
@@ -3324,6 +3226,7 @@
         <a:solidFill>
           <a:srgbClr val="F7FAFC"/>
         </a:solidFill>
+        <a:effectLst/>
       </p:bgPr>
     </p:bg>
     <p:spTree>
@@ -3361,7 +3264,7 @@
           <a:bodyPr wrap="square" lIns="0" tIns="0" rIns="0" bIns="0" rtlCol="0" anchor="ctr"/>
           <a:lstStyle/>
           <a:p>
-            <a:pPr indent="0" marL="0">
+            <a:pPr marL="0" indent="0">
               <a:buNone/>
             </a:pPr>
             <a:r>
@@ -3402,7 +3305,7 @@
           </a:bodyPr>
           <a:lstStyle/>
           <a:p>
-            <a:pPr indent="0" marL="0">
+            <a:pPr marL="0" indent="0">
               <a:buNone/>
             </a:pPr>
             <a:r>
@@ -3428,7 +3331,7 @@
         </p:nvSpPr>
         <p:spPr>
           <a:xfrm>
-            <a:off x="566928" y="1481328"/>
+            <a:off x="566928" y="1408441"/>
             <a:ext cx="7909560" cy="4526280"/>
           </a:xfrm>
           <a:prstGeom prst="roundRect">
@@ -3446,24 +3349,31 @@
             <a:prstDash val="solid"/>
           </a:ln>
         </p:spPr>
+        <p:txBody>
+          <a:bodyPr/>
+          <a:lstStyle/>
+          <a:p>
+            <a:endParaRPr lang="en-US"/>
+          </a:p>
+        </p:txBody>
       </p:sp>
       <p:pic>
         <p:nvPicPr>
-          <p:cNvPr id="5" name="Image 0" descr="/Users/jhee/Workplaces/Projects/ConnextiumBootCamp/WeekofCircle/ArcCommerce/Products-SCF/Ideation/Round001/Architecture of Fianace Supply Chain.png">    </p:cNvPr>
+          <p:cNvPr id="5" name="Image 0" descr="/Users/jhee/Workplaces/Projects/ConnextiumBootCamp/WeekofCircle/ArcCommerce/Products-SCF/Ideation/Round001/Architecture of Fianace Supply Chain.png"/>
           <p:cNvPicPr>
             <a:picLocks noChangeAspect="1"/>
           </p:cNvPicPr>
           <p:nvPr/>
         </p:nvPicPr>
         <p:blipFill>
-          <a:blip r:embed="rId1"/>
+          <a:blip r:embed="rId3"/>
           <a:stretch>
             <a:fillRect/>
           </a:stretch>
         </p:blipFill>
         <p:spPr>
           <a:xfrm>
-            <a:off x="1444752" y="1691640"/>
+            <a:off x="1444752" y="1591056"/>
             <a:ext cx="6144768" cy="4096512"/>
           </a:xfrm>
           <a:prstGeom prst="rect">
@@ -3492,7 +3402,7 @@
           <a:bodyPr wrap="square" lIns="0" tIns="0" rIns="0" bIns="0" rtlCol="0" anchor="ctr"/>
           <a:lstStyle/>
           <a:p>
-            <a:pPr indent="0" marL="0">
+            <a:pPr marL="0" indent="0">
               <a:buNone/>
             </a:pPr>
             <a:r>
@@ -3531,6 +3441,13 @@
             <a:prstDash val="solid"/>
           </a:ln>
         </p:spPr>
+        <p:txBody>
+          <a:bodyPr/>
+          <a:lstStyle/>
+          <a:p>
+            <a:endParaRPr lang="en-US"/>
+          </a:p>
+        </p:txBody>
       </p:sp>
       <p:sp>
         <p:nvSpPr>
@@ -3555,7 +3472,7 @@
           </a:bodyPr>
           <a:lstStyle/>
           <a:p>
-            <a:pPr indent="0" marL="0">
+            <a:pPr marL="0" indent="0">
               <a:buNone/>
             </a:pPr>
             <a:r>
@@ -3594,6 +3511,13 @@
             <a:prstDash val="solid"/>
           </a:ln>
         </p:spPr>
+        <p:txBody>
+          <a:bodyPr/>
+          <a:lstStyle/>
+          <a:p>
+            <a:endParaRPr lang="en-US"/>
+          </a:p>
+        </p:txBody>
       </p:sp>
       <p:sp>
         <p:nvSpPr>
@@ -3618,7 +3542,7 @@
           </a:bodyPr>
           <a:lstStyle/>
           <a:p>
-            <a:pPr indent="0" marL="0">
+            <a:pPr marL="0" indent="0">
               <a:buNone/>
             </a:pPr>
             <a:r>
@@ -3657,6 +3581,13 @@
             <a:prstDash val="solid"/>
           </a:ln>
         </p:spPr>
+        <p:txBody>
+          <a:bodyPr/>
+          <a:lstStyle/>
+          <a:p>
+            <a:endParaRPr lang="en-US"/>
+          </a:p>
+        </p:txBody>
       </p:sp>
       <p:sp>
         <p:nvSpPr>
@@ -3681,7 +3612,7 @@
           </a:bodyPr>
           <a:lstStyle/>
           <a:p>
-            <a:pPr indent="0" marL="0">
+            <a:pPr marL="0" indent="0">
               <a:buNone/>
             </a:pPr>
             <a:r>
@@ -3720,6 +3651,13 @@
             <a:prstDash val="solid"/>
           </a:ln>
         </p:spPr>
+        <p:txBody>
+          <a:bodyPr/>
+          <a:lstStyle/>
+          <a:p>
+            <a:endParaRPr lang="en-US"/>
+          </a:p>
+        </p:txBody>
       </p:sp>
       <p:sp>
         <p:nvSpPr>
@@ -3744,7 +3682,7 @@
           </a:bodyPr>
           <a:lstStyle/>
           <a:p>
-            <a:pPr indent="0" marL="0">
+            <a:pPr marL="0" indent="0">
               <a:buNone/>
             </a:pPr>
             <a:r>
@@ -3785,6 +3723,13 @@
             <a:prstDash val="solid"/>
           </a:ln>
         </p:spPr>
+        <p:txBody>
+          <a:bodyPr/>
+          <a:lstStyle/>
+          <a:p>
+            <a:endParaRPr lang="en-US"/>
+          </a:p>
+        </p:txBody>
       </p:sp>
       <p:sp>
         <p:nvSpPr>
@@ -3807,7 +3752,7 @@
           <a:bodyPr wrap="square" lIns="0" tIns="0" rIns="0" bIns="0" rtlCol="0" anchor="ctr"/>
           <a:lstStyle/>
           <a:p>
-            <a:pPr algn="ctr" indent="0" marL="0">
+            <a:pPr marL="0" indent="0" algn="ctr">
               <a:buNone/>
             </a:pPr>
             <a:r>
@@ -3844,6 +3789,13 @@
             <a:prstDash val="solid"/>
           </a:ln>
         </p:spPr>
+        <p:txBody>
+          <a:bodyPr/>
+          <a:lstStyle/>
+          <a:p>
+            <a:endParaRPr lang="en-US"/>
+          </a:p>
+        </p:txBody>
       </p:sp>
       <p:sp>
         <p:nvSpPr>
@@ -3866,7 +3818,7 @@
           <a:bodyPr wrap="square" lIns="0" tIns="0" rIns="0" bIns="0" rtlCol="0" anchor="ctr"/>
           <a:lstStyle/>
           <a:p>
-            <a:pPr indent="0" marL="0">
+            <a:pPr marL="0" indent="0">
               <a:buNone/>
             </a:pPr>
             <a:r>
@@ -3905,7 +3857,7 @@
           <a:bodyPr wrap="square" lIns="0" tIns="0" rIns="0" bIns="0" rtlCol="0" anchor="ctr"/>
           <a:lstStyle/>
           <a:p>
-            <a:pPr algn="r" indent="0" marL="0">
+            <a:pPr marL="0" indent="0" algn="r">
               <a:buNone/>
             </a:pPr>
             <a:r>
@@ -3939,6 +3891,7 @@
         <a:solidFill>
           <a:srgbClr val="FFFFFF"/>
         </a:solidFill>
+        <a:effectLst/>
       </p:bgPr>
     </p:bg>
     <p:spTree>
@@ -3976,7 +3929,7 @@
           <a:bodyPr wrap="square" lIns="0" tIns="0" rIns="0" bIns="0" rtlCol="0" anchor="ctr"/>
           <a:lstStyle/>
           <a:p>
-            <a:pPr indent="0" marL="0">
+            <a:pPr marL="0" indent="0">
               <a:buNone/>
             </a:pPr>
             <a:r>
@@ -4017,7 +3970,7 @@
           </a:bodyPr>
           <a:lstStyle/>
           <a:p>
-            <a:pPr indent="0" marL="0">
+            <a:pPr marL="0" indent="0">
               <a:buNone/>
             </a:pPr>
             <a:r>
@@ -4061,6 +4014,13 @@
             <a:prstDash val="solid"/>
           </a:ln>
         </p:spPr>
+        <p:txBody>
+          <a:bodyPr/>
+          <a:lstStyle/>
+          <a:p>
+            <a:endParaRPr lang="en-US"/>
+          </a:p>
+        </p:txBody>
       </p:sp>
       <p:sp>
         <p:nvSpPr>
@@ -4083,7 +4043,7 @@
           <a:bodyPr wrap="square" lIns="0" tIns="0" rIns="0" bIns="0" rtlCol="0" anchor="ctr"/>
           <a:lstStyle/>
           <a:p>
-            <a:pPr indent="0" marL="0">
+            <a:pPr marL="0" indent="0">
               <a:buNone/>
             </a:pPr>
             <a:r>
@@ -4122,6 +4082,13 @@
             <a:prstDash val="solid"/>
           </a:ln>
         </p:spPr>
+        <p:txBody>
+          <a:bodyPr/>
+          <a:lstStyle/>
+          <a:p>
+            <a:endParaRPr lang="en-US"/>
+          </a:p>
+        </p:txBody>
       </p:sp>
       <p:sp>
         <p:nvSpPr>
@@ -4144,7 +4111,7 @@
           <a:bodyPr wrap="square" lIns="0" tIns="0" rIns="0" bIns="0" rtlCol="0" anchor="ctr"/>
           <a:lstStyle/>
           <a:p>
-            <a:pPr algn="ctr" indent="0" marL="0">
+            <a:pPr marL="0" indent="0" algn="ctr">
               <a:buNone/>
             </a:pPr>
             <a:r>
@@ -4182,7 +4149,7 @@
           </a:bodyPr>
           <a:lstStyle/>
           <a:p>
-            <a:pPr indent="0" marL="0">
+            <a:pPr marL="0" indent="0">
               <a:buNone/>
             </a:pPr>
             <a:r>
@@ -4221,6 +4188,13 @@
             <a:prstDash val="solid"/>
           </a:ln>
         </p:spPr>
+        <p:txBody>
+          <a:bodyPr/>
+          <a:lstStyle/>
+          <a:p>
+            <a:endParaRPr lang="en-US"/>
+          </a:p>
+        </p:txBody>
       </p:sp>
       <p:sp>
         <p:nvSpPr>
@@ -4243,7 +4217,7 @@
           <a:bodyPr wrap="square" lIns="0" tIns="0" rIns="0" bIns="0" rtlCol="0" anchor="ctr"/>
           <a:lstStyle/>
           <a:p>
-            <a:pPr algn="ctr" indent="0" marL="0">
+            <a:pPr marL="0" indent="0" algn="ctr">
               <a:buNone/>
             </a:pPr>
             <a:r>
@@ -4281,7 +4255,7 @@
           </a:bodyPr>
           <a:lstStyle/>
           <a:p>
-            <a:pPr indent="0" marL="0">
+            <a:pPr marL="0" indent="0">
               <a:buNone/>
             </a:pPr>
             <a:r>
@@ -4320,6 +4294,13 @@
             <a:prstDash val="solid"/>
           </a:ln>
         </p:spPr>
+        <p:txBody>
+          <a:bodyPr/>
+          <a:lstStyle/>
+          <a:p>
+            <a:endParaRPr lang="en-US"/>
+          </a:p>
+        </p:txBody>
       </p:sp>
       <p:sp>
         <p:nvSpPr>
@@ -4342,7 +4323,7 @@
           <a:bodyPr wrap="square" lIns="0" tIns="0" rIns="0" bIns="0" rtlCol="0" anchor="ctr"/>
           <a:lstStyle/>
           <a:p>
-            <a:pPr algn="ctr" indent="0" marL="0">
+            <a:pPr marL="0" indent="0" algn="ctr">
               <a:buNone/>
             </a:pPr>
             <a:r>
@@ -4380,7 +4361,7 @@
           </a:bodyPr>
           <a:lstStyle/>
           <a:p>
-            <a:pPr indent="0" marL="0">
+            <a:pPr marL="0" indent="0">
               <a:buNone/>
             </a:pPr>
             <a:r>
@@ -4421,6 +4402,13 @@
             <a:prstDash val="solid"/>
           </a:ln>
         </p:spPr>
+        <p:txBody>
+          <a:bodyPr/>
+          <a:lstStyle/>
+          <a:p>
+            <a:endParaRPr lang="en-US"/>
+          </a:p>
+        </p:txBody>
       </p:sp>
       <p:sp>
         <p:nvSpPr>
@@ -4443,7 +4431,7 @@
           <a:bodyPr wrap="square" lIns="0" tIns="0" rIns="0" bIns="0" rtlCol="0" anchor="ctr"/>
           <a:lstStyle/>
           <a:p>
-            <a:pPr indent="0" marL="0">
+            <a:pPr marL="0" indent="0">
               <a:buNone/>
             </a:pPr>
             <a:r>
@@ -4482,6 +4470,13 @@
             <a:prstDash val="solid"/>
           </a:ln>
         </p:spPr>
+        <p:txBody>
+          <a:bodyPr/>
+          <a:lstStyle/>
+          <a:p>
+            <a:endParaRPr lang="en-US"/>
+          </a:p>
+        </p:txBody>
       </p:sp>
       <p:sp>
         <p:nvSpPr>
@@ -4504,7 +4499,7 @@
           <a:bodyPr wrap="square" lIns="0" tIns="0" rIns="0" bIns="0" rtlCol="0" anchor="ctr"/>
           <a:lstStyle/>
           <a:p>
-            <a:pPr algn="ctr" indent="0" marL="0">
+            <a:pPr marL="0" indent="0" algn="ctr">
               <a:buNone/>
             </a:pPr>
             <a:r>
@@ -4542,7 +4537,7 @@
           </a:bodyPr>
           <a:lstStyle/>
           <a:p>
-            <a:pPr indent="0" marL="0">
+            <a:pPr marL="0" indent="0">
               <a:buNone/>
             </a:pPr>
             <a:r>
@@ -4581,6 +4576,13 @@
             <a:prstDash val="solid"/>
           </a:ln>
         </p:spPr>
+        <p:txBody>
+          <a:bodyPr/>
+          <a:lstStyle/>
+          <a:p>
+            <a:endParaRPr lang="en-US"/>
+          </a:p>
+        </p:txBody>
       </p:sp>
       <p:sp>
         <p:nvSpPr>
@@ -4603,7 +4605,7 @@
           <a:bodyPr wrap="square" lIns="0" tIns="0" rIns="0" bIns="0" rtlCol="0" anchor="ctr"/>
           <a:lstStyle/>
           <a:p>
-            <a:pPr algn="ctr" indent="0" marL="0">
+            <a:pPr marL="0" indent="0" algn="ctr">
               <a:buNone/>
             </a:pPr>
             <a:r>
@@ -4641,7 +4643,7 @@
           </a:bodyPr>
           <a:lstStyle/>
           <a:p>
-            <a:pPr indent="0" marL="0">
+            <a:pPr marL="0" indent="0">
               <a:buNone/>
             </a:pPr>
             <a:r>
@@ -4680,6 +4682,13 @@
             <a:prstDash val="solid"/>
           </a:ln>
         </p:spPr>
+        <p:txBody>
+          <a:bodyPr/>
+          <a:lstStyle/>
+          <a:p>
+            <a:endParaRPr lang="en-US"/>
+          </a:p>
+        </p:txBody>
       </p:sp>
       <p:sp>
         <p:nvSpPr>
@@ -4702,7 +4711,7 @@
           <a:bodyPr wrap="square" lIns="0" tIns="0" rIns="0" bIns="0" rtlCol="0" anchor="ctr"/>
           <a:lstStyle/>
           <a:p>
-            <a:pPr algn="ctr" indent="0" marL="0">
+            <a:pPr marL="0" indent="0" algn="ctr">
               <a:buNone/>
             </a:pPr>
             <a:r>
@@ -4740,7 +4749,7 @@
           </a:bodyPr>
           <a:lstStyle/>
           <a:p>
-            <a:pPr indent="0" marL="0">
+            <a:pPr marL="0" indent="0">
               <a:buNone/>
             </a:pPr>
             <a:r>
@@ -4781,6 +4790,13 @@
             <a:prstDash val="solid"/>
           </a:ln>
         </p:spPr>
+        <p:txBody>
+          <a:bodyPr/>
+          <a:lstStyle/>
+          <a:p>
+            <a:endParaRPr lang="en-US"/>
+          </a:p>
+        </p:txBody>
       </p:sp>
       <p:sp>
         <p:nvSpPr>
@@ -4803,7 +4819,7 @@
           <a:bodyPr wrap="square" lIns="0" tIns="0" rIns="0" bIns="0" rtlCol="0" anchor="ctr"/>
           <a:lstStyle/>
           <a:p>
-            <a:pPr indent="0" marL="0">
+            <a:pPr marL="0" indent="0">
               <a:buNone/>
             </a:pPr>
             <a:r>
@@ -4842,6 +4858,13 @@
             <a:prstDash val="solid"/>
           </a:ln>
         </p:spPr>
+        <p:txBody>
+          <a:bodyPr/>
+          <a:lstStyle/>
+          <a:p>
+            <a:endParaRPr lang="en-US"/>
+          </a:p>
+        </p:txBody>
       </p:sp>
       <p:sp>
         <p:nvSpPr>
@@ -4864,7 +4887,7 @@
           <a:bodyPr wrap="square" lIns="0" tIns="0" rIns="0" bIns="0" rtlCol="0" anchor="ctr"/>
           <a:lstStyle/>
           <a:p>
-            <a:pPr algn="ctr" indent="0" marL="0">
+            <a:pPr marL="0" indent="0" algn="ctr">
               <a:buNone/>
             </a:pPr>
             <a:r>
@@ -4902,7 +4925,7 @@
           </a:bodyPr>
           <a:lstStyle/>
           <a:p>
-            <a:pPr indent="0" marL="0">
+            <a:pPr marL="0" indent="0">
               <a:buNone/>
             </a:pPr>
             <a:r>
@@ -4941,6 +4964,13 @@
             <a:prstDash val="solid"/>
           </a:ln>
         </p:spPr>
+        <p:txBody>
+          <a:bodyPr/>
+          <a:lstStyle/>
+          <a:p>
+            <a:endParaRPr lang="en-US"/>
+          </a:p>
+        </p:txBody>
       </p:sp>
       <p:sp>
         <p:nvSpPr>
@@ -4963,7 +4993,7 @@
           <a:bodyPr wrap="square" lIns="0" tIns="0" rIns="0" bIns="0" rtlCol="0" anchor="ctr"/>
           <a:lstStyle/>
           <a:p>
-            <a:pPr algn="ctr" indent="0" marL="0">
+            <a:pPr marL="0" indent="0" algn="ctr">
               <a:buNone/>
             </a:pPr>
             <a:r>
@@ -5001,7 +5031,7 @@
           </a:bodyPr>
           <a:lstStyle/>
           <a:p>
-            <a:pPr indent="0" marL="0">
+            <a:pPr marL="0" indent="0">
               <a:buNone/>
             </a:pPr>
             <a:r>
@@ -5040,6 +5070,13 @@
             <a:prstDash val="solid"/>
           </a:ln>
         </p:spPr>
+        <p:txBody>
+          <a:bodyPr/>
+          <a:lstStyle/>
+          <a:p>
+            <a:endParaRPr lang="en-US"/>
+          </a:p>
+        </p:txBody>
       </p:sp>
       <p:sp>
         <p:nvSpPr>
@@ -5062,7 +5099,7 @@
           <a:bodyPr wrap="square" lIns="0" tIns="0" rIns="0" bIns="0" rtlCol="0" anchor="ctr"/>
           <a:lstStyle/>
           <a:p>
-            <a:pPr algn="ctr" indent="0" marL="0">
+            <a:pPr marL="0" indent="0" algn="ctr">
               <a:buNone/>
             </a:pPr>
             <a:r>
@@ -5100,7 +5137,7 @@
           </a:bodyPr>
           <a:lstStyle/>
           <a:p>
-            <a:pPr indent="0" marL="0">
+            <a:pPr marL="0" indent="0">
               <a:buNone/>
             </a:pPr>
             <a:r>
@@ -5139,6 +5176,13 @@
             <a:tailEnd type="triangle"/>
           </a:ln>
         </p:spPr>
+        <p:txBody>
+          <a:bodyPr/>
+          <a:lstStyle/>
+          <a:p>
+            <a:endParaRPr lang="en-US"/>
+          </a:p>
+        </p:txBody>
       </p:sp>
       <p:sp>
         <p:nvSpPr>
@@ -5164,6 +5208,13 @@
             <a:tailEnd type="triangle"/>
           </a:ln>
         </p:spPr>
+        <p:txBody>
+          <a:bodyPr/>
+          <a:lstStyle/>
+          <a:p>
+            <a:endParaRPr lang="en-US"/>
+          </a:p>
+        </p:txBody>
       </p:sp>
       <p:sp>
         <p:nvSpPr>
@@ -5173,7 +5224,7 @@
         </p:nvSpPr>
         <p:spPr>
           <a:xfrm>
-            <a:off x="4882896" y="5833872"/>
+            <a:off x="3749040" y="5953142"/>
             <a:ext cx="1051560" cy="146304"/>
           </a:xfrm>
           <a:prstGeom prst="rect">
@@ -5186,7 +5237,7 @@
           <a:bodyPr wrap="square" lIns="0" tIns="0" rIns="0" bIns="0" rtlCol="0" anchor="ctr"/>
           <a:lstStyle/>
           <a:p>
-            <a:pPr indent="0" marL="0">
+            <a:pPr marL="0" indent="0">
               <a:buNone/>
             </a:pPr>
             <a:r>
@@ -5209,7 +5260,7 @@
         </p:nvSpPr>
         <p:spPr>
           <a:xfrm>
-            <a:off x="5623560" y="5833872"/>
+            <a:off x="4489704" y="5953142"/>
             <a:ext cx="4114800" cy="146304"/>
           </a:xfrm>
           <a:prstGeom prst="rect">
@@ -5222,7 +5273,7 @@
           <a:bodyPr wrap="square" lIns="0" tIns="0" rIns="0" bIns="0" rtlCol="0" anchor="ctr"/>
           <a:lstStyle/>
           <a:p>
-            <a:pPr indent="0" marL="0">
+            <a:pPr marL="0" indent="0">
               <a:buNone/>
             </a:pPr>
             <a:r>
@@ -5259,6 +5310,13 @@
             <a:prstDash val="solid"/>
           </a:ln>
         </p:spPr>
+        <p:txBody>
+          <a:bodyPr/>
+          <a:lstStyle/>
+          <a:p>
+            <a:endParaRPr lang="en-US"/>
+          </a:p>
+        </p:txBody>
       </p:sp>
       <p:sp>
         <p:nvSpPr>
@@ -5281,7 +5339,7 @@
           <a:bodyPr wrap="square" lIns="0" tIns="0" rIns="0" bIns="0" rtlCol="0" anchor="ctr"/>
           <a:lstStyle/>
           <a:p>
-            <a:pPr indent="0" marL="0">
+            <a:pPr marL="0" indent="0">
               <a:buNone/>
             </a:pPr>
             <a:r>
@@ -5320,7 +5378,7 @@
           <a:bodyPr wrap="square" lIns="0" tIns="0" rIns="0" bIns="0" rtlCol="0" anchor="ctr"/>
           <a:lstStyle/>
           <a:p>
-            <a:pPr algn="r" indent="0" marL="0">
+            <a:pPr marL="0" indent="0" algn="r">
               <a:buNone/>
             </a:pPr>
             <a:r>
@@ -5354,6 +5412,7 @@
         <a:solidFill>
           <a:srgbClr val="F9FAF7"/>
         </a:solidFill>
+        <a:effectLst/>
       </p:bgPr>
     </p:bg>
     <p:spTree>
@@ -5391,7 +5450,7 @@
           <a:bodyPr wrap="square" lIns="0" tIns="0" rIns="0" bIns="0" rtlCol="0" anchor="ctr"/>
           <a:lstStyle/>
           <a:p>
-            <a:pPr indent="0" marL="0">
+            <a:pPr marL="0" indent="0">
               <a:buNone/>
             </a:pPr>
             <a:r>
@@ -5432,7 +5491,7 @@
           </a:bodyPr>
           <a:lstStyle/>
           <a:p>
-            <a:pPr indent="0" marL="0">
+            <a:pPr marL="0" indent="0">
               <a:buNone/>
             </a:pPr>
             <a:r>
@@ -5472,6 +5531,13 @@
             <a:prstDash val="solid"/>
           </a:ln>
         </p:spPr>
+        <p:txBody>
+          <a:bodyPr/>
+          <a:lstStyle/>
+          <a:p>
+            <a:endParaRPr lang="en-US"/>
+          </a:p>
+        </p:txBody>
       </p:sp>
       <p:sp>
         <p:nvSpPr>
@@ -5497,6 +5563,13 @@
             <a:prstDash val="solid"/>
           </a:ln>
         </p:spPr>
+        <p:txBody>
+          <a:bodyPr/>
+          <a:lstStyle/>
+          <a:p>
+            <a:endParaRPr lang="en-US"/>
+          </a:p>
+        </p:txBody>
       </p:sp>
       <p:sp>
         <p:nvSpPr>
@@ -5519,7 +5592,7 @@
           <a:bodyPr wrap="square" lIns="0" tIns="0" rIns="0" bIns="0" rtlCol="0" anchor="ctr"/>
           <a:lstStyle/>
           <a:p>
-            <a:pPr algn="ctr" indent="0" marL="0">
+            <a:pPr marL="0" indent="0" algn="ctr">
               <a:buNone/>
             </a:pPr>
             <a:r>
@@ -5557,7 +5630,7 @@
           </a:bodyPr>
           <a:lstStyle/>
           <a:p>
-            <a:pPr indent="0" marL="0">
+            <a:pPr marL="0" indent="0">
               <a:buNone/>
             </a:pPr>
             <a:r>
@@ -5595,7 +5668,7 @@
           </a:bodyPr>
           <a:lstStyle/>
           <a:p>
-            <a:pPr indent="0" marL="0">
+            <a:pPr marL="0" indent="0">
               <a:buNone/>
             </a:pPr>
             <a:r>
@@ -5632,6 +5705,13 @@
             <a:prstDash val="solid"/>
           </a:ln>
         </p:spPr>
+        <p:txBody>
+          <a:bodyPr/>
+          <a:lstStyle/>
+          <a:p>
+            <a:endParaRPr lang="en-US"/>
+          </a:p>
+        </p:txBody>
       </p:sp>
       <p:sp>
         <p:nvSpPr>
@@ -5657,6 +5737,13 @@
             <a:prstDash val="solid"/>
           </a:ln>
         </p:spPr>
+        <p:txBody>
+          <a:bodyPr/>
+          <a:lstStyle/>
+          <a:p>
+            <a:endParaRPr lang="en-US"/>
+          </a:p>
+        </p:txBody>
       </p:sp>
       <p:sp>
         <p:nvSpPr>
@@ -5679,7 +5766,7 @@
           <a:bodyPr wrap="square" lIns="0" tIns="0" rIns="0" bIns="0" rtlCol="0" anchor="ctr"/>
           <a:lstStyle/>
           <a:p>
-            <a:pPr algn="ctr" indent="0" marL="0">
+            <a:pPr marL="0" indent="0" algn="ctr">
               <a:buNone/>
             </a:pPr>
             <a:r>
@@ -5717,7 +5804,7 @@
           </a:bodyPr>
           <a:lstStyle/>
           <a:p>
-            <a:pPr indent="0" marL="0">
+            <a:pPr marL="0" indent="0">
               <a:buNone/>
             </a:pPr>
             <a:r>
@@ -5755,7 +5842,7 @@
           </a:bodyPr>
           <a:lstStyle/>
           <a:p>
-            <a:pPr indent="0" marL="0">
+            <a:pPr marL="0" indent="0">
               <a:buNone/>
             </a:pPr>
             <a:r>
@@ -5792,6 +5879,13 @@
             <a:prstDash val="solid"/>
           </a:ln>
         </p:spPr>
+        <p:txBody>
+          <a:bodyPr/>
+          <a:lstStyle/>
+          <a:p>
+            <a:endParaRPr lang="en-US"/>
+          </a:p>
+        </p:txBody>
       </p:sp>
       <p:sp>
         <p:nvSpPr>
@@ -5817,6 +5911,13 @@
             <a:prstDash val="solid"/>
           </a:ln>
         </p:spPr>
+        <p:txBody>
+          <a:bodyPr/>
+          <a:lstStyle/>
+          <a:p>
+            <a:endParaRPr lang="en-US"/>
+          </a:p>
+        </p:txBody>
       </p:sp>
       <p:sp>
         <p:nvSpPr>
@@ -5839,7 +5940,7 @@
           <a:bodyPr wrap="square" lIns="0" tIns="0" rIns="0" bIns="0" rtlCol="0" anchor="ctr"/>
           <a:lstStyle/>
           <a:p>
-            <a:pPr algn="ctr" indent="0" marL="0">
+            <a:pPr marL="0" indent="0" algn="ctr">
               <a:buNone/>
             </a:pPr>
             <a:r>
@@ -5877,7 +5978,7 @@
           </a:bodyPr>
           <a:lstStyle/>
           <a:p>
-            <a:pPr indent="0" marL="0">
+            <a:pPr marL="0" indent="0">
               <a:buNone/>
             </a:pPr>
             <a:r>
@@ -5915,7 +6016,7 @@
           </a:bodyPr>
           <a:lstStyle/>
           <a:p>
-            <a:pPr indent="0" marL="0">
+            <a:pPr marL="0" indent="0">
               <a:buNone/>
             </a:pPr>
             <a:r>
@@ -5952,6 +6053,13 @@
             <a:prstDash val="solid"/>
           </a:ln>
         </p:spPr>
+        <p:txBody>
+          <a:bodyPr/>
+          <a:lstStyle/>
+          <a:p>
+            <a:endParaRPr lang="en-US"/>
+          </a:p>
+        </p:txBody>
       </p:sp>
       <p:sp>
         <p:nvSpPr>
@@ -5977,6 +6085,13 @@
             <a:prstDash val="solid"/>
           </a:ln>
         </p:spPr>
+        <p:txBody>
+          <a:bodyPr/>
+          <a:lstStyle/>
+          <a:p>
+            <a:endParaRPr lang="en-US"/>
+          </a:p>
+        </p:txBody>
       </p:sp>
       <p:sp>
         <p:nvSpPr>
@@ -5999,7 +6114,7 @@
           <a:bodyPr wrap="square" lIns="0" tIns="0" rIns="0" bIns="0" rtlCol="0" anchor="ctr"/>
           <a:lstStyle/>
           <a:p>
-            <a:pPr algn="ctr" indent="0" marL="0">
+            <a:pPr marL="0" indent="0" algn="ctr">
               <a:buNone/>
             </a:pPr>
             <a:r>
@@ -6037,7 +6152,7 @@
           </a:bodyPr>
           <a:lstStyle/>
           <a:p>
-            <a:pPr indent="0" marL="0">
+            <a:pPr marL="0" indent="0">
               <a:buNone/>
             </a:pPr>
             <a:r>
@@ -6075,7 +6190,7 @@
           </a:bodyPr>
           <a:lstStyle/>
           <a:p>
-            <a:pPr indent="0" marL="0">
+            <a:pPr marL="0" indent="0">
               <a:buNone/>
             </a:pPr>
             <a:r>
@@ -6112,6 +6227,13 @@
             <a:prstDash val="solid"/>
           </a:ln>
         </p:spPr>
+        <p:txBody>
+          <a:bodyPr/>
+          <a:lstStyle/>
+          <a:p>
+            <a:endParaRPr lang="en-US"/>
+          </a:p>
+        </p:txBody>
       </p:sp>
       <p:sp>
         <p:nvSpPr>
@@ -6137,6 +6259,13 @@
             <a:prstDash val="solid"/>
           </a:ln>
         </p:spPr>
+        <p:txBody>
+          <a:bodyPr/>
+          <a:lstStyle/>
+          <a:p>
+            <a:endParaRPr lang="en-US"/>
+          </a:p>
+        </p:txBody>
       </p:sp>
       <p:sp>
         <p:nvSpPr>
@@ -6159,7 +6288,7 @@
           <a:bodyPr wrap="square" lIns="0" tIns="0" rIns="0" bIns="0" rtlCol="0" anchor="ctr"/>
           <a:lstStyle/>
           <a:p>
-            <a:pPr algn="ctr" indent="0" marL="0">
+            <a:pPr marL="0" indent="0" algn="ctr">
               <a:buNone/>
             </a:pPr>
             <a:r>
@@ -6197,7 +6326,7 @@
           </a:bodyPr>
           <a:lstStyle/>
           <a:p>
-            <a:pPr indent="0" marL="0">
+            <a:pPr marL="0" indent="0">
               <a:buNone/>
             </a:pPr>
             <a:r>
@@ -6235,7 +6364,7 @@
           </a:bodyPr>
           <a:lstStyle/>
           <a:p>
-            <a:pPr indent="0" marL="0">
+            <a:pPr marL="0" indent="0">
               <a:buNone/>
             </a:pPr>
             <a:r>
@@ -6272,6 +6401,13 @@
             <a:prstDash val="solid"/>
           </a:ln>
         </p:spPr>
+        <p:txBody>
+          <a:bodyPr/>
+          <a:lstStyle/>
+          <a:p>
+            <a:endParaRPr lang="en-US"/>
+          </a:p>
+        </p:txBody>
       </p:sp>
       <p:sp>
         <p:nvSpPr>
@@ -6297,6 +6433,13 @@
             <a:prstDash val="solid"/>
           </a:ln>
         </p:spPr>
+        <p:txBody>
+          <a:bodyPr/>
+          <a:lstStyle/>
+          <a:p>
+            <a:endParaRPr lang="en-US"/>
+          </a:p>
+        </p:txBody>
       </p:sp>
       <p:sp>
         <p:nvSpPr>
@@ -6319,7 +6462,7 @@
           <a:bodyPr wrap="square" lIns="0" tIns="0" rIns="0" bIns="0" rtlCol="0" anchor="ctr"/>
           <a:lstStyle/>
           <a:p>
-            <a:pPr algn="ctr" indent="0" marL="0">
+            <a:pPr marL="0" indent="0" algn="ctr">
               <a:buNone/>
             </a:pPr>
             <a:r>
@@ -6357,7 +6500,7 @@
           </a:bodyPr>
           <a:lstStyle/>
           <a:p>
-            <a:pPr indent="0" marL="0">
+            <a:pPr marL="0" indent="0">
               <a:buNone/>
             </a:pPr>
             <a:r>
@@ -6395,7 +6538,7 @@
           </a:bodyPr>
           <a:lstStyle/>
           <a:p>
-            <a:pPr indent="0" marL="0">
+            <a:pPr marL="0" indent="0">
               <a:buNone/>
             </a:pPr>
             <a:r>
@@ -6436,6 +6579,13 @@
             <a:prstDash val="solid"/>
           </a:ln>
         </p:spPr>
+        <p:txBody>
+          <a:bodyPr/>
+          <a:lstStyle/>
+          <a:p>
+            <a:endParaRPr lang="en-US"/>
+          </a:p>
+        </p:txBody>
       </p:sp>
       <p:sp>
         <p:nvSpPr>
@@ -6458,7 +6608,7 @@
           <a:bodyPr wrap="square" lIns="0" tIns="0" rIns="0" bIns="0" rtlCol="0" anchor="ctr"/>
           <a:lstStyle/>
           <a:p>
-            <a:pPr indent="0" marL="0">
+            <a:pPr marL="0" indent="0">
               <a:buNone/>
             </a:pPr>
             <a:r>
@@ -6496,7 +6646,7 @@
           </a:bodyPr>
           <a:lstStyle/>
           <a:p>
-            <a:pPr indent="0" marL="0">
+            <a:pPr marL="0" indent="0">
               <a:buNone/>
             </a:pPr>
             <a:r>
@@ -6537,6 +6687,13 @@
             <a:prstDash val="solid"/>
           </a:ln>
         </p:spPr>
+        <p:txBody>
+          <a:bodyPr/>
+          <a:lstStyle/>
+          <a:p>
+            <a:endParaRPr lang="en-US"/>
+          </a:p>
+        </p:txBody>
       </p:sp>
       <p:sp>
         <p:nvSpPr>
@@ -6559,7 +6716,7 @@
           <a:bodyPr wrap="square" lIns="0" tIns="0" rIns="0" bIns="0" rtlCol="0" anchor="ctr"/>
           <a:lstStyle/>
           <a:p>
-            <a:pPr indent="0" marL="0">
+            <a:pPr marL="0" indent="0">
               <a:buNone/>
             </a:pPr>
             <a:r>
@@ -6597,7 +6754,7 @@
           </a:bodyPr>
           <a:lstStyle/>
           <a:p>
-            <a:pPr indent="0" marL="0">
+            <a:pPr marL="0" indent="0">
               <a:buNone/>
             </a:pPr>
             <a:r>
@@ -6634,6 +6791,13 @@
             <a:prstDash val="solid"/>
           </a:ln>
         </p:spPr>
+        <p:txBody>
+          <a:bodyPr/>
+          <a:lstStyle/>
+          <a:p>
+            <a:endParaRPr lang="en-US"/>
+          </a:p>
+        </p:txBody>
       </p:sp>
       <p:sp>
         <p:nvSpPr>
@@ -6656,7 +6820,7 @@
           <a:bodyPr wrap="square" lIns="0" tIns="0" rIns="0" bIns="0" rtlCol="0" anchor="ctr"/>
           <a:lstStyle/>
           <a:p>
-            <a:pPr indent="0" marL="0">
+            <a:pPr marL="0" indent="0">
               <a:buNone/>
             </a:pPr>
             <a:r>
@@ -6695,7 +6859,7 @@
           <a:bodyPr wrap="square" lIns="0" tIns="0" rIns="0" bIns="0" rtlCol="0" anchor="ctr"/>
           <a:lstStyle/>
           <a:p>
-            <a:pPr algn="r" indent="0" marL="0">
+            <a:pPr marL="0" indent="0" algn="r">
               <a:buNone/>
             </a:pPr>
             <a:r>
@@ -7014,4 +7178,319 @@
     </a:ext>
   </a:extLst>
 </a:theme>
+</file>
+
+<file path=ppt/theme/theme2.xml><?xml version="1.0" encoding="utf-8"?>
+<a:theme xmlns:a="http://schemas.openxmlformats.org/drawingml/2006/main" name="Office Theme">
+  <a:themeElements>
+    <a:clrScheme name="Office">
+      <a:dk1>
+        <a:sysClr val="windowText" lastClr="000000"/>
+      </a:dk1>
+      <a:lt1>
+        <a:sysClr val="window" lastClr="FFFFFF"/>
+      </a:lt1>
+      <a:dk2>
+        <a:srgbClr val="0E2841"/>
+      </a:dk2>
+      <a:lt2>
+        <a:srgbClr val="E8E8E8"/>
+      </a:lt2>
+      <a:accent1>
+        <a:srgbClr val="156082"/>
+      </a:accent1>
+      <a:accent2>
+        <a:srgbClr val="E97132"/>
+      </a:accent2>
+      <a:accent3>
+        <a:srgbClr val="196B24"/>
+      </a:accent3>
+      <a:accent4>
+        <a:srgbClr val="0F9ED5"/>
+      </a:accent4>
+      <a:accent5>
+        <a:srgbClr val="A02B93"/>
+      </a:accent5>
+      <a:accent6>
+        <a:srgbClr val="4EA72E"/>
+      </a:accent6>
+      <a:hlink>
+        <a:srgbClr val="467886"/>
+      </a:hlink>
+      <a:folHlink>
+        <a:srgbClr val="96607D"/>
+      </a:folHlink>
+    </a:clrScheme>
+    <a:fontScheme name="Office">
+      <a:majorFont>
+        <a:latin typeface="Aptos Display" panose="02110004020202020204"/>
+        <a:ea typeface=""/>
+        <a:cs typeface=""/>
+        <a:font script="Jpan" typeface="游ゴシック Light"/>
+        <a:font script="Hang" typeface="맑은 고딕"/>
+        <a:font script="Hans" typeface="等线 Light"/>
+        <a:font script="Hant" typeface="新細明體"/>
+        <a:font script="Arab" typeface="Times New Roman"/>
+        <a:font script="Hebr" typeface="Times New Roman"/>
+        <a:font script="Thai" typeface="Angsana New"/>
+        <a:font script="Ethi" typeface="Nyala"/>
+        <a:font script="Beng" typeface="Vrinda"/>
+        <a:font script="Gujr" typeface="Shruti"/>
+        <a:font script="Khmr" typeface="MoolBoran"/>
+        <a:font script="Knda" typeface="Tunga"/>
+        <a:font script="Guru" typeface="Raavi"/>
+        <a:font script="Cans" typeface="Euphemia"/>
+        <a:font script="Cher" typeface="Plantagenet Cherokee"/>
+        <a:font script="Yiii" typeface="Microsoft Yi Baiti"/>
+        <a:font script="Tibt" typeface="Microsoft Himalaya"/>
+        <a:font script="Thaa" typeface="MV Boli"/>
+        <a:font script="Deva" typeface="Mangal"/>
+        <a:font script="Telu" typeface="Gautami"/>
+        <a:font script="Taml" typeface="Latha"/>
+        <a:font script="Syrc" typeface="Estrangelo Edessa"/>
+        <a:font script="Orya" typeface="Kalinga"/>
+        <a:font script="Mlym" typeface="Kartika"/>
+        <a:font script="Laoo" typeface="DokChampa"/>
+        <a:font script="Sinh" typeface="Iskoola Pota"/>
+        <a:font script="Mong" typeface="Mongolian Baiti"/>
+        <a:font script="Viet" typeface="Times New Roman"/>
+        <a:font script="Uigh" typeface="Microsoft Uighur"/>
+        <a:font script="Geor" typeface="Sylfaen"/>
+        <a:font script="Armn" typeface="Arial"/>
+        <a:font script="Bugi" typeface="Leelawadee UI"/>
+        <a:font script="Bopo" typeface="Microsoft JhengHei"/>
+        <a:font script="Java" typeface="Javanese Text"/>
+        <a:font script="Lisu" typeface="Segoe UI"/>
+        <a:font script="Mymr" typeface="Myanmar Text"/>
+        <a:font script="Nkoo" typeface="Ebrima"/>
+        <a:font script="Olck" typeface="Nirmala UI"/>
+        <a:font script="Osma" typeface="Ebrima"/>
+        <a:font script="Phag" typeface="Phagspa"/>
+        <a:font script="Syrn" typeface="Estrangelo Edessa"/>
+        <a:font script="Syrj" typeface="Estrangelo Edessa"/>
+        <a:font script="Syre" typeface="Estrangelo Edessa"/>
+        <a:font script="Sora" typeface="Nirmala UI"/>
+        <a:font script="Tale" typeface="Microsoft Tai Le"/>
+        <a:font script="Talu" typeface="Microsoft New Tai Lue"/>
+        <a:font script="Tfng" typeface="Ebrima"/>
+      </a:majorFont>
+      <a:minorFont>
+        <a:latin typeface="Aptos" panose="02110004020202020204"/>
+        <a:ea typeface=""/>
+        <a:cs typeface=""/>
+        <a:font script="Jpan" typeface="游ゴシック"/>
+        <a:font script="Hang" typeface="맑은 고딕"/>
+        <a:font script="Hans" typeface="等线"/>
+        <a:font script="Hant" typeface="新細明體"/>
+        <a:font script="Arab" typeface="Arial"/>
+        <a:font script="Hebr" typeface="Arial"/>
+        <a:font script="Thai" typeface="Cordia New"/>
+        <a:font script="Ethi" typeface="Nyala"/>
+        <a:font script="Beng" typeface="Vrinda"/>
+        <a:font script="Gujr" typeface="Shruti"/>
+        <a:font script="Khmr" typeface="DaunPenh"/>
+        <a:font script="Knda" typeface="Tunga"/>
+        <a:font script="Guru" typeface="Raavi"/>
+        <a:font script="Cans" typeface="Euphemia"/>
+        <a:font script="Cher" typeface="Plantagenet Cherokee"/>
+        <a:font script="Yiii" typeface="Microsoft Yi Baiti"/>
+        <a:font script="Tibt" typeface="Microsoft Himalaya"/>
+        <a:font script="Thaa" typeface="MV Boli"/>
+        <a:font script="Deva" typeface="Mangal"/>
+        <a:font script="Telu" typeface="Gautami"/>
+        <a:font script="Taml" typeface="Latha"/>
+        <a:font script="Syrc" typeface="Estrangelo Edessa"/>
+        <a:font script="Orya" typeface="Kalinga"/>
+        <a:font script="Mlym" typeface="Kartika"/>
+        <a:font script="Laoo" typeface="DokChampa"/>
+        <a:font script="Sinh" typeface="Iskoola Pota"/>
+        <a:font script="Mong" typeface="Mongolian Baiti"/>
+        <a:font script="Viet" typeface="Arial"/>
+        <a:font script="Uigh" typeface="Microsoft Uighur"/>
+        <a:font script="Geor" typeface="Sylfaen"/>
+        <a:font script="Armn" typeface="Arial"/>
+        <a:font script="Bugi" typeface="Leelawadee UI"/>
+        <a:font script="Bopo" typeface="Microsoft JhengHei"/>
+        <a:font script="Java" typeface="Javanese Text"/>
+        <a:font script="Lisu" typeface="Segoe UI"/>
+        <a:font script="Mymr" typeface="Myanmar Text"/>
+        <a:font script="Nkoo" typeface="Ebrima"/>
+        <a:font script="Olck" typeface="Nirmala UI"/>
+        <a:font script="Osma" typeface="Ebrima"/>
+        <a:font script="Phag" typeface="Phagspa"/>
+        <a:font script="Syrn" typeface="Estrangelo Edessa"/>
+        <a:font script="Syrj" typeface="Estrangelo Edessa"/>
+        <a:font script="Syre" typeface="Estrangelo Edessa"/>
+        <a:font script="Sora" typeface="Nirmala UI"/>
+        <a:font script="Tale" typeface="Microsoft Tai Le"/>
+        <a:font script="Talu" typeface="Microsoft New Tai Lue"/>
+        <a:font script="Tfng" typeface="Ebrima"/>
+      </a:minorFont>
+    </a:fontScheme>
+    <a:fmtScheme name="Office">
+      <a:fillStyleLst>
+        <a:solidFill>
+          <a:schemeClr val="phClr"/>
+        </a:solidFill>
+        <a:gradFill rotWithShape="1">
+          <a:gsLst>
+            <a:gs pos="0">
+              <a:schemeClr val="phClr">
+                <a:lumMod val="110000"/>
+                <a:satMod val="105000"/>
+                <a:tint val="67000"/>
+              </a:schemeClr>
+            </a:gs>
+            <a:gs pos="50000">
+              <a:schemeClr val="phClr">
+                <a:lumMod val="105000"/>
+                <a:satMod val="103000"/>
+                <a:tint val="73000"/>
+              </a:schemeClr>
+            </a:gs>
+            <a:gs pos="100000">
+              <a:schemeClr val="phClr">
+                <a:lumMod val="105000"/>
+                <a:satMod val="109000"/>
+                <a:tint val="81000"/>
+              </a:schemeClr>
+            </a:gs>
+          </a:gsLst>
+          <a:lin ang="5400000" scaled="0"/>
+        </a:gradFill>
+        <a:gradFill rotWithShape="1">
+          <a:gsLst>
+            <a:gs pos="0">
+              <a:schemeClr val="phClr">
+                <a:satMod val="103000"/>
+                <a:lumMod val="102000"/>
+                <a:tint val="94000"/>
+              </a:schemeClr>
+            </a:gs>
+            <a:gs pos="50000">
+              <a:schemeClr val="phClr">
+                <a:satMod val="110000"/>
+                <a:lumMod val="100000"/>
+                <a:shade val="100000"/>
+              </a:schemeClr>
+            </a:gs>
+            <a:gs pos="100000">
+              <a:schemeClr val="phClr">
+                <a:lumMod val="99000"/>
+                <a:satMod val="120000"/>
+                <a:shade val="78000"/>
+              </a:schemeClr>
+            </a:gs>
+          </a:gsLst>
+          <a:lin ang="5400000" scaled="0"/>
+        </a:gradFill>
+      </a:fillStyleLst>
+      <a:lnStyleLst>
+        <a:ln w="12700" cap="flat" cmpd="sng" algn="ctr">
+          <a:solidFill>
+            <a:schemeClr val="phClr"/>
+          </a:solidFill>
+          <a:prstDash val="solid"/>
+          <a:miter lim="800000"/>
+        </a:ln>
+        <a:ln w="19050" cap="flat" cmpd="sng" algn="ctr">
+          <a:solidFill>
+            <a:schemeClr val="phClr"/>
+          </a:solidFill>
+          <a:prstDash val="solid"/>
+          <a:miter lim="800000"/>
+        </a:ln>
+        <a:ln w="25400" cap="flat" cmpd="sng" algn="ctr">
+          <a:solidFill>
+            <a:schemeClr val="phClr"/>
+          </a:solidFill>
+          <a:prstDash val="solid"/>
+          <a:miter lim="800000"/>
+        </a:ln>
+      </a:lnStyleLst>
+      <a:effectStyleLst>
+        <a:effectStyle>
+          <a:effectLst/>
+        </a:effectStyle>
+        <a:effectStyle>
+          <a:effectLst/>
+        </a:effectStyle>
+        <a:effectStyle>
+          <a:effectLst>
+            <a:outerShdw blurRad="57150" dist="19050" dir="5400000" algn="ctr" rotWithShape="0">
+              <a:srgbClr val="000000">
+                <a:alpha val="63000"/>
+              </a:srgbClr>
+            </a:outerShdw>
+          </a:effectLst>
+        </a:effectStyle>
+      </a:effectStyleLst>
+      <a:bgFillStyleLst>
+        <a:solidFill>
+          <a:schemeClr val="phClr"/>
+        </a:solidFill>
+        <a:solidFill>
+          <a:schemeClr val="phClr">
+            <a:tint val="95000"/>
+            <a:satMod val="170000"/>
+          </a:schemeClr>
+        </a:solidFill>
+        <a:gradFill rotWithShape="1">
+          <a:gsLst>
+            <a:gs pos="0">
+              <a:schemeClr val="phClr">
+                <a:tint val="93000"/>
+                <a:satMod val="150000"/>
+                <a:shade val="98000"/>
+                <a:lumMod val="102000"/>
+              </a:schemeClr>
+            </a:gs>
+            <a:gs pos="50000">
+              <a:schemeClr val="phClr">
+                <a:tint val="98000"/>
+                <a:satMod val="130000"/>
+                <a:shade val="90000"/>
+                <a:lumMod val="103000"/>
+              </a:schemeClr>
+            </a:gs>
+            <a:gs pos="100000">
+              <a:schemeClr val="phClr">
+                <a:shade val="63000"/>
+                <a:satMod val="120000"/>
+              </a:schemeClr>
+            </a:gs>
+          </a:gsLst>
+          <a:lin ang="5400000" scaled="0"/>
+        </a:gradFill>
+      </a:bgFillStyleLst>
+    </a:fmtScheme>
+  </a:themeElements>
+  <a:objectDefaults>
+    <a:lnDef>
+      <a:spPr/>
+      <a:bodyPr/>
+      <a:lstStyle/>
+      <a:style>
+        <a:lnRef idx="2">
+          <a:schemeClr val="accent1"/>
+        </a:lnRef>
+        <a:fillRef idx="0">
+          <a:schemeClr val="accent1"/>
+        </a:fillRef>
+        <a:effectRef idx="1">
+          <a:schemeClr val="accent1"/>
+        </a:effectRef>
+        <a:fontRef idx="minor">
+          <a:schemeClr val="tx1"/>
+        </a:fontRef>
+      </a:style>
+    </a:lnDef>
+  </a:objectDefaults>
+  <a:extraClrSchemeLst/>
+  <a:extLst>
+    <a:ext uri="{05A4C25C-085E-4340-85A3-A5531E510DB2}">
+      <thm15:themeFamily xmlns:thm15="http://schemas.microsoft.com/office/thememl/2012/main" name="Office Theme" id="{2E142A2C-CD16-42D6-873A-C26D2A0506FA}" vid="{1BDDFF52-6CD6-40A5-AB3C-68EB2F1E4D0A}"/>
+    </a:ext>
+  </a:extLst>
+</a:theme>
 </file>
--- a/docs/Verity-Supply-Chain-Finance-Overview.pptx
+++ b/docs/Verity-Supply-Chain-Finance-Overview.pptx
@@ -1,24 +1,24 @@
 
 <file path=ppt/presentation.xml><?xml version="1.0" encoding="utf-8"?>
-<p:presentation xmlns:a="http://schemas.openxmlformats.org/drawingml/2006/main" xmlns:r="http://schemas.openxmlformats.org/officeDocument/2006/relationships" xmlns:p="http://schemas.openxmlformats.org/presentationml/2006/main" saveSubsetFonts="1" autoCompressPictures="0">
+<p:presentation xmlns:a="http://schemas.openxmlformats.org/drawingml/2006/main" xmlns:r="http://schemas.openxmlformats.org/officeDocument/2006/relationships" xmlns:p="http://schemas.openxmlformats.org/presentationml/2006/main" xmlns:m="http://schemas.openxmlformats.org/officeDocument/2006/math" xmlns:w="http://schemas.openxmlformats.org/wordprocessingml/2006/main" autoCompressPictures="0" saveSubsetFonts="1">
   <p:sldMasterIdLst>
     <p:sldMasterId id="2147483648" r:id="rId1"/>
   </p:sldMasterIdLst>
   <p:notesMasterIdLst>
-    <p:notesMasterId r:id="rId7"/>
+    <p:notesMasterId r:id="rId9"/>
   </p:notesMasterIdLst>
   <p:sldIdLst>
-    <p:sldId id="256" r:id="rId2"/>
-    <p:sldId id="257" r:id="rId3"/>
-    <p:sldId id="258" r:id="rId4"/>
-    <p:sldId id="259" r:id="rId5"/>
-    <p:sldId id="260" r:id="rId6"/>
+    <p:sldId id="256" r:id="rId4"/>
+    <p:sldId id="257" r:id="rId5"/>
+    <p:sldId id="258" r:id="rId6"/>
+    <p:sldId id="259" r:id="rId7"/>
+    <p:sldId id="260" r:id="rId8"/>
   </p:sldIdLst>
   <p:sldSz cx="12192000" cy="6858000"/>
   <p:notesSz cx="6858000" cy="12192000"/>
   <p:defaultTextStyle>
-    <a:lvl1pPr marL="0" algn="l" defTabSz="914400" rtl="0" eaLnBrk="1" latinLnBrk="0" hangingPunct="1">
-      <a:defRPr sz="1800" kern="1200">
+    <a:lvl1pPr marL="0" algn="l" defTabSz="914400" rtl="0">
+      <a:defRPr sz="1800">
         <a:solidFill>
           <a:schemeClr val="tx1"/>
         </a:solidFill>
@@ -27,8 +27,8 @@
         <a:cs typeface="+mn-cs"/>
       </a:defRPr>
     </a:lvl1pPr>
-    <a:lvl2pPr marL="457200" algn="l" defTabSz="914400" rtl="0" eaLnBrk="1" latinLnBrk="0" hangingPunct="1">
-      <a:defRPr sz="1800" kern="1200">
+    <a:lvl2pPr marL="457200" algn="l" defTabSz="914400" rtl="0">
+      <a:defRPr sz="1800">
         <a:solidFill>
           <a:schemeClr val="tx1"/>
         </a:solidFill>
@@ -37,8 +37,8 @@
         <a:cs typeface="+mn-cs"/>
       </a:defRPr>
     </a:lvl2pPr>
-    <a:lvl3pPr marL="914400" algn="l" defTabSz="914400" rtl="0" eaLnBrk="1" latinLnBrk="0" hangingPunct="1">
-      <a:defRPr sz="1800" kern="1200">
+    <a:lvl3pPr marL="914400" algn="l" defTabSz="914400" rtl="0">
+      <a:defRPr sz="1800">
         <a:solidFill>
           <a:schemeClr val="tx1"/>
         </a:solidFill>
@@ -47,8 +47,8 @@
         <a:cs typeface="+mn-cs"/>
       </a:defRPr>
     </a:lvl3pPr>
-    <a:lvl4pPr marL="1371600" algn="l" defTabSz="914400" rtl="0" eaLnBrk="1" latinLnBrk="0" hangingPunct="1">
-      <a:defRPr sz="1800" kern="1200">
+    <a:lvl4pPr marL="1371600" algn="l" defTabSz="914400" rtl="0">
+      <a:defRPr sz="1800">
         <a:solidFill>
           <a:schemeClr val="tx1"/>
         </a:solidFill>
@@ -57,8 +57,8 @@
         <a:cs typeface="+mn-cs"/>
       </a:defRPr>
     </a:lvl4pPr>
-    <a:lvl5pPr marL="1828800" algn="l" defTabSz="914400" rtl="0" eaLnBrk="1" latinLnBrk="0" hangingPunct="1">
-      <a:defRPr sz="1800" kern="1200">
+    <a:lvl5pPr marL="1828800" algn="l" defTabSz="914400" rtl="0">
+      <a:defRPr sz="1800">
         <a:solidFill>
           <a:schemeClr val="tx1"/>
         </a:solidFill>
@@ -67,8 +67,8 @@
         <a:cs typeface="+mn-cs"/>
       </a:defRPr>
     </a:lvl5pPr>
-    <a:lvl6pPr marL="2286000" algn="l" defTabSz="914400" rtl="0" eaLnBrk="1" latinLnBrk="0" hangingPunct="1">
-      <a:defRPr sz="1800" kern="1200">
+    <a:lvl6pPr marL="2286000" algn="l" defTabSz="914400" rtl="0">
+      <a:defRPr sz="1800">
         <a:solidFill>
           <a:schemeClr val="tx1"/>
         </a:solidFill>
@@ -77,8 +77,8 @@
         <a:cs typeface="+mn-cs"/>
       </a:defRPr>
     </a:lvl6pPr>
-    <a:lvl7pPr marL="2743200" algn="l" defTabSz="914400" rtl="0" eaLnBrk="1" latinLnBrk="0" hangingPunct="1">
-      <a:defRPr sz="1800" kern="1200">
+    <a:lvl7pPr marL="2743200" algn="l" defTabSz="914400" rtl="0">
+      <a:defRPr sz="1800">
         <a:solidFill>
           <a:schemeClr val="tx1"/>
         </a:solidFill>
@@ -87,8 +87,8 @@
         <a:cs typeface="+mn-cs"/>
       </a:defRPr>
     </a:lvl7pPr>
-    <a:lvl8pPr marL="3200400" algn="l" defTabSz="914400" rtl="0" eaLnBrk="1" latinLnBrk="0" hangingPunct="1">
-      <a:defRPr sz="1800" kern="1200">
+    <a:lvl8pPr marL="3200400" algn="l" defTabSz="914400" rtl="0">
+      <a:defRPr sz="1800">
         <a:solidFill>
           <a:schemeClr val="tx1"/>
         </a:solidFill>
@@ -97,8 +97,8 @@
         <a:cs typeface="+mn-cs"/>
       </a:defRPr>
     </a:lvl8pPr>
-    <a:lvl9pPr marL="3657600" algn="l" defTabSz="914400" rtl="0" eaLnBrk="1" latinLnBrk="0" hangingPunct="1">
-      <a:defRPr sz="1800" kern="1200">
+    <a:lvl9pPr marL="3657600" algn="l" defTabSz="914400" rtl="0">
+      <a:defRPr sz="1800">
         <a:solidFill>
           <a:schemeClr val="tx1"/>
         </a:solidFill>
@@ -108,17 +108,12 @@
       </a:defRPr>
     </a:lvl9pPr>
   </p:defaultTextStyle>
-  <p:extLst>
-    <p:ext uri="{EFAFB233-063F-42B5-8137-9DF3F51BA10A}">
-      <p15:sldGuideLst xmlns:p15="http://schemas.microsoft.com/office/powerpoint/2012/main"/>
-    </p:ext>
-  </p:extLst>
 </p:presentation>
 </file>
 
 <file path=ppt/notesMasters/notesMaster1.xml><?xml version="1.0" encoding="utf-8"?>
 <p:notesMaster xmlns:a="http://schemas.openxmlformats.org/drawingml/2006/main" xmlns:r="http://schemas.openxmlformats.org/officeDocument/2006/relationships" xmlns:p="http://schemas.openxmlformats.org/presentationml/2006/main">
-  <p:cSld>
+  <p:cSld name="">
     <p:bg>
       <p:bgRef idx="1001">
         <a:schemeClr val="bg1"/>
@@ -130,7 +125,7 @@
         <p:cNvGrpSpPr/>
         <p:nvPr/>
       </p:nvGrpSpPr>
-      <p:grpSpPr>
+      <p:grpSpPr bwMode="auto">
         <a:xfrm>
           <a:off x="0" y="0"/>
           <a:ext cx="0" cy="0"/>
@@ -139,16 +134,11 @@
         </a:xfrm>
       </p:grpSpPr>
     </p:spTree>
-    <p:extLst>
-      <p:ext uri="{BB962C8B-B14F-4D97-AF65-F5344CB8AC3E}">
-        <p14:creationId xmlns:p14="http://schemas.microsoft.com/office/powerpoint/2010/main" val="3312869088"/>
-      </p:ext>
-    </p:extLst>
   </p:cSld>
   <p:clrMap bg1="lt1" tx1="dk1" bg2="lt2" tx2="dk2" accent1="accent1" accent2="accent2" accent3="accent3" accent4="accent4" accent5="accent5" accent6="accent6" hlink="hlink" folHlink="folHlink"/>
   <p:notesStyle>
-    <a:lvl1pPr marL="0" algn="l" defTabSz="914400" rtl="0" eaLnBrk="1" latinLnBrk="0" hangingPunct="1">
-      <a:defRPr sz="1200" kern="1200">
+    <a:lvl1pPr marL="0" algn="l" defTabSz="914400" rtl="0">
+      <a:defRPr sz="1200">
         <a:solidFill>
           <a:schemeClr val="tx1"/>
         </a:solidFill>
@@ -157,8 +147,8 @@
         <a:cs typeface="+mn-cs"/>
       </a:defRPr>
     </a:lvl1pPr>
-    <a:lvl2pPr marL="457200" algn="l" defTabSz="914400" rtl="0" eaLnBrk="1" latinLnBrk="0" hangingPunct="1">
-      <a:defRPr sz="1200" kern="1200">
+    <a:lvl2pPr marL="457200" algn="l" defTabSz="914400" rtl="0">
+      <a:defRPr sz="1200">
         <a:solidFill>
           <a:schemeClr val="tx1"/>
         </a:solidFill>
@@ -167,8 +157,8 @@
         <a:cs typeface="+mn-cs"/>
       </a:defRPr>
     </a:lvl2pPr>
-    <a:lvl3pPr marL="914400" algn="l" defTabSz="914400" rtl="0" eaLnBrk="1" latinLnBrk="0" hangingPunct="1">
-      <a:defRPr sz="1200" kern="1200">
+    <a:lvl3pPr marL="914400" algn="l" defTabSz="914400" rtl="0">
+      <a:defRPr sz="1200">
         <a:solidFill>
           <a:schemeClr val="tx1"/>
         </a:solidFill>
@@ -177,8 +167,8 @@
         <a:cs typeface="+mn-cs"/>
       </a:defRPr>
     </a:lvl3pPr>
-    <a:lvl4pPr marL="1371600" algn="l" defTabSz="914400" rtl="0" eaLnBrk="1" latinLnBrk="0" hangingPunct="1">
-      <a:defRPr sz="1200" kern="1200">
+    <a:lvl4pPr marL="1371600" algn="l" defTabSz="914400" rtl="0">
+      <a:defRPr sz="1200">
         <a:solidFill>
           <a:schemeClr val="tx1"/>
         </a:solidFill>
@@ -187,8 +177,8 @@
         <a:cs typeface="+mn-cs"/>
       </a:defRPr>
     </a:lvl4pPr>
-    <a:lvl5pPr marL="1828800" algn="l" defTabSz="914400" rtl="0" eaLnBrk="1" latinLnBrk="0" hangingPunct="1">
-      <a:defRPr sz="1200" kern="1200">
+    <a:lvl5pPr marL="1828800" algn="l" defTabSz="914400" rtl="0">
+      <a:defRPr sz="1200">
         <a:solidFill>
           <a:schemeClr val="tx1"/>
         </a:solidFill>
@@ -197,8 +187,8 @@
         <a:cs typeface="+mn-cs"/>
       </a:defRPr>
     </a:lvl5pPr>
-    <a:lvl6pPr marL="2286000" algn="l" defTabSz="914400" rtl="0" eaLnBrk="1" latinLnBrk="0" hangingPunct="1">
-      <a:defRPr sz="1200" kern="1200">
+    <a:lvl6pPr marL="2286000" algn="l" defTabSz="914400" rtl="0">
+      <a:defRPr sz="1200">
         <a:solidFill>
           <a:schemeClr val="tx1"/>
         </a:solidFill>
@@ -207,8 +197,8 @@
         <a:cs typeface="+mn-cs"/>
       </a:defRPr>
     </a:lvl6pPr>
-    <a:lvl7pPr marL="2743200" algn="l" defTabSz="914400" rtl="0" eaLnBrk="1" latinLnBrk="0" hangingPunct="1">
-      <a:defRPr sz="1200" kern="1200">
+    <a:lvl7pPr marL="2743200" algn="l" defTabSz="914400" rtl="0">
+      <a:defRPr sz="1200">
         <a:solidFill>
           <a:schemeClr val="tx1"/>
         </a:solidFill>
@@ -217,8 +207,8 @@
         <a:cs typeface="+mn-cs"/>
       </a:defRPr>
     </a:lvl7pPr>
-    <a:lvl8pPr marL="3200400" algn="l" defTabSz="914400" rtl="0" eaLnBrk="1" latinLnBrk="0" hangingPunct="1">
-      <a:defRPr sz="1200" kern="1200">
+    <a:lvl8pPr marL="3200400" algn="l" defTabSz="914400" rtl="0">
+      <a:defRPr sz="1200">
         <a:solidFill>
           <a:schemeClr val="tx1"/>
         </a:solidFill>
@@ -227,8 +217,8 @@
         <a:cs typeface="+mn-cs"/>
       </a:defRPr>
     </a:lvl8pPr>
-    <a:lvl9pPr marL="3657600" algn="l" defTabSz="914400" rtl="0" eaLnBrk="1" latinLnBrk="0" hangingPunct="1">
-      <a:defRPr sz="1200" kern="1200">
+    <a:lvl9pPr marL="3657600" algn="l" defTabSz="914400" rtl="0">
+      <a:defRPr sz="1200">
         <a:solidFill>
           <a:schemeClr val="tx1"/>
         </a:solidFill>
@@ -242,15 +232,15 @@
 </file>
 
 <file path=ppt/notesSlides/notesSlide1.xml><?xml version="1.0" encoding="utf-8"?>
-<p:notes xmlns:a="http://schemas.openxmlformats.org/drawingml/2006/main" xmlns:r="http://schemas.openxmlformats.org/officeDocument/2006/relationships" xmlns:p="http://schemas.openxmlformats.org/presentationml/2006/main">
-  <p:cSld>
+<p:notes xmlns:a="http://schemas.openxmlformats.org/drawingml/2006/main" xmlns:r="http://schemas.openxmlformats.org/officeDocument/2006/relationships" xmlns:p="http://schemas.openxmlformats.org/presentationml/2006/main" xmlns:m="http://schemas.openxmlformats.org/officeDocument/2006/math" xmlns:w="http://schemas.openxmlformats.org/wordprocessingml/2006/main">
+  <p:cSld name="">
     <p:spTree>
       <p:nvGrpSpPr>
         <p:cNvPr id="1" name=""/>
         <p:cNvGrpSpPr/>
         <p:nvPr/>
       </p:nvGrpSpPr>
-      <p:grpSpPr>
+      <p:grpSpPr bwMode="auto">
         <a:xfrm>
           <a:off x="0" y="0"/>
           <a:ext cx="0" cy="0"/>
@@ -260,19 +250,19 @@
       </p:grpSpPr>
       <p:sp>
         <p:nvSpPr>
-          <p:cNvPr id="2" name="Slide Image Placeholder 1"/>
+          <p:cNvPr id="355267211" name="Slide Image Placeholder 1"/>
           <p:cNvSpPr>
-            <a:spLocks noGrp="1" noRot="1" noChangeAspect="1"/>
+            <a:spLocks noChangeAspect="1" noGrp="1" noRot="1"/>
           </p:cNvSpPr>
           <p:nvPr>
             <p:ph type="sldImg"/>
           </p:nvPr>
         </p:nvSpPr>
-        <p:spPr/>
-      </p:sp>
-      <p:sp>
-        <p:nvSpPr>
-          <p:cNvPr id="3" name="Notes Placeholder 2"/>
+        <p:spPr bwMode="auto"/>
+      </p:sp>
+      <p:sp>
+        <p:nvSpPr>
+          <p:cNvPr id="309498561" name="Notes Placeholder 2"/>
           <p:cNvSpPr>
             <a:spLocks noGrp="1"/>
           </p:cNvSpPr>
@@ -280,18 +270,21 @@
             <p:ph type="body" idx="1"/>
           </p:nvPr>
         </p:nvSpPr>
-        <p:spPr/>
+        <p:spPr bwMode="auto"/>
         <p:txBody>
           <a:bodyPr/>
           <a:lstStyle/>
           <a:p>
-            <a:endParaRPr lang="en-US" dirty="0"/>
-          </a:p>
-        </p:txBody>
-      </p:sp>
-      <p:sp>
-        <p:nvSpPr>
-          <p:cNvPr id="4" name="Slide Number Placeholder 3"/>
+            <a:pPr>
+              <a:defRPr/>
+            </a:pPr>
+            <a:endParaRPr lang="en-US"/>
+          </a:p>
+        </p:txBody>
+      </p:sp>
+      <p:sp>
+        <p:nvSpPr>
+          <p:cNvPr id="1548690" name="Slide Number Placeholder 3"/>
           <p:cNvSpPr>
             <a:spLocks noGrp="1"/>
           </p:cNvSpPr>
@@ -299,11 +292,14 @@
             <p:ph type="sldNum" sz="quarter" idx="10"/>
           </p:nvPr>
         </p:nvSpPr>
-        <p:spPr/>
+        <p:spPr bwMode="auto"/>
         <p:txBody>
           <a:bodyPr/>
           <a:lstStyle/>
           <a:p>
+            <a:pPr>
+              <a:defRPr/>
+            </a:pPr>
             <a:fld id="{F7021451-1387-4CA6-816F-3879F97B5CBC}" type="slidenum">
               <a:rPr lang="en-US"/>
               <a:t>1</a:t>
@@ -313,11 +309,6 @@
         </p:txBody>
       </p:sp>
     </p:spTree>
-    <p:extLst>
-      <p:ext uri="{BB962C8B-B14F-4D97-AF65-F5344CB8AC3E}">
-        <p14:creationId xmlns:p14="http://schemas.microsoft.com/office/powerpoint/2010/main" val="1024086991"/>
-      </p:ext>
-    </p:extLst>
   </p:cSld>
   <p:clrMapOvr>
     <a:masterClrMapping/>
@@ -326,15 +317,15 @@
 </file>
 
 <file path=ppt/notesSlides/notesSlide2.xml><?xml version="1.0" encoding="utf-8"?>
-<p:notes xmlns:a="http://schemas.openxmlformats.org/drawingml/2006/main" xmlns:r="http://schemas.openxmlformats.org/officeDocument/2006/relationships" xmlns:p="http://schemas.openxmlformats.org/presentationml/2006/main">
-  <p:cSld>
+<p:notes xmlns:a="http://schemas.openxmlformats.org/drawingml/2006/main" xmlns:r="http://schemas.openxmlformats.org/officeDocument/2006/relationships" xmlns:p="http://schemas.openxmlformats.org/presentationml/2006/main" xmlns:m="http://schemas.openxmlformats.org/officeDocument/2006/math" xmlns:w="http://schemas.openxmlformats.org/wordprocessingml/2006/main">
+  <p:cSld name="">
     <p:spTree>
       <p:nvGrpSpPr>
         <p:cNvPr id="1" name=""/>
         <p:cNvGrpSpPr/>
         <p:nvPr/>
       </p:nvGrpSpPr>
-      <p:grpSpPr>
+      <p:grpSpPr bwMode="auto">
         <a:xfrm>
           <a:off x="0" y="0"/>
           <a:ext cx="0" cy="0"/>
@@ -344,19 +335,19 @@
       </p:grpSpPr>
       <p:sp>
         <p:nvSpPr>
-          <p:cNvPr id="2" name="Slide Image Placeholder 1"/>
+          <p:cNvPr id="1830466426" name="Slide Image Placeholder 1"/>
           <p:cNvSpPr>
-            <a:spLocks noGrp="1" noRot="1" noChangeAspect="1"/>
+            <a:spLocks noChangeAspect="1" noGrp="1" noRot="1"/>
           </p:cNvSpPr>
           <p:nvPr>
             <p:ph type="sldImg"/>
           </p:nvPr>
         </p:nvSpPr>
-        <p:spPr/>
-      </p:sp>
-      <p:sp>
-        <p:nvSpPr>
-          <p:cNvPr id="3" name="Notes Placeholder 2"/>
+        <p:spPr bwMode="auto"/>
+      </p:sp>
+      <p:sp>
+        <p:nvSpPr>
+          <p:cNvPr id="1635820443" name="Notes Placeholder 2"/>
           <p:cNvSpPr>
             <a:spLocks noGrp="1"/>
           </p:cNvSpPr>
@@ -364,18 +355,21 @@
             <p:ph type="body" idx="1"/>
           </p:nvPr>
         </p:nvSpPr>
-        <p:spPr/>
+        <p:spPr bwMode="auto"/>
         <p:txBody>
           <a:bodyPr/>
           <a:lstStyle/>
           <a:p>
-            <a:endParaRPr lang="en-US" dirty="0"/>
-          </a:p>
-        </p:txBody>
-      </p:sp>
-      <p:sp>
-        <p:nvSpPr>
-          <p:cNvPr id="4" name="Slide Number Placeholder 3"/>
+            <a:pPr>
+              <a:defRPr/>
+            </a:pPr>
+            <a:endParaRPr lang="en-US"/>
+          </a:p>
+        </p:txBody>
+      </p:sp>
+      <p:sp>
+        <p:nvSpPr>
+          <p:cNvPr id="1006542009" name="Slide Number Placeholder 3"/>
           <p:cNvSpPr>
             <a:spLocks noGrp="1"/>
           </p:cNvSpPr>
@@ -383,11 +377,14 @@
             <p:ph type="sldNum" sz="quarter" idx="10"/>
           </p:nvPr>
         </p:nvSpPr>
-        <p:spPr/>
+        <p:spPr bwMode="auto"/>
         <p:txBody>
           <a:bodyPr/>
           <a:lstStyle/>
           <a:p>
+            <a:pPr>
+              <a:defRPr/>
+            </a:pPr>
             <a:fld id="{F7021451-1387-4CA6-816F-3879F97B5CBC}" type="slidenum">
               <a:rPr lang="en-US"/>
               <a:t>2</a:t>
@@ -397,11 +394,6 @@
         </p:txBody>
       </p:sp>
     </p:spTree>
-    <p:extLst>
-      <p:ext uri="{BB962C8B-B14F-4D97-AF65-F5344CB8AC3E}">
-        <p14:creationId xmlns:p14="http://schemas.microsoft.com/office/powerpoint/2010/main" val="1024086991"/>
-      </p:ext>
-    </p:extLst>
   </p:cSld>
   <p:clrMapOvr>
     <a:masterClrMapping/>
@@ -410,15 +402,15 @@
 </file>
 
 <file path=ppt/notesSlides/notesSlide3.xml><?xml version="1.0" encoding="utf-8"?>
-<p:notes xmlns:a="http://schemas.openxmlformats.org/drawingml/2006/main" xmlns:r="http://schemas.openxmlformats.org/officeDocument/2006/relationships" xmlns:p="http://schemas.openxmlformats.org/presentationml/2006/main">
-  <p:cSld>
+<p:notes xmlns:a="http://schemas.openxmlformats.org/drawingml/2006/main" xmlns:r="http://schemas.openxmlformats.org/officeDocument/2006/relationships" xmlns:p="http://schemas.openxmlformats.org/presentationml/2006/main" xmlns:m="http://schemas.openxmlformats.org/officeDocument/2006/math" xmlns:w="http://schemas.openxmlformats.org/wordprocessingml/2006/main">
+  <p:cSld name="">
     <p:spTree>
       <p:nvGrpSpPr>
         <p:cNvPr id="1" name=""/>
         <p:cNvGrpSpPr/>
         <p:nvPr/>
       </p:nvGrpSpPr>
-      <p:grpSpPr>
+      <p:grpSpPr bwMode="auto">
         <a:xfrm>
           <a:off x="0" y="0"/>
           <a:ext cx="0" cy="0"/>
@@ -428,19 +420,19 @@
       </p:grpSpPr>
       <p:sp>
         <p:nvSpPr>
-          <p:cNvPr id="2" name="Slide Image Placeholder 1"/>
+          <p:cNvPr id="1797013108" name="Slide Image Placeholder 1"/>
           <p:cNvSpPr>
-            <a:spLocks noGrp="1" noRot="1" noChangeAspect="1"/>
+            <a:spLocks noChangeAspect="1" noGrp="1" noRot="1"/>
           </p:cNvSpPr>
           <p:nvPr>
             <p:ph type="sldImg"/>
           </p:nvPr>
         </p:nvSpPr>
-        <p:spPr/>
-      </p:sp>
-      <p:sp>
-        <p:nvSpPr>
-          <p:cNvPr id="3" name="Notes Placeholder 2"/>
+        <p:spPr bwMode="auto"/>
+      </p:sp>
+      <p:sp>
+        <p:nvSpPr>
+          <p:cNvPr id="1573583398" name="Notes Placeholder 2"/>
           <p:cNvSpPr>
             <a:spLocks noGrp="1"/>
           </p:cNvSpPr>
@@ -448,18 +440,21 @@
             <p:ph type="body" idx="1"/>
           </p:nvPr>
         </p:nvSpPr>
-        <p:spPr/>
+        <p:spPr bwMode="auto"/>
         <p:txBody>
           <a:bodyPr/>
           <a:lstStyle/>
           <a:p>
-            <a:endParaRPr lang="en-US" dirty="0"/>
-          </a:p>
-        </p:txBody>
-      </p:sp>
-      <p:sp>
-        <p:nvSpPr>
-          <p:cNvPr id="4" name="Slide Number Placeholder 3"/>
+            <a:pPr>
+              <a:defRPr/>
+            </a:pPr>
+            <a:endParaRPr lang="en-US"/>
+          </a:p>
+        </p:txBody>
+      </p:sp>
+      <p:sp>
+        <p:nvSpPr>
+          <p:cNvPr id="1641873501" name="Slide Number Placeholder 3"/>
           <p:cNvSpPr>
             <a:spLocks noGrp="1"/>
           </p:cNvSpPr>
@@ -467,11 +462,14 @@
             <p:ph type="sldNum" sz="quarter" idx="10"/>
           </p:nvPr>
         </p:nvSpPr>
-        <p:spPr/>
+        <p:spPr bwMode="auto"/>
         <p:txBody>
           <a:bodyPr/>
           <a:lstStyle/>
           <a:p>
+            <a:pPr>
+              <a:defRPr/>
+            </a:pPr>
             <a:fld id="{F7021451-1387-4CA6-816F-3879F97B5CBC}" type="slidenum">
               <a:rPr lang="en-US"/>
               <a:t>3</a:t>
@@ -481,11 +479,6 @@
         </p:txBody>
       </p:sp>
     </p:spTree>
-    <p:extLst>
-      <p:ext uri="{BB962C8B-B14F-4D97-AF65-F5344CB8AC3E}">
-        <p14:creationId xmlns:p14="http://schemas.microsoft.com/office/powerpoint/2010/main" val="1024086991"/>
-      </p:ext>
-    </p:extLst>
   </p:cSld>
   <p:clrMapOvr>
     <a:masterClrMapping/>
@@ -494,15 +487,15 @@
 </file>
 
 <file path=ppt/notesSlides/notesSlide4.xml><?xml version="1.0" encoding="utf-8"?>
-<p:notes xmlns:a="http://schemas.openxmlformats.org/drawingml/2006/main" xmlns:r="http://schemas.openxmlformats.org/officeDocument/2006/relationships" xmlns:p="http://schemas.openxmlformats.org/presentationml/2006/main">
-  <p:cSld>
+<p:notes xmlns:a="http://schemas.openxmlformats.org/drawingml/2006/main" xmlns:r="http://schemas.openxmlformats.org/officeDocument/2006/relationships" xmlns:p="http://schemas.openxmlformats.org/presentationml/2006/main" xmlns:m="http://schemas.openxmlformats.org/officeDocument/2006/math" xmlns:w="http://schemas.openxmlformats.org/wordprocessingml/2006/main">
+  <p:cSld name="">
     <p:spTree>
       <p:nvGrpSpPr>
         <p:cNvPr id="1" name=""/>
         <p:cNvGrpSpPr/>
         <p:nvPr/>
       </p:nvGrpSpPr>
-      <p:grpSpPr>
+      <p:grpSpPr bwMode="auto">
         <a:xfrm>
           <a:off x="0" y="0"/>
           <a:ext cx="0" cy="0"/>
@@ -512,19 +505,19 @@
       </p:grpSpPr>
       <p:sp>
         <p:nvSpPr>
-          <p:cNvPr id="2" name="Slide Image Placeholder 1"/>
+          <p:cNvPr id="1820338639" name="Slide Image Placeholder 1"/>
           <p:cNvSpPr>
-            <a:spLocks noGrp="1" noRot="1" noChangeAspect="1"/>
+            <a:spLocks noChangeAspect="1" noGrp="1" noRot="1"/>
           </p:cNvSpPr>
           <p:nvPr>
             <p:ph type="sldImg"/>
           </p:nvPr>
         </p:nvSpPr>
-        <p:spPr/>
-      </p:sp>
-      <p:sp>
-        <p:nvSpPr>
-          <p:cNvPr id="3" name="Notes Placeholder 2"/>
+        <p:spPr bwMode="auto"/>
+      </p:sp>
+      <p:sp>
+        <p:nvSpPr>
+          <p:cNvPr id="1469016711" name="Notes Placeholder 2"/>
           <p:cNvSpPr>
             <a:spLocks noGrp="1"/>
           </p:cNvSpPr>
@@ -532,18 +525,21 @@
             <p:ph type="body" idx="1"/>
           </p:nvPr>
         </p:nvSpPr>
-        <p:spPr/>
+        <p:spPr bwMode="auto"/>
         <p:txBody>
           <a:bodyPr/>
           <a:lstStyle/>
           <a:p>
-            <a:endParaRPr lang="en-US" dirty="0"/>
-          </a:p>
-        </p:txBody>
-      </p:sp>
-      <p:sp>
-        <p:nvSpPr>
-          <p:cNvPr id="4" name="Slide Number Placeholder 3"/>
+            <a:pPr>
+              <a:defRPr/>
+            </a:pPr>
+            <a:endParaRPr lang="en-US"/>
+          </a:p>
+        </p:txBody>
+      </p:sp>
+      <p:sp>
+        <p:nvSpPr>
+          <p:cNvPr id="2130786894" name="Slide Number Placeholder 3"/>
           <p:cNvSpPr>
             <a:spLocks noGrp="1"/>
           </p:cNvSpPr>
@@ -551,11 +547,14 @@
             <p:ph type="sldNum" sz="quarter" idx="10"/>
           </p:nvPr>
         </p:nvSpPr>
-        <p:spPr/>
+        <p:spPr bwMode="auto"/>
         <p:txBody>
           <a:bodyPr/>
           <a:lstStyle/>
           <a:p>
+            <a:pPr>
+              <a:defRPr/>
+            </a:pPr>
             <a:fld id="{F7021451-1387-4CA6-816F-3879F97B5CBC}" type="slidenum">
               <a:rPr lang="en-US"/>
               <a:t>4</a:t>
@@ -565,11 +564,6 @@
         </p:txBody>
       </p:sp>
     </p:spTree>
-    <p:extLst>
-      <p:ext uri="{BB962C8B-B14F-4D97-AF65-F5344CB8AC3E}">
-        <p14:creationId xmlns:p14="http://schemas.microsoft.com/office/powerpoint/2010/main" val="1024086991"/>
-      </p:ext>
-    </p:extLst>
   </p:cSld>
   <p:clrMapOvr>
     <a:masterClrMapping/>
@@ -578,15 +572,15 @@
 </file>
 
 <file path=ppt/notesSlides/notesSlide5.xml><?xml version="1.0" encoding="utf-8"?>
-<p:notes xmlns:a="http://schemas.openxmlformats.org/drawingml/2006/main" xmlns:r="http://schemas.openxmlformats.org/officeDocument/2006/relationships" xmlns:p="http://schemas.openxmlformats.org/presentationml/2006/main">
-  <p:cSld>
+<p:notes xmlns:a="http://schemas.openxmlformats.org/drawingml/2006/main" xmlns:r="http://schemas.openxmlformats.org/officeDocument/2006/relationships" xmlns:p="http://schemas.openxmlformats.org/presentationml/2006/main" xmlns:m="http://schemas.openxmlformats.org/officeDocument/2006/math" xmlns:w="http://schemas.openxmlformats.org/wordprocessingml/2006/main">
+  <p:cSld name="">
     <p:spTree>
       <p:nvGrpSpPr>
         <p:cNvPr id="1" name=""/>
         <p:cNvGrpSpPr/>
         <p:nvPr/>
       </p:nvGrpSpPr>
-      <p:grpSpPr>
+      <p:grpSpPr bwMode="auto">
         <a:xfrm>
           <a:off x="0" y="0"/>
           <a:ext cx="0" cy="0"/>
@@ -596,19 +590,19 @@
       </p:grpSpPr>
       <p:sp>
         <p:nvSpPr>
-          <p:cNvPr id="2" name="Slide Image Placeholder 1"/>
+          <p:cNvPr id="560782073" name="Slide Image Placeholder 1"/>
           <p:cNvSpPr>
-            <a:spLocks noGrp="1" noRot="1" noChangeAspect="1"/>
+            <a:spLocks noChangeAspect="1" noGrp="1" noRot="1"/>
           </p:cNvSpPr>
           <p:nvPr>
             <p:ph type="sldImg"/>
           </p:nvPr>
         </p:nvSpPr>
-        <p:spPr/>
-      </p:sp>
-      <p:sp>
-        <p:nvSpPr>
-          <p:cNvPr id="3" name="Notes Placeholder 2"/>
+        <p:spPr bwMode="auto"/>
+      </p:sp>
+      <p:sp>
+        <p:nvSpPr>
+          <p:cNvPr id="918600871" name="Notes Placeholder 2"/>
           <p:cNvSpPr>
             <a:spLocks noGrp="1"/>
           </p:cNvSpPr>
@@ -616,18 +610,21 @@
             <p:ph type="body" idx="1"/>
           </p:nvPr>
         </p:nvSpPr>
-        <p:spPr/>
+        <p:spPr bwMode="auto"/>
         <p:txBody>
           <a:bodyPr/>
           <a:lstStyle/>
           <a:p>
-            <a:endParaRPr lang="en-US" dirty="0"/>
-          </a:p>
-        </p:txBody>
-      </p:sp>
-      <p:sp>
-        <p:nvSpPr>
-          <p:cNvPr id="4" name="Slide Number Placeholder 3"/>
+            <a:pPr>
+              <a:defRPr/>
+            </a:pPr>
+            <a:endParaRPr lang="en-US"/>
+          </a:p>
+        </p:txBody>
+      </p:sp>
+      <p:sp>
+        <p:nvSpPr>
+          <p:cNvPr id="2007318094" name="Slide Number Placeholder 3"/>
           <p:cNvSpPr>
             <a:spLocks noGrp="1"/>
           </p:cNvSpPr>
@@ -635,11 +632,14 @@
             <p:ph type="sldNum" sz="quarter" idx="10"/>
           </p:nvPr>
         </p:nvSpPr>
-        <p:spPr/>
+        <p:spPr bwMode="auto"/>
         <p:txBody>
           <a:bodyPr/>
           <a:lstStyle/>
           <a:p>
+            <a:pPr>
+              <a:defRPr/>
+            </a:pPr>
             <a:fld id="{F7021451-1387-4CA6-816F-3879F97B5CBC}" type="slidenum">
               <a:rPr lang="en-US"/>
               <a:t>5</a:t>
@@ -649,11 +649,6 @@
         </p:txBody>
       </p:sp>
     </p:spTree>
-    <p:extLst>
-      <p:ext uri="{BB962C8B-B14F-4D97-AF65-F5344CB8AC3E}">
-        <p14:creationId xmlns:p14="http://schemas.microsoft.com/office/powerpoint/2010/main" val="1024086991"/>
-      </p:ext>
-    </p:extLst>
   </p:cSld>
   <p:clrMapOvr>
     <a:masterClrMapping/>
@@ -662,7 +657,7 @@
 </file>
 
 <file path=ppt/slideLayouts/slideLayout1.xml><?xml version="1.0" encoding="utf-8"?>
-<p:sldLayout xmlns:a="http://schemas.openxmlformats.org/drawingml/2006/main" xmlns:r="http://schemas.openxmlformats.org/officeDocument/2006/relationships" xmlns:p="http://schemas.openxmlformats.org/presentationml/2006/main" preserve="1">
+<p:sldLayout xmlns:a="http://schemas.openxmlformats.org/drawingml/2006/main" xmlns:r="http://schemas.openxmlformats.org/officeDocument/2006/relationships" xmlns:p="http://schemas.openxmlformats.org/presentationml/2006/main" xmlns:m="http://schemas.openxmlformats.org/officeDocument/2006/math" xmlns:w="http://schemas.openxmlformats.org/wordprocessingml/2006/main" matchingName="" preserve="1" showMasterPhAnim="0" showMasterSp="1" userDrawn="1">
   <p:cSld name="DEFAULT">
     <p:bg>
       <p:bgRef idx="1001">
@@ -675,7 +670,7 @@
         <p:cNvGrpSpPr/>
         <p:nvPr/>
       </p:nvGrpSpPr>
-      <p:grpSpPr>
+      <p:grpSpPr bwMode="auto">
         <a:xfrm>
           <a:off x="0" y="0"/>
           <a:ext cx="0" cy="0"/>
@@ -692,8 +687,8 @@
 </file>
 
 <file path=ppt/slideMasters/slideMaster1.xml><?xml version="1.0" encoding="utf-8"?>
-<p:sldMaster xmlns:a="http://schemas.openxmlformats.org/drawingml/2006/main" xmlns:r="http://schemas.openxmlformats.org/officeDocument/2006/relationships" xmlns:p="http://schemas.openxmlformats.org/presentationml/2006/main">
-  <p:cSld>
+<p:sldMaster xmlns:a="http://schemas.openxmlformats.org/drawingml/2006/main" xmlns:r="http://schemas.openxmlformats.org/officeDocument/2006/relationships" xmlns:p="http://schemas.openxmlformats.org/presentationml/2006/main" xmlns:m="http://schemas.openxmlformats.org/officeDocument/2006/math" xmlns:w="http://schemas.openxmlformats.org/wordprocessingml/2006/main" preserve="0">
+  <p:cSld name="">
     <p:bg>
       <p:bgRef idx="1001">
         <a:schemeClr val="bg1"/>
@@ -705,7 +700,7 @@
         <p:cNvGrpSpPr/>
         <p:nvPr/>
       </p:nvGrpSpPr>
-      <p:grpSpPr>
+      <p:grpSpPr bwMode="auto">
         <a:xfrm>
           <a:off x="0" y="0"/>
           <a:ext cx="0" cy="0"/>
@@ -719,15 +714,15 @@
   <p:sldLayoutIdLst>
     <p:sldLayoutId id="2147483649" r:id="rId1"/>
   </p:sldLayoutIdLst>
-  <p:hf sldNum="0" hdr="0" ftr="0" dt="0"/>
+  <p:hf dt="0" ftr="0" hdr="0" sldNum="0"/>
   <p:txStyles>
     <p:titleStyle>
-      <a:lvl1pPr algn="ctr" defTabSz="914400" rtl="0" eaLnBrk="1" latinLnBrk="0" hangingPunct="1">
+      <a:lvl1pPr algn="ctr" defTabSz="914400" rtl="0">
         <a:spcBef>
-          <a:spcPct val="0"/>
+          <a:spcPts val="0"/>
         </a:spcBef>
         <a:buNone/>
-        <a:defRPr sz="4400" kern="1200">
+        <a:defRPr sz="4400">
           <a:solidFill>
             <a:schemeClr val="tx1"/>
           </a:solidFill>
@@ -738,13 +733,13 @@
       </a:lvl1pPr>
     </p:titleStyle>
     <p:bodyStyle>
-      <a:lvl1pPr marL="342900" indent="-342900" algn="l" defTabSz="914400" rtl="0" eaLnBrk="1" latinLnBrk="0" hangingPunct="1">
+      <a:lvl1pPr marL="342900" indent="-342900" algn="l" defTabSz="914400" rtl="0">
         <a:spcBef>
-          <a:spcPct val="20000"/>
+          <a:spcPts val="0"/>
         </a:spcBef>
-        <a:buFont typeface="Arial" pitchFamily="34" charset="0"/>
+        <a:buFont typeface="Arial"/>
         <a:buChar char="•"/>
-        <a:defRPr sz="3200" kern="1200">
+        <a:defRPr sz="3200">
           <a:solidFill>
             <a:schemeClr val="tx1"/>
           </a:solidFill>
@@ -753,13 +748,13 @@
           <a:cs typeface="+mn-cs"/>
         </a:defRPr>
       </a:lvl1pPr>
-      <a:lvl2pPr marL="742950" indent="-285750" algn="l" defTabSz="914400" rtl="0" eaLnBrk="1" latinLnBrk="0" hangingPunct="1">
+      <a:lvl2pPr marL="742950" indent="-285750" algn="l" defTabSz="914400" rtl="0">
         <a:spcBef>
-          <a:spcPct val="20000"/>
+          <a:spcPts val="0"/>
         </a:spcBef>
-        <a:buFont typeface="Arial" pitchFamily="34" charset="0"/>
+        <a:buFont typeface="Arial"/>
         <a:buChar char="–"/>
-        <a:defRPr sz="2800" kern="1200">
+        <a:defRPr sz="2800">
           <a:solidFill>
             <a:schemeClr val="tx1"/>
           </a:solidFill>
@@ -768,13 +763,13 @@
           <a:cs typeface="+mn-cs"/>
         </a:defRPr>
       </a:lvl2pPr>
-      <a:lvl3pPr marL="1143000" indent="-228600" algn="l" defTabSz="914400" rtl="0" eaLnBrk="1" latinLnBrk="0" hangingPunct="1">
+      <a:lvl3pPr marL="1143000" indent="-228600" algn="l" defTabSz="914400" rtl="0">
         <a:spcBef>
-          <a:spcPct val="20000"/>
+          <a:spcPts val="0"/>
         </a:spcBef>
-        <a:buFont typeface="Arial" pitchFamily="34" charset="0"/>
+        <a:buFont typeface="Arial"/>
         <a:buChar char="•"/>
-        <a:defRPr sz="2400" kern="1200">
+        <a:defRPr sz="2400">
           <a:solidFill>
             <a:schemeClr val="tx1"/>
           </a:solidFill>
@@ -783,13 +778,13 @@
           <a:cs typeface="+mn-cs"/>
         </a:defRPr>
       </a:lvl3pPr>
-      <a:lvl4pPr marL="1600200" indent="-228600" algn="l" defTabSz="914400" rtl="0" eaLnBrk="1" latinLnBrk="0" hangingPunct="1">
+      <a:lvl4pPr marL="1600200" indent="-228600" algn="l" defTabSz="914400" rtl="0">
         <a:spcBef>
-          <a:spcPct val="20000"/>
+          <a:spcPts val="0"/>
         </a:spcBef>
-        <a:buFont typeface="Arial" pitchFamily="34" charset="0"/>
+        <a:buFont typeface="Arial"/>
         <a:buChar char="–"/>
-        <a:defRPr sz="2000" kern="1200">
+        <a:defRPr sz="2000">
           <a:solidFill>
             <a:schemeClr val="tx1"/>
           </a:solidFill>
@@ -798,13 +793,13 @@
           <a:cs typeface="+mn-cs"/>
         </a:defRPr>
       </a:lvl4pPr>
-      <a:lvl5pPr marL="2057400" indent="-228600" algn="l" defTabSz="914400" rtl="0" eaLnBrk="1" latinLnBrk="0" hangingPunct="1">
+      <a:lvl5pPr marL="2057400" indent="-228600" algn="l" defTabSz="914400" rtl="0">
         <a:spcBef>
-          <a:spcPct val="20000"/>
+          <a:spcPts val="0"/>
         </a:spcBef>
-        <a:buFont typeface="Arial" pitchFamily="34" charset="0"/>
+        <a:buFont typeface="Arial"/>
         <a:buChar char="»"/>
-        <a:defRPr sz="2000" kern="1200">
+        <a:defRPr sz="2000">
           <a:solidFill>
             <a:schemeClr val="tx1"/>
           </a:solidFill>
@@ -813,13 +808,13 @@
           <a:cs typeface="+mn-cs"/>
         </a:defRPr>
       </a:lvl5pPr>
-      <a:lvl6pPr marL="2514600" indent="-228600" algn="l" defTabSz="914400" rtl="0" eaLnBrk="1" latinLnBrk="0" hangingPunct="1">
+      <a:lvl6pPr marL="2514600" indent="-228600" algn="l" defTabSz="914400" rtl="0">
         <a:spcBef>
-          <a:spcPct val="20000"/>
+          <a:spcPts val="0"/>
         </a:spcBef>
-        <a:buFont typeface="Arial" pitchFamily="34" charset="0"/>
+        <a:buFont typeface="Arial"/>
         <a:buChar char="•"/>
-        <a:defRPr sz="2000" kern="1200">
+        <a:defRPr sz="2000">
           <a:solidFill>
             <a:schemeClr val="tx1"/>
           </a:solidFill>
@@ -828,13 +823,13 @@
           <a:cs typeface="+mn-cs"/>
         </a:defRPr>
       </a:lvl6pPr>
-      <a:lvl7pPr marL="2971800" indent="-228600" algn="l" defTabSz="914400" rtl="0" eaLnBrk="1" latinLnBrk="0" hangingPunct="1">
+      <a:lvl7pPr marL="2971800" indent="-228600" algn="l" defTabSz="914400" rtl="0">
         <a:spcBef>
-          <a:spcPct val="20000"/>
+          <a:spcPts val="0"/>
         </a:spcBef>
-        <a:buFont typeface="Arial" pitchFamily="34" charset="0"/>
+        <a:buFont typeface="Arial"/>
         <a:buChar char="•"/>
-        <a:defRPr sz="2000" kern="1200">
+        <a:defRPr sz="2000">
           <a:solidFill>
             <a:schemeClr val="tx1"/>
           </a:solidFill>
@@ -843,13 +838,13 @@
           <a:cs typeface="+mn-cs"/>
         </a:defRPr>
       </a:lvl7pPr>
-      <a:lvl8pPr marL="3429000" indent="-228600" algn="l" defTabSz="914400" rtl="0" eaLnBrk="1" latinLnBrk="0" hangingPunct="1">
+      <a:lvl8pPr marL="3429000" indent="-228600" algn="l" defTabSz="914400" rtl="0">
         <a:spcBef>
-          <a:spcPct val="20000"/>
+          <a:spcPts val="0"/>
         </a:spcBef>
-        <a:buFont typeface="Arial" pitchFamily="34" charset="0"/>
+        <a:buFont typeface="Arial"/>
         <a:buChar char="•"/>
-        <a:defRPr sz="2000" kern="1200">
+        <a:defRPr sz="2000">
           <a:solidFill>
             <a:schemeClr val="tx1"/>
           </a:solidFill>
@@ -858,13 +853,13 @@
           <a:cs typeface="+mn-cs"/>
         </a:defRPr>
       </a:lvl8pPr>
-      <a:lvl9pPr marL="3886200" indent="-228600" algn="l" defTabSz="914400" rtl="0" eaLnBrk="1" latinLnBrk="0" hangingPunct="1">
+      <a:lvl9pPr marL="3886200" indent="-228600" algn="l" defTabSz="914400" rtl="0">
         <a:spcBef>
-          <a:spcPct val="20000"/>
+          <a:spcPts val="0"/>
         </a:spcBef>
-        <a:buFont typeface="Arial" pitchFamily="34" charset="0"/>
+        <a:buFont typeface="Arial"/>
         <a:buChar char="•"/>
-        <a:defRPr sz="2000" kern="1200">
+        <a:defRPr sz="2000">
           <a:solidFill>
             <a:schemeClr val="tx1"/>
           </a:solidFill>
@@ -878,8 +873,8 @@
       <a:defPPr>
         <a:defRPr lang="en-US"/>
       </a:defPPr>
-      <a:lvl1pPr marL="0" algn="l" defTabSz="914400" rtl="0" eaLnBrk="1" latinLnBrk="0" hangingPunct="1">
-        <a:defRPr sz="1800" kern="1200">
+      <a:lvl1pPr marL="0" algn="l" defTabSz="914400" rtl="0">
+        <a:defRPr sz="1800">
           <a:solidFill>
             <a:schemeClr val="tx1"/>
           </a:solidFill>
@@ -888,8 +883,8 @@
           <a:cs typeface="+mn-cs"/>
         </a:defRPr>
       </a:lvl1pPr>
-      <a:lvl2pPr marL="457200" algn="l" defTabSz="914400" rtl="0" eaLnBrk="1" latinLnBrk="0" hangingPunct="1">
-        <a:defRPr sz="1800" kern="1200">
+      <a:lvl2pPr marL="457200" algn="l" defTabSz="914400" rtl="0">
+        <a:defRPr sz="1800">
           <a:solidFill>
             <a:schemeClr val="tx1"/>
           </a:solidFill>
@@ -898,8 +893,8 @@
           <a:cs typeface="+mn-cs"/>
         </a:defRPr>
       </a:lvl2pPr>
-      <a:lvl3pPr marL="914400" algn="l" defTabSz="914400" rtl="0" eaLnBrk="1" latinLnBrk="0" hangingPunct="1">
-        <a:defRPr sz="1800" kern="1200">
+      <a:lvl3pPr marL="914400" algn="l" defTabSz="914400" rtl="0">
+        <a:defRPr sz="1800">
           <a:solidFill>
             <a:schemeClr val="tx1"/>
           </a:solidFill>
@@ -908,8 +903,8 @@
           <a:cs typeface="+mn-cs"/>
         </a:defRPr>
       </a:lvl3pPr>
-      <a:lvl4pPr marL="1371600" algn="l" defTabSz="914400" rtl="0" eaLnBrk="1" latinLnBrk="0" hangingPunct="1">
-        <a:defRPr sz="1800" kern="1200">
+      <a:lvl4pPr marL="1371600" algn="l" defTabSz="914400" rtl="0">
+        <a:defRPr sz="1800">
           <a:solidFill>
             <a:schemeClr val="tx1"/>
           </a:solidFill>
@@ -918,8 +913,8 @@
           <a:cs typeface="+mn-cs"/>
         </a:defRPr>
       </a:lvl4pPr>
-      <a:lvl5pPr marL="1828800" algn="l" defTabSz="914400" rtl="0" eaLnBrk="1" latinLnBrk="0" hangingPunct="1">
-        <a:defRPr sz="1800" kern="1200">
+      <a:lvl5pPr marL="1828800" algn="l" defTabSz="914400" rtl="0">
+        <a:defRPr sz="1800">
           <a:solidFill>
             <a:schemeClr val="tx1"/>
           </a:solidFill>
@@ -928,8 +923,8 @@
           <a:cs typeface="+mn-cs"/>
         </a:defRPr>
       </a:lvl5pPr>
-      <a:lvl6pPr marL="2286000" algn="l" defTabSz="914400" rtl="0" eaLnBrk="1" latinLnBrk="0" hangingPunct="1">
-        <a:defRPr sz="1800" kern="1200">
+      <a:lvl6pPr marL="2286000" algn="l" defTabSz="914400" rtl="0">
+        <a:defRPr sz="1800">
           <a:solidFill>
             <a:schemeClr val="tx1"/>
           </a:solidFill>
@@ -938,8 +933,8 @@
           <a:cs typeface="+mn-cs"/>
         </a:defRPr>
       </a:lvl6pPr>
-      <a:lvl7pPr marL="2743200" algn="l" defTabSz="914400" rtl="0" eaLnBrk="1" latinLnBrk="0" hangingPunct="1">
-        <a:defRPr sz="1800" kern="1200">
+      <a:lvl7pPr marL="2743200" algn="l" defTabSz="914400" rtl="0">
+        <a:defRPr sz="1800">
           <a:solidFill>
             <a:schemeClr val="tx1"/>
           </a:solidFill>
@@ -948,8 +943,8 @@
           <a:cs typeface="+mn-cs"/>
         </a:defRPr>
       </a:lvl7pPr>
-      <a:lvl8pPr marL="3200400" algn="l" defTabSz="914400" rtl="0" eaLnBrk="1" latinLnBrk="0" hangingPunct="1">
-        <a:defRPr sz="1800" kern="1200">
+      <a:lvl8pPr marL="3200400" algn="l" defTabSz="914400" rtl="0">
+        <a:defRPr sz="1800">
           <a:solidFill>
             <a:schemeClr val="tx1"/>
           </a:solidFill>
@@ -958,8 +953,8 @@
           <a:cs typeface="+mn-cs"/>
         </a:defRPr>
       </a:lvl8pPr>
-      <a:lvl9pPr marL="3657600" algn="l" defTabSz="914400" rtl="0" eaLnBrk="1" latinLnBrk="0" hangingPunct="1">
-        <a:defRPr sz="1800" kern="1200">
+      <a:lvl9pPr marL="3657600" algn="l" defTabSz="914400" rtl="0">
+        <a:defRPr sz="1800">
           <a:solidFill>
             <a:schemeClr val="tx1"/>
           </a:solidFill>
@@ -974,14 +969,13 @@
 </file>
 
 <file path=ppt/slides/slide1.xml><?xml version="1.0" encoding="utf-8"?>
-<p:sld xmlns:a="http://schemas.openxmlformats.org/drawingml/2006/main" xmlns:r="http://schemas.openxmlformats.org/officeDocument/2006/relationships" xmlns:p="http://schemas.openxmlformats.org/presentationml/2006/main">
+<p:sld xmlns:a="http://schemas.openxmlformats.org/drawingml/2006/main" xmlns:r="http://schemas.openxmlformats.org/officeDocument/2006/relationships" xmlns:p="http://schemas.openxmlformats.org/presentationml/2006/main" xmlns:m="http://schemas.openxmlformats.org/officeDocument/2006/math" xmlns:w="http://schemas.openxmlformats.org/wordprocessingml/2006/main" xmlns:mc="http://schemas.openxmlformats.org/markup-compatibility/2006" showMasterPhAnim="0" showMasterSp="1" show="1">
   <p:cSld name="Slide 1">
     <p:bg>
-      <p:bgPr>
+      <p:bgPr shadeToTitle="0">
         <a:solidFill>
           <a:srgbClr val="F8FBF8"/>
         </a:solidFill>
-        <a:effectLst/>
       </p:bgPr>
     </p:bg>
     <p:spTree>
@@ -990,7 +984,7 @@
         <p:cNvGrpSpPr/>
         <p:nvPr/>
       </p:nvGrpSpPr>
-      <p:grpSpPr>
+      <p:grpSpPr bwMode="auto">
         <a:xfrm>
           <a:off x="0" y="0"/>
           <a:ext cx="0" cy="0"/>
@@ -1000,11 +994,11 @@
       </p:grpSpPr>
       <p:sp>
         <p:nvSpPr>
-          <p:cNvPr id="3" name="Text 1"/>
-          <p:cNvSpPr/>
-          <p:nvPr/>
-        </p:nvSpPr>
-        <p:spPr>
+          <p:cNvPr id="203231649" name="Text 1"/>
+          <p:cNvSpPr/>
+          <p:nvPr/>
+        </p:nvSpPr>
+        <p:spPr bwMode="auto">
           <a:xfrm>
             <a:off x="640080" y="475488"/>
             <a:ext cx="2286000" cy="256032"/>
@@ -1021,26 +1015,27 @@
           <a:p>
             <a:pPr marL="0" indent="0">
               <a:buNone/>
-            </a:pPr>
-            <a:r>
-              <a:rPr lang="en-US" sz="1000" b="1" dirty="0">
+              <a:defRPr/>
+            </a:pPr>
+            <a:r>
+              <a:rPr lang="en-US" sz="1000" b="1">
                 <a:solidFill>
                   <a:srgbClr val="1F7A5C"/>
                 </a:solidFill>
               </a:rPr>
               <a:t>Smart Finux Labs</a:t>
             </a:r>
-            <a:endParaRPr lang="en-US" sz="1000" dirty="0"/>
-          </a:p>
-        </p:txBody>
-      </p:sp>
-      <p:sp>
-        <p:nvSpPr>
-          <p:cNvPr id="4" name="Text 2"/>
-          <p:cNvSpPr/>
-          <p:nvPr/>
-        </p:nvSpPr>
-        <p:spPr>
+            <a:endParaRPr lang="en-US" sz="1000"/>
+          </a:p>
+        </p:txBody>
+      </p:sp>
+      <p:sp>
+        <p:nvSpPr>
+          <p:cNvPr id="1772549080" name="Text 2"/>
+          <p:cNvSpPr/>
+          <p:nvPr/>
+        </p:nvSpPr>
+        <p:spPr bwMode="auto">
           <a:xfrm>
             <a:off x="621792" y="1234440"/>
             <a:ext cx="4023360" cy="731520"/>
@@ -1057,29 +1052,30 @@
           <a:p>
             <a:pPr marL="0" indent="0">
               <a:buNone/>
-            </a:pPr>
-            <a:r>
-              <a:rPr lang="en-US" sz="3800" b="1" dirty="0">
+              <a:defRPr/>
+            </a:pPr>
+            <a:r>
+              <a:rPr lang="en-US" sz="3800" b="1">
                 <a:solidFill>
                   <a:srgbClr val="16201F"/>
                 </a:solidFill>
-                <a:latin typeface="Aptos Display" pitchFamily="34" charset="0"/>
-                <a:ea typeface="Aptos Display" pitchFamily="34" charset="-122"/>
-                <a:cs typeface="Aptos Display" pitchFamily="34" charset="-120"/>
+                <a:latin typeface="Aptos Display"/>
+                <a:ea typeface="Aptos Display"/>
+                <a:cs typeface="Aptos Display"/>
               </a:rPr>
               <a:t>Verity</a:t>
             </a:r>
-            <a:endParaRPr lang="en-US" sz="3800" dirty="0"/>
-          </a:p>
-        </p:txBody>
-      </p:sp>
-      <p:sp>
-        <p:nvSpPr>
-          <p:cNvPr id="5" name="Text 3"/>
-          <p:cNvSpPr/>
-          <p:nvPr/>
-        </p:nvSpPr>
-        <p:spPr>
+            <a:endParaRPr lang="en-US" sz="3800"/>
+          </a:p>
+        </p:txBody>
+      </p:sp>
+      <p:sp>
+        <p:nvSpPr>
+          <p:cNvPr id="1701626625" name="Text 3"/>
+          <p:cNvSpPr/>
+          <p:nvPr/>
+        </p:nvSpPr>
+        <p:spPr bwMode="auto">
           <a:xfrm>
             <a:off x="658368" y="2029968"/>
             <a:ext cx="6126480" cy="713232"/>
@@ -1098,26 +1094,27 @@
           <a:p>
             <a:pPr marL="0" indent="0">
               <a:buNone/>
-            </a:pPr>
-            <a:r>
-              <a:rPr lang="en-US" sz="1900" b="1" dirty="0">
+              <a:defRPr/>
+            </a:pPr>
+            <a:r>
+              <a:rPr lang="en-US" sz="1900" b="1">
                 <a:solidFill>
                   <a:srgbClr val="16201F"/>
                 </a:solidFill>
               </a:rPr>
-              <a:t>On-chain supply chain finance for buyer-confirmed Due Value</a:t>
-            </a:r>
-            <a:endParaRPr lang="en-US" sz="1900" dirty="0"/>
-          </a:p>
-        </p:txBody>
-      </p:sp>
-      <p:sp>
-        <p:nvSpPr>
-          <p:cNvPr id="6" name="Text 4"/>
-          <p:cNvSpPr/>
-          <p:nvPr/>
-        </p:nvSpPr>
-        <p:spPr>
+              <a:t>On-chain supply chain finance for Capital Due Value</a:t>
+            </a:r>
+            <a:endParaRPr lang="en-US" sz="1900"/>
+          </a:p>
+        </p:txBody>
+      </p:sp>
+      <p:sp>
+        <p:nvSpPr>
+          <p:cNvPr id="1327221342" name="Text 4"/>
+          <p:cNvSpPr/>
+          <p:nvPr/>
+        </p:nvSpPr>
+        <p:spPr bwMode="auto">
           <a:xfrm>
             <a:off x="676656" y="2907792"/>
             <a:ext cx="5349240" cy="1051560"/>
@@ -1136,26 +1133,27 @@
           <a:p>
             <a:pPr marL="0" indent="0">
               <a:buNone/>
-            </a:pPr>
-            <a:r>
-              <a:rPr lang="en-US" sz="1220" dirty="0">
+              <a:defRPr/>
+            </a:pPr>
+            <a:r>
+              <a:rPr lang="en-US" sz="1200">
                 <a:solidFill>
                   <a:srgbClr val="5D6A67"/>
                 </a:solidFill>
               </a:rPr>
               <a:t>Verity turns invoice claims into accounting-valid obligations, then coordinates factoring, USDC escrow, settlement, and payment profile evidence across suppliers, buyers, and investors.</a:t>
             </a:r>
-            <a:endParaRPr lang="en-US" sz="1220" dirty="0"/>
-          </a:p>
-        </p:txBody>
-      </p:sp>
-      <p:sp>
-        <p:nvSpPr>
-          <p:cNvPr id="7" name="Shape 5"/>
-          <p:cNvSpPr/>
-          <p:nvPr/>
-        </p:nvSpPr>
-        <p:spPr>
+            <a:endParaRPr lang="en-US" sz="1200"/>
+          </a:p>
+        </p:txBody>
+      </p:sp>
+      <p:sp>
+        <p:nvSpPr>
+          <p:cNvPr id="2004344224" name="Shape 5"/>
+          <p:cNvSpPr/>
+          <p:nvPr/>
+        </p:nvSpPr>
+        <p:spPr bwMode="auto">
           <a:xfrm>
             <a:off x="6858000" y="1024128"/>
             <a:ext cx="4846320" cy="4498848"/>
@@ -1179,17 +1177,20 @@
           <a:bodyPr/>
           <a:lstStyle/>
           <a:p>
+            <a:pPr>
+              <a:defRPr/>
+            </a:pPr>
             <a:endParaRPr lang="en-US"/>
           </a:p>
         </p:txBody>
       </p:sp>
       <p:sp>
         <p:nvSpPr>
-          <p:cNvPr id="8" name="Shape 6"/>
-          <p:cNvSpPr/>
-          <p:nvPr/>
-        </p:nvSpPr>
-        <p:spPr>
+          <p:cNvPr id="69517365" name="Shape 6"/>
+          <p:cNvSpPr/>
+          <p:nvPr/>
+        </p:nvSpPr>
+        <p:spPr bwMode="auto">
           <a:xfrm>
             <a:off x="7223760" y="1353312"/>
             <a:ext cx="91440" cy="603504"/>
@@ -1213,17 +1214,20 @@
           <a:bodyPr/>
           <a:lstStyle/>
           <a:p>
+            <a:pPr>
+              <a:defRPr/>
+            </a:pPr>
             <a:endParaRPr lang="en-US"/>
           </a:p>
         </p:txBody>
       </p:sp>
       <p:sp>
         <p:nvSpPr>
-          <p:cNvPr id="9" name="Text 7"/>
-          <p:cNvSpPr/>
-          <p:nvPr/>
-        </p:nvSpPr>
-        <p:spPr>
+          <p:cNvPr id="35693782" name="Text 7"/>
+          <p:cNvSpPr/>
+          <p:nvPr/>
+        </p:nvSpPr>
+        <p:spPr bwMode="auto">
           <a:xfrm>
             <a:off x="7470648" y="1344168"/>
             <a:ext cx="1051560" cy="201168"/>
@@ -1240,26 +1244,27 @@
           <a:p>
             <a:pPr marL="0" indent="0">
               <a:buNone/>
-            </a:pPr>
-            <a:r>
-              <a:rPr lang="en-US" sz="1000" b="1" dirty="0">
+              <a:defRPr/>
+            </a:pPr>
+            <a:r>
+              <a:rPr lang="en-US" sz="1000" b="1">
                 <a:solidFill>
                   <a:srgbClr val="1F7A5C"/>
                 </a:solidFill>
               </a:rPr>
               <a:t>Supplier</a:t>
             </a:r>
-            <a:endParaRPr lang="en-US" sz="1000" dirty="0"/>
-          </a:p>
-        </p:txBody>
-      </p:sp>
-      <p:sp>
-        <p:nvSpPr>
-          <p:cNvPr id="10" name="Shape 8"/>
-          <p:cNvSpPr/>
-          <p:nvPr/>
-        </p:nvSpPr>
-        <p:spPr>
+            <a:endParaRPr lang="en-US" sz="1000"/>
+          </a:p>
+        </p:txBody>
+      </p:sp>
+      <p:sp>
+        <p:nvSpPr>
+          <p:cNvPr id="1172411447" name="Shape 8"/>
+          <p:cNvSpPr/>
+          <p:nvPr/>
+        </p:nvSpPr>
+        <p:spPr bwMode="auto">
           <a:xfrm>
             <a:off x="8595360" y="1280160"/>
             <a:ext cx="2651760" cy="713232"/>
@@ -1283,17 +1288,20 @@
           <a:bodyPr/>
           <a:lstStyle/>
           <a:p>
+            <a:pPr>
+              <a:defRPr/>
+            </a:pPr>
             <a:endParaRPr lang="en-US"/>
           </a:p>
         </p:txBody>
       </p:sp>
       <p:sp>
         <p:nvSpPr>
-          <p:cNvPr id="11" name="Text 9"/>
-          <p:cNvSpPr/>
-          <p:nvPr/>
-        </p:nvSpPr>
-        <p:spPr>
+          <p:cNvPr id="1033882970" name="Text 9"/>
+          <p:cNvSpPr/>
+          <p:nvPr/>
+        </p:nvSpPr>
+        <p:spPr bwMode="auto">
           <a:xfrm>
             <a:off x="8769096" y="1444752"/>
             <a:ext cx="2304288" cy="310896"/>
@@ -1312,26 +1320,27 @@
           <a:p>
             <a:pPr marL="0" indent="0" algn="ctr">
               <a:buNone/>
-            </a:pPr>
-            <a:r>
-              <a:rPr lang="en-US" sz="950" dirty="0">
+              <a:defRPr/>
+            </a:pPr>
+            <a:r>
+              <a:rPr lang="en-US" sz="950">
                 <a:solidFill>
                   <a:srgbClr val="16201F"/>
                 </a:solidFill>
               </a:rPr>
               <a:t>Creates structured invoice and requests factoring</a:t>
             </a:r>
-            <a:endParaRPr lang="en-US" sz="950" dirty="0"/>
-          </a:p>
-        </p:txBody>
-      </p:sp>
-      <p:sp>
-        <p:nvSpPr>
-          <p:cNvPr id="12" name="Shape 10"/>
-          <p:cNvSpPr/>
-          <p:nvPr/>
-        </p:nvSpPr>
-        <p:spPr>
+            <a:endParaRPr lang="en-US" sz="950"/>
+          </a:p>
+        </p:txBody>
+      </p:sp>
+      <p:sp>
+        <p:nvSpPr>
+          <p:cNvPr id="757352805" name="Shape 10"/>
+          <p:cNvSpPr/>
+          <p:nvPr/>
+        </p:nvSpPr>
+        <p:spPr bwMode="auto">
           <a:xfrm>
             <a:off x="7223760" y="2313432"/>
             <a:ext cx="91440" cy="603504"/>
@@ -1355,17 +1364,20 @@
           <a:bodyPr/>
           <a:lstStyle/>
           <a:p>
+            <a:pPr>
+              <a:defRPr/>
+            </a:pPr>
             <a:endParaRPr lang="en-US"/>
           </a:p>
         </p:txBody>
       </p:sp>
       <p:sp>
         <p:nvSpPr>
-          <p:cNvPr id="13" name="Text 11"/>
-          <p:cNvSpPr/>
-          <p:nvPr/>
-        </p:nvSpPr>
-        <p:spPr>
+          <p:cNvPr id="1891864599" name="Text 11"/>
+          <p:cNvSpPr/>
+          <p:nvPr/>
+        </p:nvSpPr>
+        <p:spPr bwMode="auto">
           <a:xfrm>
             <a:off x="7470648" y="2304288"/>
             <a:ext cx="1051560" cy="201168"/>
@@ -1382,26 +1394,27 @@
           <a:p>
             <a:pPr marL="0" indent="0">
               <a:buNone/>
-            </a:pPr>
-            <a:r>
-              <a:rPr lang="en-US" sz="1000" b="1" dirty="0">
+              <a:defRPr/>
+            </a:pPr>
+            <a:r>
+              <a:rPr lang="en-US" sz="1000" b="1">
                 <a:solidFill>
                   <a:srgbClr val="244D73"/>
                 </a:solidFill>
               </a:rPr>
               <a:t>Buyer</a:t>
             </a:r>
-            <a:endParaRPr lang="en-US" sz="1000" dirty="0"/>
-          </a:p>
-        </p:txBody>
-      </p:sp>
-      <p:sp>
-        <p:nvSpPr>
-          <p:cNvPr id="14" name="Shape 12"/>
-          <p:cNvSpPr/>
-          <p:nvPr/>
-        </p:nvSpPr>
-        <p:spPr>
+            <a:endParaRPr lang="en-US" sz="1000"/>
+          </a:p>
+        </p:txBody>
+      </p:sp>
+      <p:sp>
+        <p:nvSpPr>
+          <p:cNvPr id="630264583" name="Shape 12"/>
+          <p:cNvSpPr/>
+          <p:nvPr/>
+        </p:nvSpPr>
+        <p:spPr bwMode="auto">
           <a:xfrm>
             <a:off x="8595360" y="2240280"/>
             <a:ext cx="2651760" cy="713232"/>
@@ -1425,17 +1438,20 @@
           <a:bodyPr/>
           <a:lstStyle/>
           <a:p>
+            <a:pPr>
+              <a:defRPr/>
+            </a:pPr>
             <a:endParaRPr lang="en-US"/>
           </a:p>
         </p:txBody>
       </p:sp>
       <p:sp>
         <p:nvSpPr>
-          <p:cNvPr id="15" name="Text 13"/>
-          <p:cNvSpPr/>
-          <p:nvPr/>
-        </p:nvSpPr>
-        <p:spPr>
+          <p:cNvPr id="1552028547" name="Text 13"/>
+          <p:cNvSpPr/>
+          <p:nvPr/>
+        </p:nvSpPr>
+        <p:spPr bwMode="auto">
           <a:xfrm>
             <a:off x="8769096" y="2404872"/>
             <a:ext cx="2304288" cy="310896"/>
@@ -1454,26 +1470,27 @@
           <a:p>
             <a:pPr marL="0" indent="0" algn="ctr">
               <a:buNone/>
-            </a:pPr>
-            <a:r>
-              <a:rPr lang="en-US" sz="950" dirty="0">
+              <a:defRPr/>
+            </a:pPr>
+            <a:r>
+              <a:rPr lang="en-US" sz="950">
                 <a:solidFill>
                   <a:srgbClr val="16201F"/>
                 </a:solidFill>
               </a:rPr>
               <a:t>Validates evidence and confirms Due Value</a:t>
             </a:r>
-            <a:endParaRPr lang="en-US" sz="950" dirty="0"/>
-          </a:p>
-        </p:txBody>
-      </p:sp>
-      <p:sp>
-        <p:nvSpPr>
-          <p:cNvPr id="16" name="Shape 14"/>
-          <p:cNvSpPr/>
-          <p:nvPr/>
-        </p:nvSpPr>
-        <p:spPr>
+            <a:endParaRPr lang="en-US" sz="950"/>
+          </a:p>
+        </p:txBody>
+      </p:sp>
+      <p:sp>
+        <p:nvSpPr>
+          <p:cNvPr id="1072654153" name="Shape 14"/>
+          <p:cNvSpPr/>
+          <p:nvPr/>
+        </p:nvSpPr>
+        <p:spPr bwMode="auto">
           <a:xfrm>
             <a:off x="7223760" y="3273552"/>
             <a:ext cx="91440" cy="603504"/>
@@ -1497,17 +1514,20 @@
           <a:bodyPr/>
           <a:lstStyle/>
           <a:p>
+            <a:pPr>
+              <a:defRPr/>
+            </a:pPr>
             <a:endParaRPr lang="en-US"/>
           </a:p>
         </p:txBody>
       </p:sp>
       <p:sp>
         <p:nvSpPr>
-          <p:cNvPr id="17" name="Text 15"/>
-          <p:cNvSpPr/>
-          <p:nvPr/>
-        </p:nvSpPr>
-        <p:spPr>
+          <p:cNvPr id="500787178" name="Text 15"/>
+          <p:cNvSpPr/>
+          <p:nvPr/>
+        </p:nvSpPr>
+        <p:spPr bwMode="auto">
           <a:xfrm>
             <a:off x="7470648" y="3264408"/>
             <a:ext cx="1051560" cy="201168"/>
@@ -1524,26 +1544,27 @@
           <a:p>
             <a:pPr marL="0" indent="0">
               <a:buNone/>
-            </a:pPr>
-            <a:r>
-              <a:rPr lang="en-US" sz="1000" b="1" dirty="0">
+              <a:defRPr/>
+            </a:pPr>
+            <a:r>
+              <a:rPr lang="en-US" sz="1000" b="1">
                 <a:solidFill>
                   <a:srgbClr val="B9822D"/>
                 </a:solidFill>
               </a:rPr>
               <a:t>Investor</a:t>
             </a:r>
-            <a:endParaRPr lang="en-US" sz="1000" dirty="0"/>
-          </a:p>
-        </p:txBody>
-      </p:sp>
-      <p:sp>
-        <p:nvSpPr>
-          <p:cNvPr id="18" name="Shape 16"/>
-          <p:cNvSpPr/>
-          <p:nvPr/>
-        </p:nvSpPr>
-        <p:spPr>
+            <a:endParaRPr lang="en-US" sz="1000"/>
+          </a:p>
+        </p:txBody>
+      </p:sp>
+      <p:sp>
+        <p:nvSpPr>
+          <p:cNvPr id="1660914268" name="Shape 16"/>
+          <p:cNvSpPr/>
+          <p:nvPr/>
+        </p:nvSpPr>
+        <p:spPr bwMode="auto">
           <a:xfrm>
             <a:off x="8595360" y="3200400"/>
             <a:ext cx="2651760" cy="713232"/>
@@ -1567,17 +1588,20 @@
           <a:bodyPr/>
           <a:lstStyle/>
           <a:p>
+            <a:pPr>
+              <a:defRPr/>
+            </a:pPr>
             <a:endParaRPr lang="en-US"/>
           </a:p>
         </p:txBody>
       </p:sp>
       <p:sp>
         <p:nvSpPr>
-          <p:cNvPr id="19" name="Text 17"/>
-          <p:cNvSpPr/>
-          <p:nvPr/>
-        </p:nvSpPr>
-        <p:spPr>
+          <p:cNvPr id="1531318786" name="Text 17"/>
+          <p:cNvSpPr/>
+          <p:nvPr/>
+        </p:nvSpPr>
+        <p:spPr bwMode="auto">
           <a:xfrm>
             <a:off x="8769096" y="3364992"/>
             <a:ext cx="2304288" cy="310896"/>
@@ -1596,26 +1620,27 @@
           <a:p>
             <a:pPr marL="0" indent="0" algn="ctr">
               <a:buNone/>
-            </a:pPr>
-            <a:r>
-              <a:rPr lang="en-US" sz="950" dirty="0">
+              <a:defRPr/>
+            </a:pPr>
+            <a:r>
+              <a:rPr lang="en-US" sz="950">
                 <a:solidFill>
                   <a:srgbClr val="16201F"/>
                 </a:solidFill>
               </a:rPr>
               <a:t>Funds accepted receivable for yield</a:t>
             </a:r>
-            <a:endParaRPr lang="en-US" sz="950" dirty="0"/>
-          </a:p>
-        </p:txBody>
-      </p:sp>
-      <p:sp>
-        <p:nvSpPr>
-          <p:cNvPr id="20" name="Shape 18"/>
-          <p:cNvSpPr/>
-          <p:nvPr/>
-        </p:nvSpPr>
-        <p:spPr>
+            <a:endParaRPr lang="en-US" sz="950"/>
+          </a:p>
+        </p:txBody>
+      </p:sp>
+      <p:sp>
+        <p:nvSpPr>
+          <p:cNvPr id="237889831" name="Shape 18"/>
+          <p:cNvSpPr/>
+          <p:nvPr/>
+        </p:nvSpPr>
+        <p:spPr bwMode="auto">
           <a:xfrm>
             <a:off x="7223760" y="4233672"/>
             <a:ext cx="91440" cy="603504"/>
@@ -1639,17 +1664,20 @@
           <a:bodyPr/>
           <a:lstStyle/>
           <a:p>
+            <a:pPr>
+              <a:defRPr/>
+            </a:pPr>
             <a:endParaRPr lang="en-US"/>
           </a:p>
         </p:txBody>
       </p:sp>
       <p:sp>
         <p:nvSpPr>
-          <p:cNvPr id="21" name="Text 19"/>
-          <p:cNvSpPr/>
-          <p:nvPr/>
-        </p:nvSpPr>
-        <p:spPr>
+          <p:cNvPr id="851644766" name="Text 19"/>
+          <p:cNvSpPr/>
+          <p:nvPr/>
+        </p:nvSpPr>
+        <p:spPr bwMode="auto">
           <a:xfrm>
             <a:off x="7470648" y="4224528"/>
             <a:ext cx="1051560" cy="201168"/>
@@ -1666,28 +1694,29 @@
           <a:p>
             <a:pPr marL="0" indent="0">
               <a:buNone/>
-            </a:pPr>
-            <a:r>
-              <a:rPr lang="en-US" sz="1000" b="1" dirty="0">
+              <a:defRPr/>
+            </a:pPr>
+            <a:r>
+              <a:rPr lang="en-US" sz="1000" b="1">
                 <a:solidFill>
                   <a:srgbClr val="C9533B"/>
                 </a:solidFill>
               </a:rPr>
               <a:t>Escrow</a:t>
             </a:r>
-            <a:endParaRPr lang="en-US" sz="1000" dirty="0"/>
-          </a:p>
-        </p:txBody>
-      </p:sp>
-      <p:sp>
-        <p:nvSpPr>
-          <p:cNvPr id="22" name="Shape 20"/>
-          <p:cNvSpPr/>
-          <p:nvPr/>
-        </p:nvSpPr>
-        <p:spPr>
-          <a:xfrm>
-            <a:off x="8595360" y="4160520"/>
+            <a:endParaRPr lang="en-US" sz="1000"/>
+          </a:p>
+        </p:txBody>
+      </p:sp>
+      <p:sp>
+        <p:nvSpPr>
+          <p:cNvPr id="1927442310" name="Shape 20"/>
+          <p:cNvSpPr/>
+          <p:nvPr/>
+        </p:nvSpPr>
+        <p:spPr bwMode="auto">
+          <a:xfrm>
+            <a:off x="8595360" y="4160519"/>
             <a:ext cx="2651760" cy="713232"/>
           </a:xfrm>
           <a:prstGeom prst="roundRect">
@@ -1709,17 +1738,20 @@
           <a:bodyPr/>
           <a:lstStyle/>
           <a:p>
+            <a:pPr>
+              <a:defRPr/>
+            </a:pPr>
             <a:endParaRPr lang="en-US"/>
           </a:p>
         </p:txBody>
       </p:sp>
       <p:sp>
         <p:nvSpPr>
-          <p:cNvPr id="23" name="Text 21"/>
-          <p:cNvSpPr/>
-          <p:nvPr/>
-        </p:nvSpPr>
-        <p:spPr>
+          <p:cNvPr id="600334122" name="Text 21"/>
+          <p:cNvSpPr/>
+          <p:nvPr/>
+        </p:nvSpPr>
+        <p:spPr bwMode="auto">
           <a:xfrm>
             <a:off x="8769096" y="4325112"/>
             <a:ext cx="2304288" cy="310896"/>
@@ -1738,29 +1770,30 @@
           <a:p>
             <a:pPr marL="0" indent="0" algn="ctr">
               <a:buNone/>
-            </a:pPr>
-            <a:r>
-              <a:rPr lang="en-US" sz="950" dirty="0">
+              <a:defRPr/>
+            </a:pPr>
+            <a:r>
+              <a:rPr lang="en-US" sz="950">
                 <a:solidFill>
                   <a:srgbClr val="16201F"/>
                 </a:solidFill>
               </a:rPr>
               <a:t>Distributes advance, repayment, yield, and residual</a:t>
             </a:r>
-            <a:endParaRPr lang="en-US" sz="950" dirty="0"/>
-          </a:p>
-        </p:txBody>
-      </p:sp>
-      <p:sp>
-        <p:nvSpPr>
-          <p:cNvPr id="24" name="Text 22"/>
-          <p:cNvSpPr/>
-          <p:nvPr/>
-        </p:nvSpPr>
-        <p:spPr>
+            <a:endParaRPr lang="en-US" sz="950"/>
+          </a:p>
+        </p:txBody>
+      </p:sp>
+      <p:sp>
+        <p:nvSpPr>
+          <p:cNvPr id="151034241" name="Text 22"/>
+          <p:cNvSpPr/>
+          <p:nvPr/>
+        </p:nvSpPr>
+        <p:spPr bwMode="auto">
           <a:xfrm>
             <a:off x="713232" y="5001768"/>
-            <a:ext cx="1508760" cy="182880"/>
+            <a:ext cx="1508759" cy="182880"/>
           </a:xfrm>
           <a:prstGeom prst="rect">
             <a:avLst/>
@@ -1774,26 +1807,27 @@
           <a:p>
             <a:pPr marL="0" indent="0">
               <a:buNone/>
-            </a:pPr>
-            <a:r>
-              <a:rPr lang="en-US" sz="800" b="1" dirty="0">
+              <a:defRPr/>
+            </a:pPr>
+            <a:r>
+              <a:rPr lang="en-US" sz="800" b="1">
                 <a:solidFill>
                   <a:srgbClr val="1F7A5C"/>
                 </a:solidFill>
               </a:rPr>
               <a:t>Product principle</a:t>
             </a:r>
-            <a:endParaRPr lang="en-US" sz="800" dirty="0"/>
-          </a:p>
-        </p:txBody>
-      </p:sp>
-      <p:sp>
-        <p:nvSpPr>
-          <p:cNvPr id="25" name="Text 23"/>
-          <p:cNvSpPr/>
-          <p:nvPr/>
-        </p:nvSpPr>
-        <p:spPr>
+            <a:endParaRPr lang="en-US" sz="800"/>
+          </a:p>
+        </p:txBody>
+      </p:sp>
+      <p:sp>
+        <p:nvSpPr>
+          <p:cNvPr id="650808046" name="Text 23"/>
+          <p:cNvSpPr/>
+          <p:nvPr/>
+        </p:nvSpPr>
+        <p:spPr bwMode="auto">
           <a:xfrm>
             <a:off x="713232" y="5266944"/>
             <a:ext cx="5029200" cy="310896"/>
@@ -1810,26 +1844,46 @@
           <a:p>
             <a:pPr marL="0" indent="0">
               <a:buNone/>
-            </a:pPr>
-            <a:r>
-              <a:rPr lang="en-US" sz="1600" b="1" dirty="0">
+              <a:defRPr/>
+            </a:pPr>
+            <a:r>
+              <a:rPr lang="en-US" sz="1600" b="1">
                 <a:solidFill>
                   <a:srgbClr val="16201F"/>
                 </a:solidFill>
               </a:rPr>
-              <a:t>Only buyer-accepted Due Value is financeable.</a:t>
-            </a:r>
-            <a:endParaRPr lang="en-US" sz="1600" dirty="0"/>
-          </a:p>
-        </p:txBody>
-      </p:sp>
-      <p:sp>
-        <p:nvSpPr>
-          <p:cNvPr id="26" name="Shape 24"/>
-          <p:cNvSpPr/>
-          <p:nvPr/>
-        </p:nvSpPr>
-        <p:spPr>
+              <a:t>Make </a:t>
+            </a:r>
+            <a:r>
+              <a:rPr lang="en-US" sz="1600" b="1" i="0" u="none" strike="noStrike" cap="none" spc="0">
+                <a:solidFill>
+                  <a:srgbClr val="16201F"/>
+                </a:solidFill>
+                <a:latin typeface="+mn-lt"/>
+                <a:ea typeface="+mn-ea"/>
+                <a:cs typeface="+mn-cs"/>
+              </a:rPr>
+              <a:t>Capital</a:t>
+            </a:r>
+            <a:r>
+              <a:rPr lang="en-US" sz="1600" b="1">
+                <a:solidFill>
+                  <a:srgbClr val="16201F"/>
+                </a:solidFill>
+              </a:rPr>
+              <a:t> Due Value is financeable.</a:t>
+            </a:r>
+            <a:endParaRPr lang="en-US" sz="1600"/>
+          </a:p>
+        </p:txBody>
+      </p:sp>
+      <p:sp>
+        <p:nvSpPr>
+          <p:cNvPr id="902421643" name="Shape 24"/>
+          <p:cNvSpPr/>
+          <p:nvPr/>
+        </p:nvSpPr>
+        <p:spPr bwMode="auto">
           <a:xfrm>
             <a:off x="502920" y="6419088"/>
             <a:ext cx="11201400" cy="0"/>
@@ -1849,17 +1903,20 @@
           <a:bodyPr/>
           <a:lstStyle/>
           <a:p>
+            <a:pPr>
+              <a:defRPr/>
+            </a:pPr>
             <a:endParaRPr lang="en-US"/>
           </a:p>
         </p:txBody>
       </p:sp>
       <p:sp>
         <p:nvSpPr>
-          <p:cNvPr id="27" name="Text 25"/>
-          <p:cNvSpPr/>
-          <p:nvPr/>
-        </p:nvSpPr>
-        <p:spPr>
+          <p:cNvPr id="1519323820" name="Text 25"/>
+          <p:cNvSpPr/>
+          <p:nvPr/>
+        </p:nvSpPr>
+        <p:spPr bwMode="auto">
           <a:xfrm>
             <a:off x="502920" y="6473952"/>
             <a:ext cx="3840480" cy="201168"/>
@@ -1876,29 +1933,30 @@
           <a:p>
             <a:pPr marL="0" indent="0">
               <a:buNone/>
-            </a:pPr>
-            <a:r>
-              <a:rPr lang="en-US" sz="750" dirty="0">
+              <a:defRPr/>
+            </a:pPr>
+            <a:r>
+              <a:rPr lang="en-US" sz="750">
                 <a:solidFill>
                   <a:srgbClr val="5D6A67"/>
                 </a:solidFill>
-                <a:latin typeface="Aptos" pitchFamily="34" charset="0"/>
-                <a:ea typeface="Aptos" pitchFamily="34" charset="-122"/>
-                <a:cs typeface="Aptos" pitchFamily="34" charset="-120"/>
+                <a:latin typeface="Aptos"/>
+                <a:ea typeface="Aptos"/>
+                <a:cs typeface="Aptos"/>
               </a:rPr>
               <a:t>Smart Finux Labs · Verity SCF</a:t>
             </a:r>
-            <a:endParaRPr lang="en-US" sz="750" dirty="0"/>
-          </a:p>
-        </p:txBody>
-      </p:sp>
-      <p:sp>
-        <p:nvSpPr>
-          <p:cNvPr id="28" name="Text 26"/>
-          <p:cNvSpPr/>
-          <p:nvPr/>
-        </p:nvSpPr>
-        <p:spPr>
+            <a:endParaRPr lang="en-US" sz="750"/>
+          </a:p>
+        </p:txBody>
+      </p:sp>
+      <p:sp>
+        <p:nvSpPr>
+          <p:cNvPr id="1978074249" name="Text 26"/>
+          <p:cNvSpPr/>
+          <p:nvPr/>
+        </p:nvSpPr>
+        <p:spPr bwMode="auto">
           <a:xfrm>
             <a:off x="11201400" y="6473952"/>
             <a:ext cx="502920" cy="201168"/>
@@ -1915,19 +1973,20 @@
           <a:p>
             <a:pPr marL="0" indent="0" algn="r">
               <a:buNone/>
-            </a:pPr>
-            <a:r>
-              <a:rPr lang="en-US" sz="750" b="1" dirty="0">
+              <a:defRPr/>
+            </a:pPr>
+            <a:r>
+              <a:rPr lang="en-US" sz="750" b="1">
                 <a:solidFill>
                   <a:srgbClr val="5D6A67"/>
                 </a:solidFill>
-                <a:latin typeface="Aptos" pitchFamily="34" charset="0"/>
-                <a:ea typeface="Aptos" pitchFamily="34" charset="-122"/>
-                <a:cs typeface="Aptos" pitchFamily="34" charset="-120"/>
+                <a:latin typeface="Aptos"/>
+                <a:ea typeface="Aptos"/>
+                <a:cs typeface="Aptos"/>
               </a:rPr>
               <a:t>01</a:t>
             </a:r>
-            <a:endParaRPr lang="en-US" sz="750" dirty="0"/>
+            <a:endParaRPr lang="en-US" sz="750"/>
           </a:p>
         </p:txBody>
       </p:sp>
@@ -1936,18 +1995,25 @@
   <p:clrMapOvr>
     <a:masterClrMapping/>
   </p:clrMapOvr>
+  <mc:AlternateContent xmlns:mc="http://schemas.openxmlformats.org/markup-compatibility/2006">
+    <mc:Choice xmlns:p159="http://schemas.microsoft.com/office/powerpoint/2015/09/main" xmlns:p14="http://schemas.microsoft.com/office/powerpoint/2010/main" Requires="p159">
+      <p:transition p14:dur="2000" advClick="1"/>
+    </mc:Choice>
+    <mc:Fallback>
+      <p:transition advClick="1"/>
+    </mc:Fallback>
+  </mc:AlternateContent>
 </p:sld>
 </file>
 
 <file path=ppt/slides/slide2.xml><?xml version="1.0" encoding="utf-8"?>
-<p:sld xmlns:a="http://schemas.openxmlformats.org/drawingml/2006/main" xmlns:r="http://schemas.openxmlformats.org/officeDocument/2006/relationships" xmlns:p="http://schemas.openxmlformats.org/presentationml/2006/main">
+<p:sld xmlns:a="http://schemas.openxmlformats.org/drawingml/2006/main" xmlns:r="http://schemas.openxmlformats.org/officeDocument/2006/relationships" xmlns:p="http://schemas.openxmlformats.org/presentationml/2006/main" xmlns:m="http://schemas.openxmlformats.org/officeDocument/2006/math" xmlns:w="http://schemas.openxmlformats.org/wordprocessingml/2006/main" xmlns:mc="http://schemas.openxmlformats.org/markup-compatibility/2006" showMasterPhAnim="0" showMasterSp="1" show="1">
   <p:cSld name="Slide 2">
     <p:bg>
-      <p:bgPr>
+      <p:bgPr shadeToTitle="0">
         <a:solidFill>
           <a:srgbClr val="FFFFFF"/>
         </a:solidFill>
-        <a:effectLst/>
       </p:bgPr>
     </p:bg>
     <p:spTree>
@@ -1956,7 +2022,7 @@
         <p:cNvGrpSpPr/>
         <p:nvPr/>
       </p:nvGrpSpPr>
-      <p:grpSpPr>
+      <p:grpSpPr bwMode="auto">
         <a:xfrm>
           <a:off x="0" y="0"/>
           <a:ext cx="0" cy="0"/>
@@ -1966,11 +2032,11 @@
       </p:grpSpPr>
       <p:sp>
         <p:nvSpPr>
-          <p:cNvPr id="2" name="Text 0"/>
-          <p:cNvSpPr/>
-          <p:nvPr/>
-        </p:nvSpPr>
-        <p:spPr>
+          <p:cNvPr id="1811300334" name="Text 0"/>
+          <p:cNvSpPr/>
+          <p:nvPr/>
+        </p:nvSpPr>
+        <p:spPr bwMode="auto">
           <a:xfrm>
             <a:off x="548640" y="347472"/>
             <a:ext cx="4754880" cy="201168"/>
@@ -1987,29 +2053,30 @@
           <a:p>
             <a:pPr marL="0" indent="0">
               <a:buNone/>
-            </a:pPr>
-            <a:r>
-              <a:rPr lang="en-US" sz="800" b="1" dirty="0">
+              <a:defRPr/>
+            </a:pPr>
+            <a:r>
+              <a:rPr lang="en-US" sz="800" b="1">
                 <a:solidFill>
                   <a:srgbClr val="1F7A5C"/>
                 </a:solidFill>
-                <a:latin typeface="Aptos" pitchFamily="34" charset="0"/>
-                <a:ea typeface="Aptos" pitchFamily="34" charset="-122"/>
-                <a:cs typeface="Aptos" pitchFamily="34" charset="-120"/>
+                <a:latin typeface="Aptos"/>
+                <a:ea typeface="Aptos"/>
+                <a:cs typeface="Aptos"/>
               </a:rPr>
               <a:t>VALUE RESOLUTION LAYER</a:t>
             </a:r>
-            <a:endParaRPr lang="en-US" sz="800" dirty="0"/>
-          </a:p>
-        </p:txBody>
-      </p:sp>
-      <p:sp>
-        <p:nvSpPr>
-          <p:cNvPr id="3" name="Text 1"/>
-          <p:cNvSpPr/>
-          <p:nvPr/>
-        </p:nvSpPr>
-        <p:spPr>
+            <a:endParaRPr lang="en-US" sz="800"/>
+          </a:p>
+        </p:txBody>
+      </p:sp>
+      <p:sp>
+        <p:nvSpPr>
+          <p:cNvPr id="1360283413" name="Text 1"/>
+          <p:cNvSpPr/>
+          <p:nvPr/>
+        </p:nvSpPr>
+        <p:spPr bwMode="auto">
           <a:xfrm>
             <a:off x="548640" y="621792"/>
             <a:ext cx="9692640" cy="658368"/>
@@ -2028,29 +2095,30 @@
           <a:p>
             <a:pPr marL="0" indent="0">
               <a:buNone/>
-            </a:pPr>
-            <a:r>
-              <a:rPr lang="en-US" sz="2400" b="1" dirty="0">
+              <a:defRPr/>
+            </a:pPr>
+            <a:r>
+              <a:rPr lang="en-US" sz="2400" b="1">
                 <a:solidFill>
                   <a:srgbClr val="16201F"/>
                 </a:solidFill>
-                <a:latin typeface="Aptos Display" pitchFamily="34" charset="0"/>
-                <a:ea typeface="Aptos Display" pitchFamily="34" charset="-122"/>
-                <a:cs typeface="Aptos Display" pitchFamily="34" charset="-120"/>
+                <a:latin typeface="Aptos Display"/>
+                <a:ea typeface="Aptos Display"/>
+                <a:cs typeface="Aptos Display"/>
               </a:rPr>
               <a:t>The platform resolves commercial value before it releases finance.</a:t>
             </a:r>
-            <a:endParaRPr lang="en-US" sz="2400" dirty="0"/>
-          </a:p>
-        </p:txBody>
-      </p:sp>
-      <p:sp>
-        <p:nvSpPr>
-          <p:cNvPr id="4" name="Shape 2"/>
-          <p:cNvSpPr/>
-          <p:nvPr/>
-        </p:nvSpPr>
-        <p:spPr>
+            <a:endParaRPr lang="en-US" sz="2400"/>
+          </a:p>
+        </p:txBody>
+      </p:sp>
+      <p:sp>
+        <p:nvSpPr>
+          <p:cNvPr id="1951829034" name="Shape 2"/>
+          <p:cNvSpPr/>
+          <p:nvPr/>
+        </p:nvSpPr>
+        <p:spPr bwMode="auto">
           <a:xfrm>
             <a:off x="685800" y="1901952"/>
             <a:ext cx="1664208" cy="960120"/>
@@ -2074,17 +2142,20 @@
           <a:bodyPr/>
           <a:lstStyle/>
           <a:p>
+            <a:pPr>
+              <a:defRPr/>
+            </a:pPr>
             <a:endParaRPr lang="en-US"/>
           </a:p>
         </p:txBody>
       </p:sp>
       <p:sp>
         <p:nvSpPr>
-          <p:cNvPr id="5" name="Text 3"/>
-          <p:cNvSpPr/>
-          <p:nvPr/>
-        </p:nvSpPr>
-        <p:spPr>
+          <p:cNvPr id="43934232" name="Text 3"/>
+          <p:cNvSpPr/>
+          <p:nvPr/>
+        </p:nvSpPr>
+        <p:spPr bwMode="auto">
           <a:xfrm>
             <a:off x="795528" y="2157984"/>
             <a:ext cx="1444752" cy="164592"/>
@@ -2101,26 +2172,27 @@
           <a:p>
             <a:pPr marL="0" indent="0" algn="ctr">
               <a:buNone/>
-            </a:pPr>
-            <a:r>
-              <a:rPr lang="en-US" sz="1050" b="1" dirty="0">
+              <a:defRPr/>
+            </a:pPr>
+            <a:r>
+              <a:rPr lang="en-US" sz="1050" b="1">
                 <a:solidFill>
                   <a:srgbClr val="244D73"/>
                 </a:solidFill>
               </a:rPr>
               <a:t>REQUEST</a:t>
             </a:r>
-            <a:endParaRPr lang="en-US" sz="1050" dirty="0"/>
-          </a:p>
-        </p:txBody>
-      </p:sp>
-      <p:sp>
-        <p:nvSpPr>
-          <p:cNvPr id="6" name="Text 4"/>
-          <p:cNvSpPr/>
-          <p:nvPr/>
-        </p:nvSpPr>
-        <p:spPr>
+            <a:endParaRPr lang="en-US" sz="1050"/>
+          </a:p>
+        </p:txBody>
+      </p:sp>
+      <p:sp>
+        <p:nvSpPr>
+          <p:cNvPr id="888598340" name="Text 4"/>
+          <p:cNvSpPr/>
+          <p:nvPr/>
+        </p:nvSpPr>
+        <p:spPr bwMode="auto">
           <a:xfrm>
             <a:off x="795528" y="2423160"/>
             <a:ext cx="1444752" cy="164592"/>
@@ -2137,32 +2209,35 @@
           <a:p>
             <a:pPr marL="0" indent="0" algn="ctr">
               <a:buNone/>
-            </a:pPr>
-            <a:r>
-              <a:rPr lang="en-US" sz="850" dirty="0">
+              <a:defRPr/>
+            </a:pPr>
+            <a:r>
+              <a:rPr lang="en-US" sz="850">
                 <a:solidFill>
                   <a:srgbClr val="16201F"/>
                 </a:solidFill>
               </a:rPr>
               <a:t>PO intent</a:t>
             </a:r>
-            <a:endParaRPr lang="en-US" sz="850" dirty="0"/>
-          </a:p>
-        </p:txBody>
-      </p:sp>
-      <p:sp>
-        <p:nvSpPr>
-          <p:cNvPr id="7" name="Shape 5"/>
-          <p:cNvSpPr/>
-          <p:nvPr/>
-        </p:nvSpPr>
-        <p:spPr>
+            <a:endParaRPr lang="en-US" sz="850"/>
+          </a:p>
+        </p:txBody>
+      </p:sp>
+      <p:sp>
+        <p:nvSpPr>
+          <p:cNvPr id="399393078" name="Shape 5"/>
+          <p:cNvSpPr/>
+          <p:nvPr/>
+        </p:nvSpPr>
+        <p:spPr bwMode="auto">
           <a:xfrm>
             <a:off x="2331720" y="2212848"/>
             <a:ext cx="329184" cy="310896"/>
           </a:xfrm>
           <a:prstGeom prst="chevron">
-            <a:avLst/>
+            <a:avLst>
+              <a:gd name="adj" fmla="val 50000"/>
+            </a:avLst>
           </a:prstGeom>
           <a:solidFill>
             <a:srgbClr val="D7DFDA"/>
@@ -2180,17 +2255,20 @@
           <a:bodyPr/>
           <a:lstStyle/>
           <a:p>
+            <a:pPr>
+              <a:defRPr/>
+            </a:pPr>
             <a:endParaRPr lang="en-US"/>
           </a:p>
         </p:txBody>
       </p:sp>
       <p:sp>
         <p:nvSpPr>
-          <p:cNvPr id="8" name="Shape 6"/>
-          <p:cNvSpPr/>
-          <p:nvPr/>
-        </p:nvSpPr>
-        <p:spPr>
+          <p:cNvPr id="1257023042" name="Shape 6"/>
+          <p:cNvSpPr/>
+          <p:nvPr/>
+        </p:nvSpPr>
+        <p:spPr bwMode="auto">
           <a:xfrm>
             <a:off x="2514600" y="1901952"/>
             <a:ext cx="1664208" cy="960120"/>
@@ -2214,17 +2292,20 @@
           <a:bodyPr/>
           <a:lstStyle/>
           <a:p>
+            <a:pPr>
+              <a:defRPr/>
+            </a:pPr>
             <a:endParaRPr lang="en-US"/>
           </a:p>
         </p:txBody>
       </p:sp>
       <p:sp>
         <p:nvSpPr>
-          <p:cNvPr id="9" name="Text 7"/>
-          <p:cNvSpPr/>
-          <p:nvPr/>
-        </p:nvSpPr>
-        <p:spPr>
+          <p:cNvPr id="1895318541" name="Text 7"/>
+          <p:cNvSpPr/>
+          <p:nvPr/>
+        </p:nvSpPr>
+        <p:spPr bwMode="auto">
           <a:xfrm>
             <a:off x="2624328" y="2157984"/>
             <a:ext cx="1444752" cy="164592"/>
@@ -2241,26 +2322,27 @@
           <a:p>
             <a:pPr marL="0" indent="0" algn="ctr">
               <a:buNone/>
-            </a:pPr>
-            <a:r>
-              <a:rPr lang="en-US" sz="1050" b="1" dirty="0">
+              <a:defRPr/>
+            </a:pPr>
+            <a:r>
+              <a:rPr lang="en-US" sz="1050" b="1">
                 <a:solidFill>
                   <a:srgbClr val="244D73"/>
                 </a:solidFill>
               </a:rPr>
               <a:t>DELIVER</a:t>
             </a:r>
-            <a:endParaRPr lang="en-US" sz="1050" dirty="0"/>
-          </a:p>
-        </p:txBody>
-      </p:sp>
-      <p:sp>
-        <p:nvSpPr>
-          <p:cNvPr id="10" name="Text 8"/>
-          <p:cNvSpPr/>
-          <p:nvPr/>
-        </p:nvSpPr>
-        <p:spPr>
+            <a:endParaRPr lang="en-US" sz="1050"/>
+          </a:p>
+        </p:txBody>
+      </p:sp>
+      <p:sp>
+        <p:nvSpPr>
+          <p:cNvPr id="32674173" name="Text 8"/>
+          <p:cNvSpPr/>
+          <p:nvPr/>
+        </p:nvSpPr>
+        <p:spPr bwMode="auto">
           <a:xfrm>
             <a:off x="2624328" y="2423160"/>
             <a:ext cx="1444752" cy="164592"/>
@@ -2277,32 +2359,35 @@
           <a:p>
             <a:pPr marL="0" indent="0" algn="ctr">
               <a:buNone/>
-            </a:pPr>
-            <a:r>
-              <a:rPr lang="en-US" sz="850" dirty="0">
+              <a:defRPr/>
+            </a:pPr>
+            <a:r>
+              <a:rPr lang="en-US" sz="850">
                 <a:solidFill>
                   <a:srgbClr val="16201F"/>
                 </a:solidFill>
               </a:rPr>
               <a:t>performance</a:t>
             </a:r>
-            <a:endParaRPr lang="en-US" sz="850" dirty="0"/>
-          </a:p>
-        </p:txBody>
-      </p:sp>
-      <p:sp>
-        <p:nvSpPr>
-          <p:cNvPr id="11" name="Shape 9"/>
-          <p:cNvSpPr/>
-          <p:nvPr/>
-        </p:nvSpPr>
-        <p:spPr>
-          <a:xfrm>
-            <a:off x="4160520" y="2212848"/>
+            <a:endParaRPr lang="en-US" sz="850"/>
+          </a:p>
+        </p:txBody>
+      </p:sp>
+      <p:sp>
+        <p:nvSpPr>
+          <p:cNvPr id="1537525858" name="Shape 9"/>
+          <p:cNvSpPr/>
+          <p:nvPr/>
+        </p:nvSpPr>
+        <p:spPr bwMode="auto">
+          <a:xfrm>
+            <a:off x="4160519" y="2212848"/>
             <a:ext cx="329184" cy="310896"/>
           </a:xfrm>
           <a:prstGeom prst="chevron">
-            <a:avLst/>
+            <a:avLst>
+              <a:gd name="adj" fmla="val 50000"/>
+            </a:avLst>
           </a:prstGeom>
           <a:solidFill>
             <a:srgbClr val="D7DFDA"/>
@@ -2320,17 +2405,20 @@
           <a:bodyPr/>
           <a:lstStyle/>
           <a:p>
+            <a:pPr>
+              <a:defRPr/>
+            </a:pPr>
             <a:endParaRPr lang="en-US"/>
           </a:p>
         </p:txBody>
       </p:sp>
       <p:sp>
         <p:nvSpPr>
-          <p:cNvPr id="12" name="Shape 10"/>
-          <p:cNvSpPr/>
-          <p:nvPr/>
-        </p:nvSpPr>
-        <p:spPr>
+          <p:cNvPr id="1208617558" name="Shape 10"/>
+          <p:cNvSpPr/>
+          <p:nvPr/>
+        </p:nvSpPr>
+        <p:spPr bwMode="auto">
           <a:xfrm>
             <a:off x="4343400" y="1901952"/>
             <a:ext cx="1664208" cy="960120"/>
@@ -2354,17 +2442,20 @@
           <a:bodyPr/>
           <a:lstStyle/>
           <a:p>
+            <a:pPr>
+              <a:defRPr/>
+            </a:pPr>
             <a:endParaRPr lang="en-US"/>
           </a:p>
         </p:txBody>
       </p:sp>
       <p:sp>
         <p:nvSpPr>
-          <p:cNvPr id="13" name="Text 11"/>
-          <p:cNvSpPr/>
-          <p:nvPr/>
-        </p:nvSpPr>
-        <p:spPr>
+          <p:cNvPr id="481284194" name="Text 11"/>
+          <p:cNvSpPr/>
+          <p:nvPr/>
+        </p:nvSpPr>
+        <p:spPr bwMode="auto">
           <a:xfrm>
             <a:off x="4453128" y="2157984"/>
             <a:ext cx="1444752" cy="164592"/>
@@ -2381,26 +2472,27 @@
           <a:p>
             <a:pPr marL="0" indent="0" algn="ctr">
               <a:buNone/>
-            </a:pPr>
-            <a:r>
-              <a:rPr lang="en-US" sz="1050" b="1" dirty="0">
+              <a:defRPr/>
+            </a:pPr>
+            <a:r>
+              <a:rPr lang="en-US" sz="1050" b="1">
                 <a:solidFill>
                   <a:srgbClr val="B9822D"/>
                 </a:solidFill>
               </a:rPr>
               <a:t>INVOICE</a:t>
             </a:r>
-            <a:endParaRPr lang="en-US" sz="1050" dirty="0"/>
-          </a:p>
-        </p:txBody>
-      </p:sp>
-      <p:sp>
-        <p:nvSpPr>
-          <p:cNvPr id="14" name="Text 12"/>
-          <p:cNvSpPr/>
-          <p:nvPr/>
-        </p:nvSpPr>
-        <p:spPr>
+            <a:endParaRPr lang="en-US" sz="1050"/>
+          </a:p>
+        </p:txBody>
+      </p:sp>
+      <p:sp>
+        <p:nvSpPr>
+          <p:cNvPr id="1334623598" name="Text 12"/>
+          <p:cNvSpPr/>
+          <p:nvPr/>
+        </p:nvSpPr>
+        <p:spPr bwMode="auto">
           <a:xfrm>
             <a:off x="4453128" y="2423160"/>
             <a:ext cx="1444752" cy="164592"/>
@@ -2417,32 +2509,35 @@
           <a:p>
             <a:pPr marL="0" indent="0" algn="ctr">
               <a:buNone/>
-            </a:pPr>
-            <a:r>
-              <a:rPr lang="en-US" sz="850" dirty="0">
+              <a:defRPr/>
+            </a:pPr>
+            <a:r>
+              <a:rPr lang="en-US" sz="850">
                 <a:solidFill>
                   <a:srgbClr val="16201F"/>
                 </a:solidFill>
               </a:rPr>
               <a:t>Ask Value</a:t>
             </a:r>
-            <a:endParaRPr lang="en-US" sz="850" dirty="0"/>
-          </a:p>
-        </p:txBody>
-      </p:sp>
-      <p:sp>
-        <p:nvSpPr>
-          <p:cNvPr id="15" name="Shape 13"/>
-          <p:cNvSpPr/>
-          <p:nvPr/>
-        </p:nvSpPr>
-        <p:spPr>
+            <a:endParaRPr lang="en-US" sz="850"/>
+          </a:p>
+        </p:txBody>
+      </p:sp>
+      <p:sp>
+        <p:nvSpPr>
+          <p:cNvPr id="819891214" name="Shape 13"/>
+          <p:cNvSpPr/>
+          <p:nvPr/>
+        </p:nvSpPr>
+        <p:spPr bwMode="auto">
           <a:xfrm>
             <a:off x="5989320" y="2212848"/>
             <a:ext cx="329184" cy="310896"/>
           </a:xfrm>
           <a:prstGeom prst="chevron">
-            <a:avLst/>
+            <a:avLst>
+              <a:gd name="adj" fmla="val 50000"/>
+            </a:avLst>
           </a:prstGeom>
           <a:solidFill>
             <a:srgbClr val="D7DFDA"/>
@@ -2460,17 +2555,20 @@
           <a:bodyPr/>
           <a:lstStyle/>
           <a:p>
+            <a:pPr>
+              <a:defRPr/>
+            </a:pPr>
             <a:endParaRPr lang="en-US"/>
           </a:p>
         </p:txBody>
       </p:sp>
       <p:sp>
         <p:nvSpPr>
-          <p:cNvPr id="16" name="Shape 14"/>
-          <p:cNvSpPr/>
-          <p:nvPr/>
-        </p:nvSpPr>
-        <p:spPr>
+          <p:cNvPr id="888261847" name="Shape 14"/>
+          <p:cNvSpPr/>
+          <p:nvPr/>
+        </p:nvSpPr>
+        <p:spPr bwMode="auto">
           <a:xfrm>
             <a:off x="6172200" y="1901952"/>
             <a:ext cx="1664208" cy="960120"/>
@@ -2494,17 +2592,20 @@
           <a:bodyPr/>
           <a:lstStyle/>
           <a:p>
+            <a:pPr>
+              <a:defRPr/>
+            </a:pPr>
             <a:endParaRPr lang="en-US"/>
           </a:p>
         </p:txBody>
       </p:sp>
       <p:sp>
         <p:nvSpPr>
-          <p:cNvPr id="17" name="Text 15"/>
-          <p:cNvSpPr/>
-          <p:nvPr/>
-        </p:nvSpPr>
-        <p:spPr>
+          <p:cNvPr id="1379616066" name="Text 15"/>
+          <p:cNvSpPr/>
+          <p:nvPr/>
+        </p:nvSpPr>
+        <p:spPr bwMode="auto">
           <a:xfrm>
             <a:off x="6281928" y="2157984"/>
             <a:ext cx="1444752" cy="164592"/>
@@ -2521,26 +2622,27 @@
           <a:p>
             <a:pPr marL="0" indent="0" algn="ctr">
               <a:buNone/>
-            </a:pPr>
-            <a:r>
-              <a:rPr lang="en-US" sz="1050" b="1" dirty="0">
+              <a:defRPr/>
+            </a:pPr>
+            <a:r>
+              <a:rPr lang="en-US" sz="1050" b="1">
                 <a:solidFill>
                   <a:srgbClr val="B9822D"/>
                 </a:solidFill>
               </a:rPr>
               <a:t>MATCH</a:t>
             </a:r>
-            <a:endParaRPr lang="en-US" sz="1050" dirty="0"/>
-          </a:p>
-        </p:txBody>
-      </p:sp>
-      <p:sp>
-        <p:nvSpPr>
-          <p:cNvPr id="18" name="Text 16"/>
-          <p:cNvSpPr/>
-          <p:nvPr/>
-        </p:nvSpPr>
-        <p:spPr>
+            <a:endParaRPr lang="en-US" sz="1050"/>
+          </a:p>
+        </p:txBody>
+      </p:sp>
+      <p:sp>
+        <p:nvSpPr>
+          <p:cNvPr id="461335773" name="Text 16"/>
+          <p:cNvSpPr/>
+          <p:nvPr/>
+        </p:nvSpPr>
+        <p:spPr bwMode="auto">
           <a:xfrm>
             <a:off x="6281928" y="2423160"/>
             <a:ext cx="1444752" cy="164592"/>
@@ -2557,32 +2659,35 @@
           <a:p>
             <a:pPr marL="0" indent="0" algn="ctr">
               <a:buNone/>
-            </a:pPr>
-            <a:r>
-              <a:rPr lang="en-US" sz="850" dirty="0">
+              <a:defRPr/>
+            </a:pPr>
+            <a:r>
+              <a:rPr lang="en-US" sz="850">
                 <a:solidFill>
                   <a:srgbClr val="16201F"/>
                 </a:solidFill>
               </a:rPr>
               <a:t>evidence test</a:t>
             </a:r>
-            <a:endParaRPr lang="en-US" sz="850" dirty="0"/>
-          </a:p>
-        </p:txBody>
-      </p:sp>
-      <p:sp>
-        <p:nvSpPr>
-          <p:cNvPr id="19" name="Shape 17"/>
-          <p:cNvSpPr/>
-          <p:nvPr/>
-        </p:nvSpPr>
-        <p:spPr>
+            <a:endParaRPr lang="en-US" sz="850"/>
+          </a:p>
+        </p:txBody>
+      </p:sp>
+      <p:sp>
+        <p:nvSpPr>
+          <p:cNvPr id="453630575" name="Shape 17"/>
+          <p:cNvSpPr/>
+          <p:nvPr/>
+        </p:nvSpPr>
+        <p:spPr bwMode="auto">
           <a:xfrm>
             <a:off x="7818120" y="2212848"/>
             <a:ext cx="329184" cy="310896"/>
           </a:xfrm>
           <a:prstGeom prst="chevron">
-            <a:avLst/>
+            <a:avLst>
+              <a:gd name="adj" fmla="val 50000"/>
+            </a:avLst>
           </a:prstGeom>
           <a:solidFill>
             <a:srgbClr val="D7DFDA"/>
@@ -2600,17 +2705,20 @@
           <a:bodyPr/>
           <a:lstStyle/>
           <a:p>
+            <a:pPr>
+              <a:defRPr/>
+            </a:pPr>
             <a:endParaRPr lang="en-US"/>
           </a:p>
         </p:txBody>
       </p:sp>
       <p:sp>
         <p:nvSpPr>
-          <p:cNvPr id="20" name="Shape 18"/>
-          <p:cNvSpPr/>
-          <p:nvPr/>
-        </p:nvSpPr>
-        <p:spPr>
+          <p:cNvPr id="801531793" name="Shape 18"/>
+          <p:cNvSpPr/>
+          <p:nvPr/>
+        </p:nvSpPr>
+        <p:spPr bwMode="auto">
           <a:xfrm>
             <a:off x="8001000" y="1901952"/>
             <a:ext cx="1664208" cy="960120"/>
@@ -2634,17 +2742,20 @@
           <a:bodyPr/>
           <a:lstStyle/>
           <a:p>
+            <a:pPr>
+              <a:defRPr/>
+            </a:pPr>
             <a:endParaRPr lang="en-US"/>
           </a:p>
         </p:txBody>
       </p:sp>
       <p:sp>
         <p:nvSpPr>
-          <p:cNvPr id="21" name="Text 19"/>
-          <p:cNvSpPr/>
-          <p:nvPr/>
-        </p:nvSpPr>
-        <p:spPr>
+          <p:cNvPr id="106205021" name="Text 19"/>
+          <p:cNvSpPr/>
+          <p:nvPr/>
+        </p:nvSpPr>
+        <p:spPr bwMode="auto">
           <a:xfrm>
             <a:off x="8110728" y="2157984"/>
             <a:ext cx="1444752" cy="164592"/>
@@ -2661,26 +2772,27 @@
           <a:p>
             <a:pPr marL="0" indent="0" algn="ctr">
               <a:buNone/>
-            </a:pPr>
-            <a:r>
-              <a:rPr lang="en-US" sz="1050" b="1" dirty="0">
+              <a:defRPr/>
+            </a:pPr>
+            <a:r>
+              <a:rPr lang="en-US" sz="1050" b="1">
                 <a:solidFill>
                   <a:srgbClr val="1F7A5C"/>
                 </a:solidFill>
               </a:rPr>
               <a:t>DUE</a:t>
             </a:r>
-            <a:endParaRPr lang="en-US" sz="1050" dirty="0"/>
-          </a:p>
-        </p:txBody>
-      </p:sp>
-      <p:sp>
-        <p:nvSpPr>
-          <p:cNvPr id="22" name="Text 20"/>
-          <p:cNvSpPr/>
-          <p:nvPr/>
-        </p:nvSpPr>
-        <p:spPr>
+            <a:endParaRPr lang="en-US" sz="1050"/>
+          </a:p>
+        </p:txBody>
+      </p:sp>
+      <p:sp>
+        <p:nvSpPr>
+          <p:cNvPr id="1367691593" name="Text 20"/>
+          <p:cNvSpPr/>
+          <p:nvPr/>
+        </p:nvSpPr>
+        <p:spPr bwMode="auto">
           <a:xfrm>
             <a:off x="8110728" y="2423160"/>
             <a:ext cx="1444752" cy="164592"/>
@@ -2697,32 +2809,35 @@
           <a:p>
             <a:pPr marL="0" indent="0" algn="ctr">
               <a:buNone/>
-            </a:pPr>
-            <a:r>
-              <a:rPr lang="en-US" sz="850" dirty="0">
+              <a:defRPr/>
+            </a:pPr>
+            <a:r>
+              <a:rPr lang="en-US" sz="850">
                 <a:solidFill>
                   <a:srgbClr val="16201F"/>
                 </a:solidFill>
               </a:rPr>
               <a:t>accepted payable</a:t>
             </a:r>
-            <a:endParaRPr lang="en-US" sz="850" dirty="0"/>
-          </a:p>
-        </p:txBody>
-      </p:sp>
-      <p:sp>
-        <p:nvSpPr>
-          <p:cNvPr id="23" name="Shape 21"/>
-          <p:cNvSpPr/>
-          <p:nvPr/>
-        </p:nvSpPr>
-        <p:spPr>
+            <a:endParaRPr lang="en-US" sz="850"/>
+          </a:p>
+        </p:txBody>
+      </p:sp>
+      <p:sp>
+        <p:nvSpPr>
+          <p:cNvPr id="53808682" name="Shape 21"/>
+          <p:cNvSpPr/>
+          <p:nvPr/>
+        </p:nvSpPr>
+        <p:spPr bwMode="auto">
           <a:xfrm>
             <a:off x="9646920" y="2212848"/>
             <a:ext cx="329184" cy="310896"/>
           </a:xfrm>
           <a:prstGeom prst="chevron">
-            <a:avLst/>
+            <a:avLst>
+              <a:gd name="adj" fmla="val 50000"/>
+            </a:avLst>
           </a:prstGeom>
           <a:solidFill>
             <a:srgbClr val="D7DFDA"/>
@@ -2740,17 +2855,20 @@
           <a:bodyPr/>
           <a:lstStyle/>
           <a:p>
+            <a:pPr>
+              <a:defRPr/>
+            </a:pPr>
             <a:endParaRPr lang="en-US"/>
           </a:p>
         </p:txBody>
       </p:sp>
       <p:sp>
         <p:nvSpPr>
-          <p:cNvPr id="24" name="Shape 22"/>
-          <p:cNvSpPr/>
-          <p:nvPr/>
-        </p:nvSpPr>
-        <p:spPr>
+          <p:cNvPr id="1564179077" name="Shape 22"/>
+          <p:cNvSpPr/>
+          <p:nvPr/>
+        </p:nvSpPr>
+        <p:spPr bwMode="auto">
           <a:xfrm>
             <a:off x="9829800" y="1901952"/>
             <a:ext cx="1664208" cy="960120"/>
@@ -2774,17 +2892,20 @@
           <a:bodyPr/>
           <a:lstStyle/>
           <a:p>
+            <a:pPr>
+              <a:defRPr/>
+            </a:pPr>
             <a:endParaRPr lang="en-US"/>
           </a:p>
         </p:txBody>
       </p:sp>
       <p:sp>
         <p:nvSpPr>
-          <p:cNvPr id="25" name="Text 23"/>
-          <p:cNvSpPr/>
-          <p:nvPr/>
-        </p:nvSpPr>
-        <p:spPr>
+          <p:cNvPr id="252106013" name="Text 23"/>
+          <p:cNvSpPr/>
+          <p:nvPr/>
+        </p:nvSpPr>
+        <p:spPr bwMode="auto">
           <a:xfrm>
             <a:off x="9939528" y="2157984"/>
             <a:ext cx="1444752" cy="164592"/>
@@ -2801,26 +2922,27 @@
           <a:p>
             <a:pPr marL="0" indent="0" algn="ctr">
               <a:buNone/>
-            </a:pPr>
-            <a:r>
-              <a:rPr lang="en-US" sz="1050" b="1" dirty="0">
+              <a:defRPr/>
+            </a:pPr>
+            <a:r>
+              <a:rPr lang="en-US" sz="1050" b="1">
                 <a:solidFill>
                   <a:srgbClr val="1F7A5C"/>
                 </a:solidFill>
               </a:rPr>
               <a:t>SETTLE</a:t>
             </a:r>
-            <a:endParaRPr lang="en-US" sz="1050" dirty="0"/>
-          </a:p>
-        </p:txBody>
-      </p:sp>
-      <p:sp>
-        <p:nvSpPr>
-          <p:cNvPr id="26" name="Text 24"/>
-          <p:cNvSpPr/>
-          <p:nvPr/>
-        </p:nvSpPr>
-        <p:spPr>
+            <a:endParaRPr lang="en-US" sz="1050"/>
+          </a:p>
+        </p:txBody>
+      </p:sp>
+      <p:sp>
+        <p:nvSpPr>
+          <p:cNvPr id="1713530389" name="Text 24"/>
+          <p:cNvSpPr/>
+          <p:nvPr/>
+        </p:nvSpPr>
+        <p:spPr bwMode="auto">
           <a:xfrm>
             <a:off x="9939528" y="2423160"/>
             <a:ext cx="1444752" cy="164592"/>
@@ -2837,26 +2959,27 @@
           <a:p>
             <a:pPr marL="0" indent="0" algn="ctr">
               <a:buNone/>
-            </a:pPr>
-            <a:r>
-              <a:rPr lang="en-US" sz="850" dirty="0">
+              <a:defRPr/>
+            </a:pPr>
+            <a:r>
+              <a:rPr lang="en-US" sz="850">
                 <a:solidFill>
                   <a:srgbClr val="16201F"/>
                 </a:solidFill>
               </a:rPr>
               <a:t>received value</a:t>
             </a:r>
-            <a:endParaRPr lang="en-US" sz="850" dirty="0"/>
-          </a:p>
-        </p:txBody>
-      </p:sp>
-      <p:sp>
-        <p:nvSpPr>
-          <p:cNvPr id="27" name="Shape 25"/>
-          <p:cNvSpPr/>
-          <p:nvPr/>
-        </p:nvSpPr>
-        <p:spPr>
+            <a:endParaRPr lang="en-US" sz="850"/>
+          </a:p>
+        </p:txBody>
+      </p:sp>
+      <p:sp>
+        <p:nvSpPr>
+          <p:cNvPr id="718924753" name="Shape 25"/>
+          <p:cNvSpPr/>
+          <p:nvPr/>
+        </p:nvSpPr>
+        <p:spPr bwMode="auto">
           <a:xfrm>
             <a:off x="841248" y="3767328"/>
             <a:ext cx="10378440" cy="0"/>
@@ -2876,19 +2999,22 @@
           <a:bodyPr/>
           <a:lstStyle/>
           <a:p>
+            <a:pPr>
+              <a:defRPr/>
+            </a:pPr>
             <a:endParaRPr lang="en-US"/>
           </a:p>
         </p:txBody>
       </p:sp>
       <p:sp>
         <p:nvSpPr>
-          <p:cNvPr id="28" name="Text 26"/>
-          <p:cNvSpPr/>
-          <p:nvPr/>
-        </p:nvSpPr>
-        <p:spPr>
-          <a:xfrm>
-            <a:off x="868680" y="4160520"/>
+          <p:cNvPr id="226625352" name="Text 26"/>
+          <p:cNvSpPr/>
+          <p:nvPr/>
+        </p:nvSpPr>
+        <p:spPr bwMode="auto">
+          <a:xfrm>
+            <a:off x="868680" y="4160519"/>
             <a:ext cx="2880360" cy="219456"/>
           </a:xfrm>
           <a:prstGeom prst="rect">
@@ -2903,26 +3029,27 @@
           <a:p>
             <a:pPr marL="0" indent="0">
               <a:buNone/>
-            </a:pPr>
-            <a:r>
-              <a:rPr lang="en-US" sz="1250" b="1" dirty="0">
+              <a:defRPr/>
+            </a:pPr>
+            <a:r>
+              <a:rPr lang="en-US" sz="1250" b="1">
                 <a:solidFill>
                   <a:srgbClr val="244D73"/>
                 </a:solidFill>
               </a:rPr>
               <a:t>Accounting truth</a:t>
             </a:r>
-            <a:endParaRPr lang="en-US" sz="1250" dirty="0"/>
-          </a:p>
-        </p:txBody>
-      </p:sp>
-      <p:sp>
-        <p:nvSpPr>
-          <p:cNvPr id="29" name="Text 27"/>
-          <p:cNvSpPr/>
-          <p:nvPr/>
-        </p:nvSpPr>
-        <p:spPr>
+            <a:endParaRPr lang="en-US" sz="1250"/>
+          </a:p>
+        </p:txBody>
+      </p:sp>
+      <p:sp>
+        <p:nvSpPr>
+          <p:cNvPr id="304216684" name="Text 27"/>
+          <p:cNvSpPr/>
+          <p:nvPr/>
+        </p:nvSpPr>
+        <p:spPr bwMode="auto">
           <a:xfrm>
             <a:off x="868680" y="4517136"/>
             <a:ext cx="3063240" cy="713232"/>
@@ -2941,28 +3068,29 @@
           <a:p>
             <a:pPr marL="0" indent="0">
               <a:buNone/>
-            </a:pPr>
-            <a:r>
-              <a:rPr lang="en-US" sz="1020" dirty="0">
+              <a:defRPr/>
+            </a:pPr>
+            <a:r>
+              <a:rPr lang="en-US" sz="1000">
                 <a:solidFill>
                   <a:srgbClr val="5D6A67"/>
                 </a:solidFill>
               </a:rPr>
               <a:t>PO, delivery, invoice, acceptance, and payment are distinct states.</a:t>
             </a:r>
-            <a:endParaRPr lang="en-US" sz="1020" dirty="0"/>
-          </a:p>
-        </p:txBody>
-      </p:sp>
-      <p:sp>
-        <p:nvSpPr>
-          <p:cNvPr id="30" name="Text 28"/>
-          <p:cNvSpPr/>
-          <p:nvPr/>
-        </p:nvSpPr>
-        <p:spPr>
-          <a:xfrm>
-            <a:off x="4617720" y="4160520"/>
+            <a:endParaRPr lang="en-US" sz="1000"/>
+          </a:p>
+        </p:txBody>
+      </p:sp>
+      <p:sp>
+        <p:nvSpPr>
+          <p:cNvPr id="1413123628" name="Text 28"/>
+          <p:cNvSpPr/>
+          <p:nvPr/>
+        </p:nvSpPr>
+        <p:spPr bwMode="auto">
+          <a:xfrm>
+            <a:off x="4617720" y="4160519"/>
             <a:ext cx="2880360" cy="219456"/>
           </a:xfrm>
           <a:prstGeom prst="rect">
@@ -2977,26 +3105,27 @@
           <a:p>
             <a:pPr marL="0" indent="0">
               <a:buNone/>
-            </a:pPr>
-            <a:r>
-              <a:rPr lang="en-US" sz="1250" b="1" dirty="0">
+              <a:defRPr/>
+            </a:pPr>
+            <a:r>
+              <a:rPr lang="en-US" sz="1250" b="1">
                 <a:solidFill>
                   <a:srgbClr val="B9822D"/>
                 </a:solidFill>
               </a:rPr>
               <a:t>Risk control</a:t>
             </a:r>
-            <a:endParaRPr lang="en-US" sz="1250" dirty="0"/>
-          </a:p>
-        </p:txBody>
-      </p:sp>
-      <p:sp>
-        <p:nvSpPr>
-          <p:cNvPr id="31" name="Text 29"/>
-          <p:cNvSpPr/>
-          <p:nvPr/>
-        </p:nvSpPr>
-        <p:spPr>
+            <a:endParaRPr lang="en-US" sz="1250"/>
+          </a:p>
+        </p:txBody>
+      </p:sp>
+      <p:sp>
+        <p:nvSpPr>
+          <p:cNvPr id="1047059690" name="Text 29"/>
+          <p:cNvSpPr/>
+          <p:nvPr/>
+        </p:nvSpPr>
+        <p:spPr bwMode="auto">
           <a:xfrm>
             <a:off x="4617720" y="4517136"/>
             <a:ext cx="3063240" cy="713232"/>
@@ -3015,28 +3144,29 @@
           <a:p>
             <a:pPr marL="0" indent="0">
               <a:buNone/>
-            </a:pPr>
-            <a:r>
-              <a:rPr lang="en-US" sz="1020" dirty="0">
+              <a:defRPr/>
+            </a:pPr>
+            <a:r>
+              <a:rPr lang="en-US" sz="1000">
                 <a:solidFill>
                   <a:srgbClr val="5D6A67"/>
                 </a:solidFill>
               </a:rPr>
               <a:t>Duplicate prevention and buyer acceptance block financing of weak claims.</a:t>
             </a:r>
-            <a:endParaRPr lang="en-US" sz="1020" dirty="0"/>
-          </a:p>
-        </p:txBody>
-      </p:sp>
-      <p:sp>
-        <p:nvSpPr>
-          <p:cNvPr id="32" name="Text 30"/>
-          <p:cNvSpPr/>
-          <p:nvPr/>
-        </p:nvSpPr>
-        <p:spPr>
-          <a:xfrm>
-            <a:off x="8366760" y="4160520"/>
+            <a:endParaRPr lang="en-US" sz="1000"/>
+          </a:p>
+        </p:txBody>
+      </p:sp>
+      <p:sp>
+        <p:nvSpPr>
+          <p:cNvPr id="1977998466" name="Text 30"/>
+          <p:cNvSpPr/>
+          <p:nvPr/>
+        </p:nvSpPr>
+        <p:spPr bwMode="auto">
+          <a:xfrm>
+            <a:off x="8366760" y="4160519"/>
             <a:ext cx="2880360" cy="219456"/>
           </a:xfrm>
           <a:prstGeom prst="rect">
@@ -3051,26 +3181,27 @@
           <a:p>
             <a:pPr marL="0" indent="0">
               <a:buNone/>
-            </a:pPr>
-            <a:r>
-              <a:rPr lang="en-US" sz="1250" b="1" dirty="0">
+              <a:defRPr/>
+            </a:pPr>
+            <a:r>
+              <a:rPr lang="en-US" sz="1250" b="1">
                 <a:solidFill>
                   <a:srgbClr val="1F7A5C"/>
                 </a:solidFill>
               </a:rPr>
               <a:t>Programmable settlement</a:t>
             </a:r>
-            <a:endParaRPr lang="en-US" sz="1250" dirty="0"/>
-          </a:p>
-        </p:txBody>
-      </p:sp>
-      <p:sp>
-        <p:nvSpPr>
-          <p:cNvPr id="33" name="Text 31"/>
-          <p:cNvSpPr/>
-          <p:nvPr/>
-        </p:nvSpPr>
-        <p:spPr>
+            <a:endParaRPr lang="en-US" sz="1250"/>
+          </a:p>
+        </p:txBody>
+      </p:sp>
+      <p:sp>
+        <p:nvSpPr>
+          <p:cNvPr id="1728442118" name="Text 31"/>
+          <p:cNvSpPr/>
+          <p:nvPr/>
+        </p:nvSpPr>
+        <p:spPr bwMode="auto">
           <a:xfrm>
             <a:off x="8366760" y="4517136"/>
             <a:ext cx="3063240" cy="713232"/>
@@ -3089,26 +3220,27 @@
           <a:p>
             <a:pPr marL="0" indent="0">
               <a:buNone/>
-            </a:pPr>
-            <a:r>
-              <a:rPr lang="en-US" sz="1020" dirty="0">
+              <a:defRPr/>
+            </a:pPr>
+            <a:r>
+              <a:rPr lang="en-US" sz="1000">
                 <a:solidFill>
                   <a:srgbClr val="5D6A67"/>
                 </a:solidFill>
               </a:rPr>
               <a:t>USDC escrow distributes principal, yield, fees, and residual balances.</a:t>
             </a:r>
-            <a:endParaRPr lang="en-US" sz="1020" dirty="0"/>
-          </a:p>
-        </p:txBody>
-      </p:sp>
-      <p:sp>
-        <p:nvSpPr>
-          <p:cNvPr id="34" name="Shape 32"/>
-          <p:cNvSpPr/>
-          <p:nvPr/>
-        </p:nvSpPr>
-        <p:spPr>
+            <a:endParaRPr lang="en-US" sz="1000"/>
+          </a:p>
+        </p:txBody>
+      </p:sp>
+      <p:sp>
+        <p:nvSpPr>
+          <p:cNvPr id="981446579" name="Shape 32"/>
+          <p:cNvSpPr/>
+          <p:nvPr/>
+        </p:nvSpPr>
+        <p:spPr bwMode="auto">
           <a:xfrm>
             <a:off x="502920" y="6419088"/>
             <a:ext cx="11201400" cy="0"/>
@@ -3128,17 +3260,20 @@
           <a:bodyPr/>
           <a:lstStyle/>
           <a:p>
+            <a:pPr>
+              <a:defRPr/>
+            </a:pPr>
             <a:endParaRPr lang="en-US"/>
           </a:p>
         </p:txBody>
       </p:sp>
       <p:sp>
         <p:nvSpPr>
-          <p:cNvPr id="35" name="Text 33"/>
-          <p:cNvSpPr/>
-          <p:nvPr/>
-        </p:nvSpPr>
-        <p:spPr>
+          <p:cNvPr id="1879776364" name="Text 33"/>
+          <p:cNvSpPr/>
+          <p:nvPr/>
+        </p:nvSpPr>
+        <p:spPr bwMode="auto">
           <a:xfrm>
             <a:off x="502920" y="6473952"/>
             <a:ext cx="3840480" cy="201168"/>
@@ -3155,29 +3290,30 @@
           <a:p>
             <a:pPr marL="0" indent="0">
               <a:buNone/>
-            </a:pPr>
-            <a:r>
-              <a:rPr lang="en-US" sz="750" dirty="0">
+              <a:defRPr/>
+            </a:pPr>
+            <a:r>
+              <a:rPr lang="en-US" sz="750">
                 <a:solidFill>
                   <a:srgbClr val="5D6A67"/>
                 </a:solidFill>
-                <a:latin typeface="Aptos" pitchFamily="34" charset="0"/>
-                <a:ea typeface="Aptos" pitchFamily="34" charset="-122"/>
-                <a:cs typeface="Aptos" pitchFamily="34" charset="-120"/>
+                <a:latin typeface="Aptos"/>
+                <a:ea typeface="Aptos"/>
+                <a:cs typeface="Aptos"/>
               </a:rPr>
               <a:t>Smart Finux Labs · Verity SCF</a:t>
             </a:r>
-            <a:endParaRPr lang="en-US" sz="750" dirty="0"/>
-          </a:p>
-        </p:txBody>
-      </p:sp>
-      <p:sp>
-        <p:nvSpPr>
-          <p:cNvPr id="36" name="Text 34"/>
-          <p:cNvSpPr/>
-          <p:nvPr/>
-        </p:nvSpPr>
-        <p:spPr>
+            <a:endParaRPr lang="en-US" sz="750"/>
+          </a:p>
+        </p:txBody>
+      </p:sp>
+      <p:sp>
+        <p:nvSpPr>
+          <p:cNvPr id="806455649" name="Text 34"/>
+          <p:cNvSpPr/>
+          <p:nvPr/>
+        </p:nvSpPr>
+        <p:spPr bwMode="auto">
           <a:xfrm>
             <a:off x="11201400" y="6473952"/>
             <a:ext cx="502920" cy="201168"/>
@@ -3194,19 +3330,20 @@
           <a:p>
             <a:pPr marL="0" indent="0" algn="r">
               <a:buNone/>
-            </a:pPr>
-            <a:r>
-              <a:rPr lang="en-US" sz="750" b="1" dirty="0">
+              <a:defRPr/>
+            </a:pPr>
+            <a:r>
+              <a:rPr lang="en-US" sz="750" b="1">
                 <a:solidFill>
                   <a:srgbClr val="5D6A67"/>
                 </a:solidFill>
-                <a:latin typeface="Aptos" pitchFamily="34" charset="0"/>
-                <a:ea typeface="Aptos" pitchFamily="34" charset="-122"/>
-                <a:cs typeface="Aptos" pitchFamily="34" charset="-120"/>
+                <a:latin typeface="Aptos"/>
+                <a:ea typeface="Aptos"/>
+                <a:cs typeface="Aptos"/>
               </a:rPr>
               <a:t>02</a:t>
             </a:r>
-            <a:endParaRPr lang="en-US" sz="750" dirty="0"/>
+            <a:endParaRPr lang="en-US" sz="750"/>
           </a:p>
         </p:txBody>
       </p:sp>
@@ -3215,18 +3352,25 @@
   <p:clrMapOvr>
     <a:masterClrMapping/>
   </p:clrMapOvr>
+  <mc:AlternateContent xmlns:mc="http://schemas.openxmlformats.org/markup-compatibility/2006">
+    <mc:Choice xmlns:p159="http://schemas.microsoft.com/office/powerpoint/2015/09/main" xmlns:p14="http://schemas.microsoft.com/office/powerpoint/2010/main" Requires="p159">
+      <p:transition p14:dur="2000" advClick="1"/>
+    </mc:Choice>
+    <mc:Fallback>
+      <p:transition advClick="1"/>
+    </mc:Fallback>
+  </mc:AlternateContent>
 </p:sld>
 </file>
 
 <file path=ppt/slides/slide3.xml><?xml version="1.0" encoding="utf-8"?>
-<p:sld xmlns:a="http://schemas.openxmlformats.org/drawingml/2006/main" xmlns:r="http://schemas.openxmlformats.org/officeDocument/2006/relationships" xmlns:p="http://schemas.openxmlformats.org/presentationml/2006/main">
+<p:sld xmlns:a="http://schemas.openxmlformats.org/drawingml/2006/main" xmlns:r="http://schemas.openxmlformats.org/officeDocument/2006/relationships" xmlns:p="http://schemas.openxmlformats.org/presentationml/2006/main" xmlns:m="http://schemas.openxmlformats.org/officeDocument/2006/math" xmlns:w="http://schemas.openxmlformats.org/wordprocessingml/2006/main" xmlns:mc="http://schemas.openxmlformats.org/markup-compatibility/2006" showMasterPhAnim="0" showMasterSp="1" show="1">
   <p:cSld name="Slide 3">
     <p:bg>
-      <p:bgPr>
+      <p:bgPr shadeToTitle="0">
         <a:solidFill>
           <a:srgbClr val="F7FAFC"/>
         </a:solidFill>
-        <a:effectLst/>
       </p:bgPr>
     </p:bg>
     <p:spTree>
@@ -3235,7 +3379,7 @@
         <p:cNvGrpSpPr/>
         <p:nvPr/>
       </p:nvGrpSpPr>
-      <p:grpSpPr>
+      <p:grpSpPr bwMode="auto">
         <a:xfrm>
           <a:off x="0" y="0"/>
           <a:ext cx="0" cy="0"/>
@@ -3245,11 +3389,11 @@
       </p:grpSpPr>
       <p:sp>
         <p:nvSpPr>
-          <p:cNvPr id="2" name="Text 0"/>
-          <p:cNvSpPr/>
-          <p:nvPr/>
-        </p:nvSpPr>
-        <p:spPr>
+          <p:cNvPr id="160581933" name="Text 0"/>
+          <p:cNvSpPr/>
+          <p:nvPr/>
+        </p:nvSpPr>
+        <p:spPr bwMode="auto">
           <a:xfrm>
             <a:off x="548640" y="347472"/>
             <a:ext cx="4754880" cy="201168"/>
@@ -3266,29 +3410,30 @@
           <a:p>
             <a:pPr marL="0" indent="0">
               <a:buNone/>
-            </a:pPr>
-            <a:r>
-              <a:rPr lang="en-US" sz="800" b="1" dirty="0">
+              <a:defRPr/>
+            </a:pPr>
+            <a:r>
+              <a:rPr lang="en-US" sz="800" b="1">
                 <a:solidFill>
                   <a:srgbClr val="1F7A5C"/>
                 </a:solidFill>
-                <a:latin typeface="Aptos" pitchFamily="34" charset="0"/>
-                <a:ea typeface="Aptos" pitchFamily="34" charset="-122"/>
-                <a:cs typeface="Aptos" pitchFamily="34" charset="-120"/>
+                <a:latin typeface="Aptos"/>
+                <a:ea typeface="Aptos"/>
+                <a:cs typeface="Aptos"/>
               </a:rPr>
               <a:t>SYSTEM VISUALIZATION</a:t>
             </a:r>
-            <a:endParaRPr lang="en-US" sz="800" dirty="0"/>
-          </a:p>
-        </p:txBody>
-      </p:sp>
-      <p:sp>
-        <p:nvSpPr>
-          <p:cNvPr id="3" name="Text 1"/>
-          <p:cNvSpPr/>
-          <p:nvPr/>
-        </p:nvSpPr>
-        <p:spPr>
+            <a:endParaRPr lang="en-US" sz="800"/>
+          </a:p>
+        </p:txBody>
+      </p:sp>
+      <p:sp>
+        <p:nvSpPr>
+          <p:cNvPr id="1911579479" name="Text 1"/>
+          <p:cNvSpPr/>
+          <p:nvPr/>
+        </p:nvSpPr>
+        <p:spPr bwMode="auto">
           <a:xfrm>
             <a:off x="548640" y="621792"/>
             <a:ext cx="9692640" cy="658368"/>
@@ -3307,29 +3452,30 @@
           <a:p>
             <a:pPr marL="0" indent="0">
               <a:buNone/>
-            </a:pPr>
-            <a:r>
-              <a:rPr lang="en-US" sz="2400" b="1" dirty="0">
+              <a:defRPr/>
+            </a:pPr>
+            <a:r>
+              <a:rPr lang="en-US" sz="2400" b="1">
                 <a:solidFill>
                   <a:srgbClr val="16201F"/>
                 </a:solidFill>
-                <a:latin typeface="Aptos Display" pitchFamily="34" charset="0"/>
-                <a:ea typeface="Aptos Display" pitchFamily="34" charset="-122"/>
-                <a:cs typeface="Aptos Display" pitchFamily="34" charset="-120"/>
+                <a:latin typeface="Aptos Display"/>
+                <a:ea typeface="Aptos Display"/>
+                <a:cs typeface="Aptos Display"/>
               </a:rPr>
               <a:t>Architecture connects invoice truth, wallet funding, and settlement execution.</a:t>
             </a:r>
-            <a:endParaRPr lang="en-US" sz="2400" dirty="0"/>
-          </a:p>
-        </p:txBody>
-      </p:sp>
-      <p:sp>
-        <p:nvSpPr>
-          <p:cNvPr id="4" name="Shape 2"/>
-          <p:cNvSpPr/>
-          <p:nvPr/>
-        </p:nvSpPr>
-        <p:spPr>
+            <a:endParaRPr lang="en-US" sz="2400"/>
+          </a:p>
+        </p:txBody>
+      </p:sp>
+      <p:sp>
+        <p:nvSpPr>
+          <p:cNvPr id="719298537" name="Shape 2"/>
+          <p:cNvSpPr/>
+          <p:nvPr/>
+        </p:nvSpPr>
+        <p:spPr bwMode="auto">
           <a:xfrm>
             <a:off x="566928" y="1408441"/>
             <a:ext cx="7909560" cy="4526280"/>
@@ -3353,25 +3499,26 @@
           <a:bodyPr/>
           <a:lstStyle/>
           <a:p>
+            <a:pPr>
+              <a:defRPr/>
+            </a:pPr>
             <a:endParaRPr lang="en-US"/>
           </a:p>
         </p:txBody>
       </p:sp>
       <p:pic>
         <p:nvPicPr>
-          <p:cNvPr id="5" name="Image 0" descr="/Users/jhee/Workplaces/Projects/ConnextiumBootCamp/WeekofCircle/ArcCommerce/Products-SCF/Ideation/Round001/Architecture of Fianace Supply Chain.png"/>
+          <p:cNvPr id="492548937" name="Image 0" descr="/Users/jhee/Workplaces/Projects/ConnextiumBootCamp/WeekofCircle/ArcCommerce/Products-SCF/Ideation/Round001/Architecture of Fianace Supply Chain.png"/>
           <p:cNvPicPr>
             <a:picLocks noChangeAspect="1"/>
           </p:cNvPicPr>
           <p:nvPr/>
         </p:nvPicPr>
-        <p:blipFill>
+        <p:blipFill rotWithShape="1">
           <a:blip r:embed="rId3"/>
-          <a:stretch>
-            <a:fillRect/>
-          </a:stretch>
+          <a:stretch/>
         </p:blipFill>
-        <p:spPr>
+        <p:spPr bwMode="auto">
           <a:xfrm>
             <a:off x="1444752" y="1591056"/>
             <a:ext cx="6144768" cy="4096512"/>
@@ -3383,13 +3530,13 @@
       </p:pic>
       <p:sp>
         <p:nvSpPr>
-          <p:cNvPr id="6" name="Text 3"/>
-          <p:cNvSpPr/>
-          <p:nvPr/>
-        </p:nvSpPr>
-        <p:spPr>
-          <a:xfrm>
-            <a:off x="8796528" y="1508760"/>
+          <p:cNvPr id="83401702" name="Text 3"/>
+          <p:cNvSpPr/>
+          <p:nvPr/>
+        </p:nvSpPr>
+        <p:spPr bwMode="auto">
+          <a:xfrm>
+            <a:off x="8796528" y="1508759"/>
             <a:ext cx="2560320" cy="237744"/>
           </a:xfrm>
           <a:prstGeom prst="rect">
@@ -3404,26 +3551,27 @@
           <a:p>
             <a:pPr marL="0" indent="0">
               <a:buNone/>
-            </a:pPr>
-            <a:r>
-              <a:rPr lang="en-US" sz="1200" b="1" dirty="0">
+              <a:defRPr/>
+            </a:pPr>
+            <a:r>
+              <a:rPr lang="en-US" sz="1200" b="1">
                 <a:solidFill>
                   <a:srgbClr val="16201F"/>
                 </a:solidFill>
               </a:rPr>
               <a:t>What the architecture must prove</a:t>
             </a:r>
-            <a:endParaRPr lang="en-US" sz="1200" dirty="0"/>
-          </a:p>
-        </p:txBody>
-      </p:sp>
-      <p:sp>
-        <p:nvSpPr>
-          <p:cNvPr id="7" name="Shape 4"/>
-          <p:cNvSpPr/>
-          <p:nvPr/>
-        </p:nvSpPr>
-        <p:spPr>
+            <a:endParaRPr lang="en-US" sz="1200"/>
+          </a:p>
+        </p:txBody>
+      </p:sp>
+      <p:sp>
+        <p:nvSpPr>
+          <p:cNvPr id="1318783774" name="Shape 4"/>
+          <p:cNvSpPr/>
+          <p:nvPr/>
+        </p:nvSpPr>
+        <p:spPr bwMode="auto">
           <a:xfrm>
             <a:off x="8851392" y="2043684"/>
             <a:ext cx="64008" cy="64008"/>
@@ -3445,17 +3593,20 @@
           <a:bodyPr/>
           <a:lstStyle/>
           <a:p>
+            <a:pPr>
+              <a:defRPr/>
+            </a:pPr>
             <a:endParaRPr lang="en-US"/>
           </a:p>
         </p:txBody>
       </p:sp>
       <p:sp>
         <p:nvSpPr>
-          <p:cNvPr id="8" name="Text 5"/>
-          <p:cNvSpPr/>
-          <p:nvPr/>
-        </p:nvSpPr>
-        <p:spPr>
+          <p:cNvPr id="1765487765" name="Text 5"/>
+          <p:cNvSpPr/>
+          <p:nvPr/>
+        </p:nvSpPr>
+        <p:spPr bwMode="auto">
           <a:xfrm>
             <a:off x="9015984" y="1993392"/>
             <a:ext cx="2514600" cy="256032"/>
@@ -3474,26 +3625,27 @@
           <a:p>
             <a:pPr marL="0" indent="0">
               <a:buNone/>
-            </a:pPr>
-            <a:r>
-              <a:rPr lang="en-US" sz="1050" dirty="0">
+              <a:defRPr/>
+            </a:pPr>
+            <a:r>
+              <a:rPr lang="en-US" sz="1050">
                 <a:solidFill>
                   <a:srgbClr val="16201F"/>
                 </a:solidFill>
               </a:rPr>
               <a:t>Invoice claims are not financeable until buyer validation creates Due Value.</a:t>
             </a:r>
-            <a:endParaRPr lang="en-US" sz="1050" dirty="0"/>
-          </a:p>
-        </p:txBody>
-      </p:sp>
-      <p:sp>
-        <p:nvSpPr>
-          <p:cNvPr id="9" name="Shape 6"/>
-          <p:cNvSpPr/>
-          <p:nvPr/>
-        </p:nvSpPr>
-        <p:spPr>
+            <a:endParaRPr lang="en-US" sz="1050"/>
+          </a:p>
+        </p:txBody>
+      </p:sp>
+      <p:sp>
+        <p:nvSpPr>
+          <p:cNvPr id="1822469035" name="Shape 6"/>
+          <p:cNvSpPr/>
+          <p:nvPr/>
+        </p:nvSpPr>
+        <p:spPr bwMode="auto">
           <a:xfrm>
             <a:off x="8851392" y="2720340"/>
             <a:ext cx="64008" cy="64008"/>
@@ -3515,17 +3667,20 @@
           <a:bodyPr/>
           <a:lstStyle/>
           <a:p>
+            <a:pPr>
+              <a:defRPr/>
+            </a:pPr>
             <a:endParaRPr lang="en-US"/>
           </a:p>
         </p:txBody>
       </p:sp>
       <p:sp>
         <p:nvSpPr>
-          <p:cNvPr id="10" name="Text 7"/>
-          <p:cNvSpPr/>
-          <p:nvPr/>
-        </p:nvSpPr>
-        <p:spPr>
+          <p:cNvPr id="328809916" name="Text 7"/>
+          <p:cNvSpPr/>
+          <p:nvPr/>
+        </p:nvSpPr>
+        <p:spPr bwMode="auto">
           <a:xfrm>
             <a:off x="9015984" y="2670048"/>
             <a:ext cx="2514600" cy="256032"/>
@@ -3544,26 +3699,27 @@
           <a:p>
             <a:pPr marL="0" indent="0">
               <a:buNone/>
-            </a:pPr>
-            <a:r>
-              <a:rPr lang="en-US" sz="1050" dirty="0">
+              <a:defRPr/>
+            </a:pPr>
+            <a:r>
+              <a:rPr lang="en-US" sz="1050">
                 <a:solidFill>
                   <a:srgbClr val="16201F"/>
                 </a:solidFill>
               </a:rPr>
               <a:t>Circle wallets and USDC settlement make the cash movement programmable.</a:t>
             </a:r>
-            <a:endParaRPr lang="en-US" sz="1050" dirty="0"/>
-          </a:p>
-        </p:txBody>
-      </p:sp>
-      <p:sp>
-        <p:nvSpPr>
-          <p:cNvPr id="11" name="Shape 8"/>
-          <p:cNvSpPr/>
-          <p:nvPr/>
-        </p:nvSpPr>
-        <p:spPr>
+            <a:endParaRPr lang="en-US" sz="1050"/>
+          </a:p>
+        </p:txBody>
+      </p:sp>
+      <p:sp>
+        <p:nvSpPr>
+          <p:cNvPr id="478423609" name="Shape 8"/>
+          <p:cNvSpPr/>
+          <p:nvPr/>
+        </p:nvSpPr>
+        <p:spPr bwMode="auto">
           <a:xfrm>
             <a:off x="8851392" y="3396996"/>
             <a:ext cx="64008" cy="64008"/>
@@ -3585,17 +3741,20 @@
           <a:bodyPr/>
           <a:lstStyle/>
           <a:p>
+            <a:pPr>
+              <a:defRPr/>
+            </a:pPr>
             <a:endParaRPr lang="en-US"/>
           </a:p>
         </p:txBody>
       </p:sp>
       <p:sp>
         <p:nvSpPr>
-          <p:cNvPr id="12" name="Text 9"/>
-          <p:cNvSpPr/>
-          <p:nvPr/>
-        </p:nvSpPr>
-        <p:spPr>
+          <p:cNvPr id="1823159084" name="Text 9"/>
+          <p:cNvSpPr/>
+          <p:nvPr/>
+        </p:nvSpPr>
+        <p:spPr bwMode="auto">
           <a:xfrm>
             <a:off x="9015984" y="3346704"/>
             <a:ext cx="2514600" cy="256032"/>
@@ -3614,26 +3773,27 @@
           <a:p>
             <a:pPr marL="0" indent="0">
               <a:buNone/>
-            </a:pPr>
-            <a:r>
-              <a:rPr lang="en-US" sz="1050" dirty="0">
+              <a:defRPr/>
+            </a:pPr>
+            <a:r>
+              <a:rPr lang="en-US" sz="1050">
                 <a:solidFill>
                   <a:srgbClr val="16201F"/>
                 </a:solidFill>
               </a:rPr>
               <a:t>Escrow state creates an auditable path from advance to maturity repayment.</a:t>
             </a:r>
-            <a:endParaRPr lang="en-US" sz="1050" dirty="0"/>
-          </a:p>
-        </p:txBody>
-      </p:sp>
-      <p:sp>
-        <p:nvSpPr>
-          <p:cNvPr id="13" name="Shape 10"/>
-          <p:cNvSpPr/>
-          <p:nvPr/>
-        </p:nvSpPr>
-        <p:spPr>
+            <a:endParaRPr lang="en-US" sz="1050"/>
+          </a:p>
+        </p:txBody>
+      </p:sp>
+      <p:sp>
+        <p:nvSpPr>
+          <p:cNvPr id="1468535779" name="Shape 10"/>
+          <p:cNvSpPr/>
+          <p:nvPr/>
+        </p:nvSpPr>
+        <p:spPr bwMode="auto">
           <a:xfrm>
             <a:off x="8851392" y="4073652"/>
             <a:ext cx="64008" cy="64008"/>
@@ -3655,17 +3815,20 @@
           <a:bodyPr/>
           <a:lstStyle/>
           <a:p>
+            <a:pPr>
+              <a:defRPr/>
+            </a:pPr>
             <a:endParaRPr lang="en-US"/>
           </a:p>
         </p:txBody>
       </p:sp>
       <p:sp>
         <p:nvSpPr>
-          <p:cNvPr id="14" name="Text 11"/>
-          <p:cNvSpPr/>
-          <p:nvPr/>
-        </p:nvSpPr>
-        <p:spPr>
+          <p:cNvPr id="1530152534" name="Text 11"/>
+          <p:cNvSpPr/>
+          <p:nvPr/>
+        </p:nvSpPr>
+        <p:spPr bwMode="auto">
           <a:xfrm>
             <a:off x="9015984" y="4023360"/>
             <a:ext cx="2514600" cy="256032"/>
@@ -3684,26 +3847,27 @@
           <a:p>
             <a:pPr marL="0" indent="0">
               <a:buNone/>
-            </a:pPr>
-            <a:r>
-              <a:rPr lang="en-US" sz="1050" dirty="0">
+              <a:defRPr/>
+            </a:pPr>
+            <a:r>
+              <a:rPr lang="en-US" sz="1050">
                 <a:solidFill>
                   <a:srgbClr val="16201F"/>
                 </a:solidFill>
               </a:rPr>
               <a:t>Payment history becomes a reusable verifiable profile signal.</a:t>
             </a:r>
-            <a:endParaRPr lang="en-US" sz="1050" dirty="0"/>
-          </a:p>
-        </p:txBody>
-      </p:sp>
-      <p:sp>
-        <p:nvSpPr>
-          <p:cNvPr id="15" name="Shape 12"/>
-          <p:cNvSpPr/>
-          <p:nvPr/>
-        </p:nvSpPr>
-        <p:spPr>
+            <a:endParaRPr lang="en-US" sz="1050"/>
+          </a:p>
+        </p:txBody>
+      </p:sp>
+      <p:sp>
+        <p:nvSpPr>
+          <p:cNvPr id="766562687" name="Shape 12"/>
+          <p:cNvSpPr/>
+          <p:nvPr/>
+        </p:nvSpPr>
+        <p:spPr bwMode="auto">
           <a:xfrm>
             <a:off x="8732520" y="4965192"/>
             <a:ext cx="2697480" cy="676656"/>
@@ -3727,17 +3891,20 @@
           <a:bodyPr/>
           <a:lstStyle/>
           <a:p>
+            <a:pPr>
+              <a:defRPr/>
+            </a:pPr>
             <a:endParaRPr lang="en-US"/>
           </a:p>
         </p:txBody>
       </p:sp>
       <p:sp>
         <p:nvSpPr>
-          <p:cNvPr id="16" name="Text 13"/>
-          <p:cNvSpPr/>
-          <p:nvPr/>
-        </p:nvSpPr>
-        <p:spPr>
+          <p:cNvPr id="1845745468" name="Text 13"/>
+          <p:cNvSpPr/>
+          <p:nvPr/>
+        </p:nvSpPr>
+        <p:spPr bwMode="auto">
           <a:xfrm>
             <a:off x="8942832" y="5184648"/>
             <a:ext cx="2267712" cy="128016"/>
@@ -3754,26 +3921,27 @@
           <a:p>
             <a:pPr marL="0" indent="0" algn="ctr">
               <a:buNone/>
-            </a:pPr>
-            <a:r>
-              <a:rPr lang="en-US" sz="850" b="1" dirty="0">
+              <a:defRPr/>
+            </a:pPr>
+            <a:r>
+              <a:rPr lang="en-US" sz="850" b="1">
                 <a:solidFill>
                   <a:srgbClr val="FFFFFF"/>
                 </a:solidFill>
               </a:rPr>
               <a:t>Required visual asset embedded</a:t>
             </a:r>
-            <a:endParaRPr lang="en-US" sz="850" dirty="0"/>
-          </a:p>
-        </p:txBody>
-      </p:sp>
-      <p:sp>
-        <p:nvSpPr>
-          <p:cNvPr id="17" name="Shape 14"/>
-          <p:cNvSpPr/>
-          <p:nvPr/>
-        </p:nvSpPr>
-        <p:spPr>
+            <a:endParaRPr lang="en-US" sz="850"/>
+          </a:p>
+        </p:txBody>
+      </p:sp>
+      <p:sp>
+        <p:nvSpPr>
+          <p:cNvPr id="1360939164" name="Shape 14"/>
+          <p:cNvSpPr/>
+          <p:nvPr/>
+        </p:nvSpPr>
+        <p:spPr bwMode="auto">
           <a:xfrm>
             <a:off x="502920" y="6419088"/>
             <a:ext cx="11201400" cy="0"/>
@@ -3793,17 +3961,20 @@
           <a:bodyPr/>
           <a:lstStyle/>
           <a:p>
+            <a:pPr>
+              <a:defRPr/>
+            </a:pPr>
             <a:endParaRPr lang="en-US"/>
           </a:p>
         </p:txBody>
       </p:sp>
       <p:sp>
         <p:nvSpPr>
-          <p:cNvPr id="18" name="Text 15"/>
-          <p:cNvSpPr/>
-          <p:nvPr/>
-        </p:nvSpPr>
-        <p:spPr>
+          <p:cNvPr id="2132190976" name="Text 15"/>
+          <p:cNvSpPr/>
+          <p:nvPr/>
+        </p:nvSpPr>
+        <p:spPr bwMode="auto">
           <a:xfrm>
             <a:off x="502920" y="6473952"/>
             <a:ext cx="3840480" cy="201168"/>
@@ -3820,29 +3991,30 @@
           <a:p>
             <a:pPr marL="0" indent="0">
               <a:buNone/>
-            </a:pPr>
-            <a:r>
-              <a:rPr lang="en-US" sz="750" dirty="0">
+              <a:defRPr/>
+            </a:pPr>
+            <a:r>
+              <a:rPr lang="en-US" sz="750">
                 <a:solidFill>
                   <a:srgbClr val="5D6A67"/>
                 </a:solidFill>
-                <a:latin typeface="Aptos" pitchFamily="34" charset="0"/>
-                <a:ea typeface="Aptos" pitchFamily="34" charset="-122"/>
-                <a:cs typeface="Aptos" pitchFamily="34" charset="-120"/>
+                <a:latin typeface="Aptos"/>
+                <a:ea typeface="Aptos"/>
+                <a:cs typeface="Aptos"/>
               </a:rPr>
               <a:t>Smart Finux Labs · Verity SCF</a:t>
             </a:r>
-            <a:endParaRPr lang="en-US" sz="750" dirty="0"/>
-          </a:p>
-        </p:txBody>
-      </p:sp>
-      <p:sp>
-        <p:nvSpPr>
-          <p:cNvPr id="19" name="Text 16"/>
-          <p:cNvSpPr/>
-          <p:nvPr/>
-        </p:nvSpPr>
-        <p:spPr>
+            <a:endParaRPr lang="en-US" sz="750"/>
+          </a:p>
+        </p:txBody>
+      </p:sp>
+      <p:sp>
+        <p:nvSpPr>
+          <p:cNvPr id="872293445" name="Text 16"/>
+          <p:cNvSpPr/>
+          <p:nvPr/>
+        </p:nvSpPr>
+        <p:spPr bwMode="auto">
           <a:xfrm>
             <a:off x="11201400" y="6473952"/>
             <a:ext cx="502920" cy="201168"/>
@@ -3859,19 +4031,20 @@
           <a:p>
             <a:pPr marL="0" indent="0" algn="r">
               <a:buNone/>
-            </a:pPr>
-            <a:r>
-              <a:rPr lang="en-US" sz="750" b="1" dirty="0">
+              <a:defRPr/>
+            </a:pPr>
+            <a:r>
+              <a:rPr lang="en-US" sz="750" b="1">
                 <a:solidFill>
                   <a:srgbClr val="5D6A67"/>
                 </a:solidFill>
-                <a:latin typeface="Aptos" pitchFamily="34" charset="0"/>
-                <a:ea typeface="Aptos" pitchFamily="34" charset="-122"/>
-                <a:cs typeface="Aptos" pitchFamily="34" charset="-120"/>
+                <a:latin typeface="Aptos"/>
+                <a:ea typeface="Aptos"/>
+                <a:cs typeface="Aptos"/>
               </a:rPr>
               <a:t>03</a:t>
             </a:r>
-            <a:endParaRPr lang="en-US" sz="750" dirty="0"/>
+            <a:endParaRPr lang="en-US" sz="750"/>
           </a:p>
         </p:txBody>
       </p:sp>
@@ -3880,18 +4053,25 @@
   <p:clrMapOvr>
     <a:masterClrMapping/>
   </p:clrMapOvr>
+  <mc:AlternateContent xmlns:mc="http://schemas.openxmlformats.org/markup-compatibility/2006">
+    <mc:Choice xmlns:p159="http://schemas.microsoft.com/office/powerpoint/2015/09/main" xmlns:p14="http://schemas.microsoft.com/office/powerpoint/2010/main" Requires="p159">
+      <p:transition p14:dur="2000" advClick="1"/>
+    </mc:Choice>
+    <mc:Fallback>
+      <p:transition advClick="1"/>
+    </mc:Fallback>
+  </mc:AlternateContent>
 </p:sld>
 </file>
 
 <file path=ppt/slides/slide4.xml><?xml version="1.0" encoding="utf-8"?>
-<p:sld xmlns:a="http://schemas.openxmlformats.org/drawingml/2006/main" xmlns:r="http://schemas.openxmlformats.org/officeDocument/2006/relationships" xmlns:p="http://schemas.openxmlformats.org/presentationml/2006/main">
+<p:sld xmlns:a="http://schemas.openxmlformats.org/drawingml/2006/main" xmlns:r="http://schemas.openxmlformats.org/officeDocument/2006/relationships" xmlns:p="http://schemas.openxmlformats.org/presentationml/2006/main" xmlns:m="http://schemas.openxmlformats.org/officeDocument/2006/math" xmlns:w="http://schemas.openxmlformats.org/wordprocessingml/2006/main" xmlns:mc="http://schemas.openxmlformats.org/markup-compatibility/2006" showMasterPhAnim="0" showMasterSp="1" show="1">
   <p:cSld name="Slide 4">
     <p:bg>
-      <p:bgPr>
+      <p:bgPr shadeToTitle="0">
         <a:solidFill>
           <a:srgbClr val="FFFFFF"/>
         </a:solidFill>
-        <a:effectLst/>
       </p:bgPr>
     </p:bg>
     <p:spTree>
@@ -3900,7 +4080,7 @@
         <p:cNvGrpSpPr/>
         <p:nvPr/>
       </p:nvGrpSpPr>
-      <p:grpSpPr>
+      <p:grpSpPr bwMode="auto">
         <a:xfrm>
           <a:off x="0" y="0"/>
           <a:ext cx="0" cy="0"/>
@@ -3910,11 +4090,11 @@
       </p:grpSpPr>
       <p:sp>
         <p:nvSpPr>
-          <p:cNvPr id="2" name="Text 0"/>
-          <p:cNvSpPr/>
-          <p:nvPr/>
-        </p:nvSpPr>
-        <p:spPr>
+          <p:cNvPr id="1304814760" name="Text 0"/>
+          <p:cNvSpPr/>
+          <p:nvPr/>
+        </p:nvSpPr>
+        <p:spPr bwMode="auto">
           <a:xfrm>
             <a:off x="548640" y="347472"/>
             <a:ext cx="4754880" cy="201168"/>
@@ -3931,29 +4111,30 @@
           <a:p>
             <a:pPr marL="0" indent="0">
               <a:buNone/>
-            </a:pPr>
-            <a:r>
-              <a:rPr lang="en-US" sz="800" b="1" dirty="0">
+              <a:defRPr/>
+            </a:pPr>
+            <a:r>
+              <a:rPr lang="en-US" sz="800" b="1">
                 <a:solidFill>
                   <a:srgbClr val="1F7A5C"/>
                 </a:solidFill>
-                <a:latin typeface="Aptos" pitchFamily="34" charset="0"/>
-                <a:ea typeface="Aptos" pitchFamily="34" charset="-122"/>
-                <a:cs typeface="Aptos" pitchFamily="34" charset="-120"/>
+                <a:latin typeface="Aptos"/>
+                <a:ea typeface="Aptos"/>
+                <a:cs typeface="Aptos"/>
               </a:rPr>
               <a:t>OPERATING WORKFLOW</a:t>
             </a:r>
-            <a:endParaRPr lang="en-US" sz="800" dirty="0"/>
-          </a:p>
-        </p:txBody>
-      </p:sp>
-      <p:sp>
-        <p:nvSpPr>
-          <p:cNvPr id="3" name="Text 1"/>
-          <p:cNvSpPr/>
-          <p:nvPr/>
-        </p:nvSpPr>
-        <p:spPr>
+            <a:endParaRPr lang="en-US" sz="800"/>
+          </a:p>
+        </p:txBody>
+      </p:sp>
+      <p:sp>
+        <p:nvSpPr>
+          <p:cNvPr id="1849202224" name="Text 1"/>
+          <p:cNvSpPr/>
+          <p:nvPr/>
+        </p:nvSpPr>
+        <p:spPr bwMode="auto">
           <a:xfrm>
             <a:off x="548640" y="621792"/>
             <a:ext cx="9692640" cy="658368"/>
@@ -3972,29 +4153,30 @@
           <a:p>
             <a:pPr marL="0" indent="0">
               <a:buNone/>
-            </a:pPr>
-            <a:r>
-              <a:rPr lang="en-US" sz="2400" b="1" dirty="0">
+              <a:defRPr/>
+            </a:pPr>
+            <a:r>
+              <a:rPr lang="en-US" sz="2400" b="1">
                 <a:solidFill>
                   <a:srgbClr val="16201F"/>
                 </a:solidFill>
-                <a:latin typeface="Aptos Display" pitchFamily="34" charset="0"/>
-                <a:ea typeface="Aptos Display" pitchFamily="34" charset="-122"/>
-                <a:cs typeface="Aptos Display" pitchFamily="34" charset="-120"/>
+                <a:latin typeface="Aptos Display"/>
+                <a:ea typeface="Aptos Display"/>
+                <a:cs typeface="Aptos Display"/>
               </a:rPr>
               <a:t>Three user surfaces converge on one accepted receivable marketplace.</a:t>
             </a:r>
-            <a:endParaRPr lang="en-US" sz="2400" dirty="0"/>
-          </a:p>
-        </p:txBody>
-      </p:sp>
-      <p:sp>
-        <p:nvSpPr>
-          <p:cNvPr id="4" name="Shape 2"/>
-          <p:cNvSpPr/>
-          <p:nvPr/>
-        </p:nvSpPr>
-        <p:spPr>
+            <a:endParaRPr lang="en-US" sz="2400"/>
+          </a:p>
+        </p:txBody>
+      </p:sp>
+      <p:sp>
+        <p:nvSpPr>
+          <p:cNvPr id="2030747544" name="Shape 2"/>
+          <p:cNvSpPr/>
+          <p:nvPr/>
+        </p:nvSpPr>
+        <p:spPr bwMode="auto">
           <a:xfrm>
             <a:off x="685800" y="1536192"/>
             <a:ext cx="3246120" cy="4069080"/>
@@ -4018,17 +4200,20 @@
           <a:bodyPr/>
           <a:lstStyle/>
           <a:p>
+            <a:pPr>
+              <a:defRPr/>
+            </a:pPr>
             <a:endParaRPr lang="en-US"/>
           </a:p>
         </p:txBody>
       </p:sp>
       <p:sp>
         <p:nvSpPr>
-          <p:cNvPr id="5" name="Text 3"/>
-          <p:cNvSpPr/>
-          <p:nvPr/>
-        </p:nvSpPr>
-        <p:spPr>
+          <p:cNvPr id="152492158" name="Text 3"/>
+          <p:cNvSpPr/>
+          <p:nvPr/>
+        </p:nvSpPr>
+        <p:spPr bwMode="auto">
           <a:xfrm>
             <a:off x="941832" y="1810512"/>
             <a:ext cx="2651760" cy="219456"/>
@@ -4045,26 +4230,27 @@
           <a:p>
             <a:pPr marL="0" indent="0">
               <a:buNone/>
-            </a:pPr>
-            <a:r>
-              <a:rPr lang="en-US" sz="1300" b="1" dirty="0">
+              <a:defRPr/>
+            </a:pPr>
+            <a:r>
+              <a:rPr lang="en-US" sz="1300" b="1">
                 <a:solidFill>
                   <a:srgbClr val="1F7A5C"/>
                 </a:solidFill>
               </a:rPr>
               <a:t>Supplier / SME</a:t>
             </a:r>
-            <a:endParaRPr lang="en-US" sz="1300" dirty="0"/>
-          </a:p>
-        </p:txBody>
-      </p:sp>
-      <p:sp>
-        <p:nvSpPr>
-          <p:cNvPr id="6" name="Shape 4"/>
-          <p:cNvSpPr/>
-          <p:nvPr/>
-        </p:nvSpPr>
-        <p:spPr>
+            <a:endParaRPr lang="en-US" sz="1300"/>
+          </a:p>
+        </p:txBody>
+      </p:sp>
+      <p:sp>
+        <p:nvSpPr>
+          <p:cNvPr id="1005797779" name="Shape 4"/>
+          <p:cNvSpPr/>
+          <p:nvPr/>
+        </p:nvSpPr>
+        <p:spPr bwMode="auto">
           <a:xfrm>
             <a:off x="978408" y="2514600"/>
             <a:ext cx="310896" cy="310896"/>
@@ -4086,17 +4272,20 @@
           <a:bodyPr/>
           <a:lstStyle/>
           <a:p>
+            <a:pPr>
+              <a:defRPr/>
+            </a:pPr>
             <a:endParaRPr lang="en-US"/>
           </a:p>
         </p:txBody>
       </p:sp>
       <p:sp>
         <p:nvSpPr>
-          <p:cNvPr id="7" name="Text 5"/>
-          <p:cNvSpPr/>
-          <p:nvPr/>
-        </p:nvSpPr>
-        <p:spPr>
+          <p:cNvPr id="175724530" name="Text 5"/>
+          <p:cNvSpPr/>
+          <p:nvPr/>
+        </p:nvSpPr>
+        <p:spPr bwMode="auto">
           <a:xfrm>
             <a:off x="978408" y="2601468"/>
             <a:ext cx="310896" cy="91440"/>
@@ -4113,26 +4302,27 @@
           <a:p>
             <a:pPr marL="0" indent="0" algn="ctr">
               <a:buNone/>
-            </a:pPr>
-            <a:r>
-              <a:rPr lang="en-US" sz="700" b="1" dirty="0">
+              <a:defRPr/>
+            </a:pPr>
+            <a:r>
+              <a:rPr lang="en-US" sz="700" b="1">
                 <a:solidFill>
                   <a:srgbClr val="FFFFFF"/>
                 </a:solidFill>
               </a:rPr>
               <a:t>1</a:t>
             </a:r>
-            <a:endParaRPr lang="en-US" sz="700" dirty="0"/>
-          </a:p>
-        </p:txBody>
-      </p:sp>
-      <p:sp>
-        <p:nvSpPr>
-          <p:cNvPr id="8" name="Text 6"/>
-          <p:cNvSpPr/>
-          <p:nvPr/>
-        </p:nvSpPr>
-        <p:spPr>
+            <a:endParaRPr lang="en-US" sz="700"/>
+          </a:p>
+        </p:txBody>
+      </p:sp>
+      <p:sp>
+        <p:nvSpPr>
+          <p:cNvPr id="968116238" name="Text 6"/>
+          <p:cNvSpPr/>
+          <p:nvPr/>
+        </p:nvSpPr>
+        <p:spPr bwMode="auto">
           <a:xfrm>
             <a:off x="1435608" y="2551176"/>
             <a:ext cx="2057400" cy="164592"/>
@@ -4151,26 +4341,27 @@
           <a:p>
             <a:pPr marL="0" indent="0">
               <a:buNone/>
-            </a:pPr>
-            <a:r>
-              <a:rPr lang="en-US" sz="1050" dirty="0">
+              <a:defRPr/>
+            </a:pPr>
+            <a:r>
+              <a:rPr lang="en-US" sz="1050">
                 <a:solidFill>
                   <a:srgbClr val="16201F"/>
                 </a:solidFill>
               </a:rPr>
               <a:t>Create invoice</a:t>
             </a:r>
-            <a:endParaRPr lang="en-US" sz="1050" dirty="0"/>
-          </a:p>
-        </p:txBody>
-      </p:sp>
-      <p:sp>
-        <p:nvSpPr>
-          <p:cNvPr id="9" name="Shape 7"/>
-          <p:cNvSpPr/>
-          <p:nvPr/>
-        </p:nvSpPr>
-        <p:spPr>
+            <a:endParaRPr lang="en-US" sz="1050"/>
+          </a:p>
+        </p:txBody>
+      </p:sp>
+      <p:sp>
+        <p:nvSpPr>
+          <p:cNvPr id="343263803" name="Shape 7"/>
+          <p:cNvSpPr/>
+          <p:nvPr/>
+        </p:nvSpPr>
+        <p:spPr bwMode="auto">
           <a:xfrm>
             <a:off x="978408" y="3300984"/>
             <a:ext cx="310896" cy="310896"/>
@@ -4192,17 +4383,20 @@
           <a:bodyPr/>
           <a:lstStyle/>
           <a:p>
+            <a:pPr>
+              <a:defRPr/>
+            </a:pPr>
             <a:endParaRPr lang="en-US"/>
           </a:p>
         </p:txBody>
       </p:sp>
       <p:sp>
         <p:nvSpPr>
-          <p:cNvPr id="10" name="Text 8"/>
-          <p:cNvSpPr/>
-          <p:nvPr/>
-        </p:nvSpPr>
-        <p:spPr>
+          <p:cNvPr id="209607670" name="Text 8"/>
+          <p:cNvSpPr/>
+          <p:nvPr/>
+        </p:nvSpPr>
+        <p:spPr bwMode="auto">
           <a:xfrm>
             <a:off x="978408" y="3387852"/>
             <a:ext cx="310896" cy="91440"/>
@@ -4219,26 +4413,27 @@
           <a:p>
             <a:pPr marL="0" indent="0" algn="ctr">
               <a:buNone/>
-            </a:pPr>
-            <a:r>
-              <a:rPr lang="en-US" sz="700" b="1" dirty="0">
+              <a:defRPr/>
+            </a:pPr>
+            <a:r>
+              <a:rPr lang="en-US" sz="700" b="1">
                 <a:solidFill>
                   <a:srgbClr val="FFFFFF"/>
                 </a:solidFill>
               </a:rPr>
               <a:t>2</a:t>
             </a:r>
-            <a:endParaRPr lang="en-US" sz="700" dirty="0"/>
-          </a:p>
-        </p:txBody>
-      </p:sp>
-      <p:sp>
-        <p:nvSpPr>
-          <p:cNvPr id="11" name="Text 9"/>
-          <p:cNvSpPr/>
-          <p:nvPr/>
-        </p:nvSpPr>
-        <p:spPr>
+            <a:endParaRPr lang="en-US" sz="700"/>
+          </a:p>
+        </p:txBody>
+      </p:sp>
+      <p:sp>
+        <p:nvSpPr>
+          <p:cNvPr id="2115287533" name="Text 9"/>
+          <p:cNvSpPr/>
+          <p:nvPr/>
+        </p:nvSpPr>
+        <p:spPr bwMode="auto">
           <a:xfrm>
             <a:off x="1435608" y="3337560"/>
             <a:ext cx="2057400" cy="164592"/>
@@ -4257,26 +4452,27 @@
           <a:p>
             <a:pPr marL="0" indent="0">
               <a:buNone/>
-            </a:pPr>
-            <a:r>
-              <a:rPr lang="en-US" sz="1050" b="1" dirty="0">
+              <a:defRPr/>
+            </a:pPr>
+            <a:r>
+              <a:rPr lang="en-US" sz="1050" b="1">
                 <a:solidFill>
                   <a:srgbClr val="16201F"/>
                 </a:solidFill>
               </a:rPr>
               <a:t>Request factoring</a:t>
             </a:r>
-            <a:endParaRPr lang="en-US" sz="1050" dirty="0"/>
-          </a:p>
-        </p:txBody>
-      </p:sp>
-      <p:sp>
-        <p:nvSpPr>
-          <p:cNvPr id="12" name="Shape 10"/>
-          <p:cNvSpPr/>
-          <p:nvPr/>
-        </p:nvSpPr>
-        <p:spPr>
+            <a:endParaRPr lang="en-US" sz="1050"/>
+          </a:p>
+        </p:txBody>
+      </p:sp>
+      <p:sp>
+        <p:nvSpPr>
+          <p:cNvPr id="170371376" name="Shape 10"/>
+          <p:cNvSpPr/>
+          <p:nvPr/>
+        </p:nvSpPr>
+        <p:spPr bwMode="auto">
           <a:xfrm>
             <a:off x="978408" y="4087368"/>
             <a:ext cx="310896" cy="310896"/>
@@ -4298,19 +4494,22 @@
           <a:bodyPr/>
           <a:lstStyle/>
           <a:p>
+            <a:pPr>
+              <a:defRPr/>
+            </a:pPr>
             <a:endParaRPr lang="en-US"/>
           </a:p>
         </p:txBody>
       </p:sp>
       <p:sp>
         <p:nvSpPr>
-          <p:cNvPr id="13" name="Text 11"/>
-          <p:cNvSpPr/>
-          <p:nvPr/>
-        </p:nvSpPr>
-        <p:spPr>
-          <a:xfrm>
-            <a:off x="978408" y="4174236"/>
+          <p:cNvPr id="1981120323" name="Text 11"/>
+          <p:cNvSpPr/>
+          <p:nvPr/>
+        </p:nvSpPr>
+        <p:spPr bwMode="auto">
+          <a:xfrm>
+            <a:off x="978408" y="4174235"/>
             <a:ext cx="310896" cy="91440"/>
           </a:xfrm>
           <a:prstGeom prst="rect">
@@ -4325,26 +4524,27 @@
           <a:p>
             <a:pPr marL="0" indent="0" algn="ctr">
               <a:buNone/>
-            </a:pPr>
-            <a:r>
-              <a:rPr lang="en-US" sz="700" b="1" dirty="0">
+              <a:defRPr/>
+            </a:pPr>
+            <a:r>
+              <a:rPr lang="en-US" sz="700" b="1">
                 <a:solidFill>
                   <a:srgbClr val="FFFFFF"/>
                 </a:solidFill>
               </a:rPr>
               <a:t>3</a:t>
             </a:r>
-            <a:endParaRPr lang="en-US" sz="700" dirty="0"/>
-          </a:p>
-        </p:txBody>
-      </p:sp>
-      <p:sp>
-        <p:nvSpPr>
-          <p:cNvPr id="14" name="Text 12"/>
-          <p:cNvSpPr/>
-          <p:nvPr/>
-        </p:nvSpPr>
-        <p:spPr>
+            <a:endParaRPr lang="en-US" sz="700"/>
+          </a:p>
+        </p:txBody>
+      </p:sp>
+      <p:sp>
+        <p:nvSpPr>
+          <p:cNvPr id="302767901" name="Text 12"/>
+          <p:cNvSpPr/>
+          <p:nvPr/>
+        </p:nvSpPr>
+        <p:spPr bwMode="auto">
           <a:xfrm>
             <a:off x="1435608" y="4123944"/>
             <a:ext cx="2057400" cy="164592"/>
@@ -4363,26 +4563,27 @@
           <a:p>
             <a:pPr marL="0" indent="0">
               <a:buNone/>
-            </a:pPr>
-            <a:r>
-              <a:rPr lang="en-US" sz="1050" dirty="0">
+              <a:defRPr/>
+            </a:pPr>
+            <a:r>
+              <a:rPr lang="en-US" sz="1050">
                 <a:solidFill>
                   <a:srgbClr val="16201F"/>
                 </a:solidFill>
               </a:rPr>
               <a:t>Receive USDC advance</a:t>
             </a:r>
-            <a:endParaRPr lang="en-US" sz="1050" dirty="0"/>
-          </a:p>
-        </p:txBody>
-      </p:sp>
-      <p:sp>
-        <p:nvSpPr>
-          <p:cNvPr id="15" name="Shape 13"/>
-          <p:cNvSpPr/>
-          <p:nvPr/>
-        </p:nvSpPr>
-        <p:spPr>
+            <a:endParaRPr lang="en-US" sz="1050"/>
+          </a:p>
+        </p:txBody>
+      </p:sp>
+      <p:sp>
+        <p:nvSpPr>
+          <p:cNvPr id="218990662" name="Shape 13"/>
+          <p:cNvSpPr/>
+          <p:nvPr/>
+        </p:nvSpPr>
+        <p:spPr bwMode="auto">
           <a:xfrm>
             <a:off x="4498848" y="1536192"/>
             <a:ext cx="3246120" cy="4069080"/>
@@ -4406,17 +4607,20 @@
           <a:bodyPr/>
           <a:lstStyle/>
           <a:p>
+            <a:pPr>
+              <a:defRPr/>
+            </a:pPr>
             <a:endParaRPr lang="en-US"/>
           </a:p>
         </p:txBody>
       </p:sp>
       <p:sp>
         <p:nvSpPr>
-          <p:cNvPr id="16" name="Text 14"/>
-          <p:cNvSpPr/>
-          <p:nvPr/>
-        </p:nvSpPr>
-        <p:spPr>
+          <p:cNvPr id="680999517" name="Text 14"/>
+          <p:cNvSpPr/>
+          <p:nvPr/>
+        </p:nvSpPr>
+        <p:spPr bwMode="auto">
           <a:xfrm>
             <a:off x="4754880" y="1810512"/>
             <a:ext cx="2651760" cy="219456"/>
@@ -4433,26 +4637,27 @@
           <a:p>
             <a:pPr marL="0" indent="0">
               <a:buNone/>
-            </a:pPr>
-            <a:r>
-              <a:rPr lang="en-US" sz="1300" b="1" dirty="0">
+              <a:defRPr/>
+            </a:pPr>
+            <a:r>
+              <a:rPr lang="en-US" sz="1300" b="1">
                 <a:solidFill>
                   <a:srgbClr val="244D73"/>
                 </a:solidFill>
               </a:rPr>
               <a:t>Buyer / Enterprise</a:t>
             </a:r>
-            <a:endParaRPr lang="en-US" sz="1300" dirty="0"/>
-          </a:p>
-        </p:txBody>
-      </p:sp>
-      <p:sp>
-        <p:nvSpPr>
-          <p:cNvPr id="17" name="Shape 15"/>
-          <p:cNvSpPr/>
-          <p:nvPr/>
-        </p:nvSpPr>
-        <p:spPr>
+            <a:endParaRPr lang="en-US" sz="1300"/>
+          </a:p>
+        </p:txBody>
+      </p:sp>
+      <p:sp>
+        <p:nvSpPr>
+          <p:cNvPr id="860821158" name="Shape 15"/>
+          <p:cNvSpPr/>
+          <p:nvPr/>
+        </p:nvSpPr>
+        <p:spPr bwMode="auto">
           <a:xfrm>
             <a:off x="4791456" y="2514600"/>
             <a:ext cx="310896" cy="310896"/>
@@ -4474,17 +4679,20 @@
           <a:bodyPr/>
           <a:lstStyle/>
           <a:p>
+            <a:pPr>
+              <a:defRPr/>
+            </a:pPr>
             <a:endParaRPr lang="en-US"/>
           </a:p>
         </p:txBody>
       </p:sp>
       <p:sp>
         <p:nvSpPr>
-          <p:cNvPr id="18" name="Text 16"/>
-          <p:cNvSpPr/>
-          <p:nvPr/>
-        </p:nvSpPr>
-        <p:spPr>
+          <p:cNvPr id="672534017" name="Text 16"/>
+          <p:cNvSpPr/>
+          <p:nvPr/>
+        </p:nvSpPr>
+        <p:spPr bwMode="auto">
           <a:xfrm>
             <a:off x="4791456" y="2601468"/>
             <a:ext cx="310896" cy="91440"/>
@@ -4501,26 +4709,27 @@
           <a:p>
             <a:pPr marL="0" indent="0" algn="ctr">
               <a:buNone/>
-            </a:pPr>
-            <a:r>
-              <a:rPr lang="en-US" sz="700" b="1" dirty="0">
+              <a:defRPr/>
+            </a:pPr>
+            <a:r>
+              <a:rPr lang="en-US" sz="700" b="1">
                 <a:solidFill>
                   <a:srgbClr val="FFFFFF"/>
                 </a:solidFill>
               </a:rPr>
               <a:t>1</a:t>
             </a:r>
-            <a:endParaRPr lang="en-US" sz="700" dirty="0"/>
-          </a:p>
-        </p:txBody>
-      </p:sp>
-      <p:sp>
-        <p:nvSpPr>
-          <p:cNvPr id="19" name="Text 17"/>
-          <p:cNvSpPr/>
-          <p:nvPr/>
-        </p:nvSpPr>
-        <p:spPr>
+            <a:endParaRPr lang="en-US" sz="700"/>
+          </a:p>
+        </p:txBody>
+      </p:sp>
+      <p:sp>
+        <p:nvSpPr>
+          <p:cNvPr id="327834354" name="Text 17"/>
+          <p:cNvSpPr/>
+          <p:nvPr/>
+        </p:nvSpPr>
+        <p:spPr bwMode="auto">
           <a:xfrm>
             <a:off x="5248656" y="2551176"/>
             <a:ext cx="2057400" cy="164592"/>
@@ -4539,26 +4748,27 @@
           <a:p>
             <a:pPr marL="0" indent="0">
               <a:buNone/>
-            </a:pPr>
-            <a:r>
-              <a:rPr lang="en-US" sz="1050" dirty="0">
+              <a:defRPr/>
+            </a:pPr>
+            <a:r>
+              <a:rPr lang="en-US" sz="1050">
                 <a:solidFill>
                   <a:srgbClr val="16201F"/>
                 </a:solidFill>
               </a:rPr>
               <a:t>Review evidence</a:t>
             </a:r>
-            <a:endParaRPr lang="en-US" sz="1050" dirty="0"/>
-          </a:p>
-        </p:txBody>
-      </p:sp>
-      <p:sp>
-        <p:nvSpPr>
-          <p:cNvPr id="20" name="Shape 18"/>
-          <p:cNvSpPr/>
-          <p:nvPr/>
-        </p:nvSpPr>
-        <p:spPr>
+            <a:endParaRPr lang="en-US" sz="1050"/>
+          </a:p>
+        </p:txBody>
+      </p:sp>
+      <p:sp>
+        <p:nvSpPr>
+          <p:cNvPr id="2113899659" name="Shape 18"/>
+          <p:cNvSpPr/>
+          <p:nvPr/>
+        </p:nvSpPr>
+        <p:spPr bwMode="auto">
           <a:xfrm>
             <a:off x="4791456" y="3300984"/>
             <a:ext cx="310896" cy="310896"/>
@@ -4580,17 +4790,20 @@
           <a:bodyPr/>
           <a:lstStyle/>
           <a:p>
+            <a:pPr>
+              <a:defRPr/>
+            </a:pPr>
             <a:endParaRPr lang="en-US"/>
           </a:p>
         </p:txBody>
       </p:sp>
       <p:sp>
         <p:nvSpPr>
-          <p:cNvPr id="21" name="Text 19"/>
-          <p:cNvSpPr/>
-          <p:nvPr/>
-        </p:nvSpPr>
-        <p:spPr>
+          <p:cNvPr id="1683792329" name="Text 19"/>
+          <p:cNvSpPr/>
+          <p:nvPr/>
+        </p:nvSpPr>
+        <p:spPr bwMode="auto">
           <a:xfrm>
             <a:off x="4791456" y="3387852"/>
             <a:ext cx="310896" cy="91440"/>
@@ -4607,26 +4820,27 @@
           <a:p>
             <a:pPr marL="0" indent="0" algn="ctr">
               <a:buNone/>
-            </a:pPr>
-            <a:r>
-              <a:rPr lang="en-US" sz="700" b="1" dirty="0">
+              <a:defRPr/>
+            </a:pPr>
+            <a:r>
+              <a:rPr lang="en-US" sz="700" b="1">
                 <a:solidFill>
                   <a:srgbClr val="FFFFFF"/>
                 </a:solidFill>
               </a:rPr>
               <a:t>2</a:t>
             </a:r>
-            <a:endParaRPr lang="en-US" sz="700" dirty="0"/>
-          </a:p>
-        </p:txBody>
-      </p:sp>
-      <p:sp>
-        <p:nvSpPr>
-          <p:cNvPr id="22" name="Text 20"/>
-          <p:cNvSpPr/>
-          <p:nvPr/>
-        </p:nvSpPr>
-        <p:spPr>
+            <a:endParaRPr lang="en-US" sz="700"/>
+          </a:p>
+        </p:txBody>
+      </p:sp>
+      <p:sp>
+        <p:nvSpPr>
+          <p:cNvPr id="1517720922" name="Text 20"/>
+          <p:cNvSpPr/>
+          <p:nvPr/>
+        </p:nvSpPr>
+        <p:spPr bwMode="auto">
           <a:xfrm>
             <a:off x="5248656" y="3337560"/>
             <a:ext cx="2057400" cy="164592"/>
@@ -4645,26 +4859,27 @@
           <a:p>
             <a:pPr marL="0" indent="0">
               <a:buNone/>
-            </a:pPr>
-            <a:r>
-              <a:rPr lang="en-US" sz="1050" b="1" dirty="0">
+              <a:defRPr/>
+            </a:pPr>
+            <a:r>
+              <a:rPr lang="en-US" sz="1050" b="1">
                 <a:solidFill>
                   <a:srgbClr val="16201F"/>
                 </a:solidFill>
               </a:rPr>
               <a:t>Accept Due Value</a:t>
             </a:r>
-            <a:endParaRPr lang="en-US" sz="1050" dirty="0"/>
-          </a:p>
-        </p:txBody>
-      </p:sp>
-      <p:sp>
-        <p:nvSpPr>
-          <p:cNvPr id="23" name="Shape 21"/>
-          <p:cNvSpPr/>
-          <p:nvPr/>
-        </p:nvSpPr>
-        <p:spPr>
+            <a:endParaRPr lang="en-US" sz="1050"/>
+          </a:p>
+        </p:txBody>
+      </p:sp>
+      <p:sp>
+        <p:nvSpPr>
+          <p:cNvPr id="1513766781" name="Shape 21"/>
+          <p:cNvSpPr/>
+          <p:nvPr/>
+        </p:nvSpPr>
+        <p:spPr bwMode="auto">
           <a:xfrm>
             <a:off x="4791456" y="4087368"/>
             <a:ext cx="310896" cy="310896"/>
@@ -4686,19 +4901,22 @@
           <a:bodyPr/>
           <a:lstStyle/>
           <a:p>
+            <a:pPr>
+              <a:defRPr/>
+            </a:pPr>
             <a:endParaRPr lang="en-US"/>
           </a:p>
         </p:txBody>
       </p:sp>
       <p:sp>
         <p:nvSpPr>
-          <p:cNvPr id="24" name="Text 22"/>
-          <p:cNvSpPr/>
-          <p:nvPr/>
-        </p:nvSpPr>
-        <p:spPr>
-          <a:xfrm>
-            <a:off x="4791456" y="4174236"/>
+          <p:cNvPr id="161617916" name="Text 22"/>
+          <p:cNvSpPr/>
+          <p:nvPr/>
+        </p:nvSpPr>
+        <p:spPr bwMode="auto">
+          <a:xfrm>
+            <a:off x="4791456" y="4174235"/>
             <a:ext cx="310896" cy="91440"/>
           </a:xfrm>
           <a:prstGeom prst="rect">
@@ -4713,26 +4931,27 @@
           <a:p>
             <a:pPr marL="0" indent="0" algn="ctr">
               <a:buNone/>
-            </a:pPr>
-            <a:r>
-              <a:rPr lang="en-US" sz="700" b="1" dirty="0">
+              <a:defRPr/>
+            </a:pPr>
+            <a:r>
+              <a:rPr lang="en-US" sz="700" b="1">
                 <a:solidFill>
                   <a:srgbClr val="FFFFFF"/>
                 </a:solidFill>
               </a:rPr>
               <a:t>3</a:t>
             </a:r>
-            <a:endParaRPr lang="en-US" sz="700" dirty="0"/>
-          </a:p>
-        </p:txBody>
-      </p:sp>
-      <p:sp>
-        <p:nvSpPr>
-          <p:cNvPr id="25" name="Text 23"/>
-          <p:cNvSpPr/>
-          <p:nvPr/>
-        </p:nvSpPr>
-        <p:spPr>
+            <a:endParaRPr lang="en-US" sz="700"/>
+          </a:p>
+        </p:txBody>
+      </p:sp>
+      <p:sp>
+        <p:nvSpPr>
+          <p:cNvPr id="1412119958" name="Text 23"/>
+          <p:cNvSpPr/>
+          <p:nvPr/>
+        </p:nvSpPr>
+        <p:spPr bwMode="auto">
           <a:xfrm>
             <a:off x="5248656" y="4123944"/>
             <a:ext cx="2057400" cy="164592"/>
@@ -4751,26 +4970,27 @@
           <a:p>
             <a:pPr marL="0" indent="0">
               <a:buNone/>
-            </a:pPr>
-            <a:r>
-              <a:rPr lang="en-US" sz="1050" dirty="0">
+              <a:defRPr/>
+            </a:pPr>
+            <a:r>
+              <a:rPr lang="en-US" sz="1050">
                 <a:solidFill>
                   <a:srgbClr val="16201F"/>
                 </a:solidFill>
               </a:rPr>
               <a:t>Repay at maturity</a:t>
             </a:r>
-            <a:endParaRPr lang="en-US" sz="1050" dirty="0"/>
-          </a:p>
-        </p:txBody>
-      </p:sp>
-      <p:sp>
-        <p:nvSpPr>
-          <p:cNvPr id="26" name="Shape 24"/>
-          <p:cNvSpPr/>
-          <p:nvPr/>
-        </p:nvSpPr>
-        <p:spPr>
+            <a:endParaRPr lang="en-US" sz="1050"/>
+          </a:p>
+        </p:txBody>
+      </p:sp>
+      <p:sp>
+        <p:nvSpPr>
+          <p:cNvPr id="1822783277" name="Shape 24"/>
+          <p:cNvSpPr/>
+          <p:nvPr/>
+        </p:nvSpPr>
+        <p:spPr bwMode="auto">
           <a:xfrm>
             <a:off x="8311896" y="1536192"/>
             <a:ext cx="3246120" cy="4069080"/>
@@ -4794,17 +5014,20 @@
           <a:bodyPr/>
           <a:lstStyle/>
           <a:p>
+            <a:pPr>
+              <a:defRPr/>
+            </a:pPr>
             <a:endParaRPr lang="en-US"/>
           </a:p>
         </p:txBody>
       </p:sp>
       <p:sp>
         <p:nvSpPr>
-          <p:cNvPr id="27" name="Text 25"/>
-          <p:cNvSpPr/>
-          <p:nvPr/>
-        </p:nvSpPr>
-        <p:spPr>
+          <p:cNvPr id="984540520" name="Text 25"/>
+          <p:cNvSpPr/>
+          <p:nvPr/>
+        </p:nvSpPr>
+        <p:spPr bwMode="auto">
           <a:xfrm>
             <a:off x="8567928" y="1810512"/>
             <a:ext cx="2651760" cy="219456"/>
@@ -4821,26 +5044,27 @@
           <a:p>
             <a:pPr marL="0" indent="0">
               <a:buNone/>
-            </a:pPr>
-            <a:r>
-              <a:rPr lang="en-US" sz="1300" b="1" dirty="0">
+              <a:defRPr/>
+            </a:pPr>
+            <a:r>
+              <a:rPr lang="en-US" sz="1300" b="1">
                 <a:solidFill>
                   <a:srgbClr val="B9822D"/>
                 </a:solidFill>
               </a:rPr>
               <a:t>Investor / Factor</a:t>
             </a:r>
-            <a:endParaRPr lang="en-US" sz="1300" dirty="0"/>
-          </a:p>
-        </p:txBody>
-      </p:sp>
-      <p:sp>
-        <p:nvSpPr>
-          <p:cNvPr id="28" name="Shape 26"/>
-          <p:cNvSpPr/>
-          <p:nvPr/>
-        </p:nvSpPr>
-        <p:spPr>
+            <a:endParaRPr lang="en-US" sz="1300"/>
+          </a:p>
+        </p:txBody>
+      </p:sp>
+      <p:sp>
+        <p:nvSpPr>
+          <p:cNvPr id="443029255" name="Shape 26"/>
+          <p:cNvSpPr/>
+          <p:nvPr/>
+        </p:nvSpPr>
+        <p:spPr bwMode="auto">
           <a:xfrm>
             <a:off x="8604504" y="2514600"/>
             <a:ext cx="310896" cy="310896"/>
@@ -4862,17 +5086,20 @@
           <a:bodyPr/>
           <a:lstStyle/>
           <a:p>
+            <a:pPr>
+              <a:defRPr/>
+            </a:pPr>
             <a:endParaRPr lang="en-US"/>
           </a:p>
         </p:txBody>
       </p:sp>
       <p:sp>
         <p:nvSpPr>
-          <p:cNvPr id="29" name="Text 27"/>
-          <p:cNvSpPr/>
-          <p:nvPr/>
-        </p:nvSpPr>
-        <p:spPr>
+          <p:cNvPr id="351966822" name="Text 27"/>
+          <p:cNvSpPr/>
+          <p:nvPr/>
+        </p:nvSpPr>
+        <p:spPr bwMode="auto">
           <a:xfrm>
             <a:off x="8604504" y="2601468"/>
             <a:ext cx="310896" cy="91440"/>
@@ -4889,26 +5116,27 @@
           <a:p>
             <a:pPr marL="0" indent="0" algn="ctr">
               <a:buNone/>
-            </a:pPr>
-            <a:r>
-              <a:rPr lang="en-US" sz="700" b="1" dirty="0">
+              <a:defRPr/>
+            </a:pPr>
+            <a:r>
+              <a:rPr lang="en-US" sz="700" b="1">
                 <a:solidFill>
                   <a:srgbClr val="FFFFFF"/>
                 </a:solidFill>
               </a:rPr>
               <a:t>1</a:t>
             </a:r>
-            <a:endParaRPr lang="en-US" sz="700" dirty="0"/>
-          </a:p>
-        </p:txBody>
-      </p:sp>
-      <p:sp>
-        <p:nvSpPr>
-          <p:cNvPr id="30" name="Text 28"/>
-          <p:cNvSpPr/>
-          <p:nvPr/>
-        </p:nvSpPr>
-        <p:spPr>
+            <a:endParaRPr lang="en-US" sz="700"/>
+          </a:p>
+        </p:txBody>
+      </p:sp>
+      <p:sp>
+        <p:nvSpPr>
+          <p:cNvPr id="750632547" name="Text 28"/>
+          <p:cNvSpPr/>
+          <p:nvPr/>
+        </p:nvSpPr>
+        <p:spPr bwMode="auto">
           <a:xfrm>
             <a:off x="9061704" y="2551176"/>
             <a:ext cx="2057400" cy="164592"/>
@@ -4927,26 +5155,27 @@
           <a:p>
             <a:pPr marL="0" indent="0">
               <a:buNone/>
-            </a:pPr>
-            <a:r>
-              <a:rPr lang="en-US" sz="1050" dirty="0">
+              <a:defRPr/>
+            </a:pPr>
+            <a:r>
+              <a:rPr lang="en-US" sz="1050">
                 <a:solidFill>
                   <a:srgbClr val="16201F"/>
                 </a:solidFill>
               </a:rPr>
               <a:t>Discover receivable</a:t>
             </a:r>
-            <a:endParaRPr lang="en-US" sz="1050" dirty="0"/>
-          </a:p>
-        </p:txBody>
-      </p:sp>
-      <p:sp>
-        <p:nvSpPr>
-          <p:cNvPr id="31" name="Shape 29"/>
-          <p:cNvSpPr/>
-          <p:nvPr/>
-        </p:nvSpPr>
-        <p:spPr>
+            <a:endParaRPr lang="en-US" sz="1050"/>
+          </a:p>
+        </p:txBody>
+      </p:sp>
+      <p:sp>
+        <p:nvSpPr>
+          <p:cNvPr id="500987040" name="Shape 29"/>
+          <p:cNvSpPr/>
+          <p:nvPr/>
+        </p:nvSpPr>
+        <p:spPr bwMode="auto">
           <a:xfrm>
             <a:off x="8604504" y="3300984"/>
             <a:ext cx="310896" cy="310896"/>
@@ -4968,17 +5197,20 @@
           <a:bodyPr/>
           <a:lstStyle/>
           <a:p>
+            <a:pPr>
+              <a:defRPr/>
+            </a:pPr>
             <a:endParaRPr lang="en-US"/>
           </a:p>
         </p:txBody>
       </p:sp>
       <p:sp>
         <p:nvSpPr>
-          <p:cNvPr id="32" name="Text 30"/>
-          <p:cNvSpPr/>
-          <p:nvPr/>
-        </p:nvSpPr>
-        <p:spPr>
+          <p:cNvPr id="372669511" name="Text 30"/>
+          <p:cNvSpPr/>
+          <p:nvPr/>
+        </p:nvSpPr>
+        <p:spPr bwMode="auto">
           <a:xfrm>
             <a:off x="8604504" y="3387852"/>
             <a:ext cx="310896" cy="91440"/>
@@ -4995,26 +5227,27 @@
           <a:p>
             <a:pPr marL="0" indent="0" algn="ctr">
               <a:buNone/>
-            </a:pPr>
-            <a:r>
-              <a:rPr lang="en-US" sz="700" b="1" dirty="0">
+              <a:defRPr/>
+            </a:pPr>
+            <a:r>
+              <a:rPr lang="en-US" sz="700" b="1">
                 <a:solidFill>
                   <a:srgbClr val="FFFFFF"/>
                 </a:solidFill>
               </a:rPr>
               <a:t>2</a:t>
             </a:r>
-            <a:endParaRPr lang="en-US" sz="700" dirty="0"/>
-          </a:p>
-        </p:txBody>
-      </p:sp>
-      <p:sp>
-        <p:nvSpPr>
-          <p:cNvPr id="33" name="Text 31"/>
-          <p:cNvSpPr/>
-          <p:nvPr/>
-        </p:nvSpPr>
-        <p:spPr>
+            <a:endParaRPr lang="en-US" sz="700"/>
+          </a:p>
+        </p:txBody>
+      </p:sp>
+      <p:sp>
+        <p:nvSpPr>
+          <p:cNvPr id="377209929" name="Text 31"/>
+          <p:cNvSpPr/>
+          <p:nvPr/>
+        </p:nvSpPr>
+        <p:spPr bwMode="auto">
           <a:xfrm>
             <a:off x="9061704" y="3337560"/>
             <a:ext cx="2057400" cy="164592"/>
@@ -5033,26 +5266,27 @@
           <a:p>
             <a:pPr marL="0" indent="0">
               <a:buNone/>
-            </a:pPr>
-            <a:r>
-              <a:rPr lang="en-US" sz="1050" b="1" dirty="0">
+              <a:defRPr/>
+            </a:pPr>
+            <a:r>
+              <a:rPr lang="en-US" sz="1050" b="1">
                 <a:solidFill>
                   <a:srgbClr val="16201F"/>
                 </a:solidFill>
               </a:rPr>
               <a:t>Fund escrow</a:t>
             </a:r>
-            <a:endParaRPr lang="en-US" sz="1050" dirty="0"/>
-          </a:p>
-        </p:txBody>
-      </p:sp>
-      <p:sp>
-        <p:nvSpPr>
-          <p:cNvPr id="34" name="Shape 32"/>
-          <p:cNvSpPr/>
-          <p:nvPr/>
-        </p:nvSpPr>
-        <p:spPr>
+            <a:endParaRPr lang="en-US" sz="1050"/>
+          </a:p>
+        </p:txBody>
+      </p:sp>
+      <p:sp>
+        <p:nvSpPr>
+          <p:cNvPr id="306117404" name="Shape 32"/>
+          <p:cNvSpPr/>
+          <p:nvPr/>
+        </p:nvSpPr>
+        <p:spPr bwMode="auto">
           <a:xfrm>
             <a:off x="8604504" y="4087368"/>
             <a:ext cx="310896" cy="310896"/>
@@ -5074,19 +5308,22 @@
           <a:bodyPr/>
           <a:lstStyle/>
           <a:p>
+            <a:pPr>
+              <a:defRPr/>
+            </a:pPr>
             <a:endParaRPr lang="en-US"/>
           </a:p>
         </p:txBody>
       </p:sp>
       <p:sp>
         <p:nvSpPr>
-          <p:cNvPr id="35" name="Text 33"/>
-          <p:cNvSpPr/>
-          <p:nvPr/>
-        </p:nvSpPr>
-        <p:spPr>
-          <a:xfrm>
-            <a:off x="8604504" y="4174236"/>
+          <p:cNvPr id="1959800704" name="Text 33"/>
+          <p:cNvSpPr/>
+          <p:nvPr/>
+        </p:nvSpPr>
+        <p:spPr bwMode="auto">
+          <a:xfrm>
+            <a:off x="8604504" y="4174235"/>
             <a:ext cx="310896" cy="91440"/>
           </a:xfrm>
           <a:prstGeom prst="rect">
@@ -5101,26 +5338,27 @@
           <a:p>
             <a:pPr marL="0" indent="0" algn="ctr">
               <a:buNone/>
-            </a:pPr>
-            <a:r>
-              <a:rPr lang="en-US" sz="700" b="1" dirty="0">
+              <a:defRPr/>
+            </a:pPr>
+            <a:r>
+              <a:rPr lang="en-US" sz="700" b="1">
                 <a:solidFill>
                   <a:srgbClr val="FFFFFF"/>
                 </a:solidFill>
               </a:rPr>
               <a:t>3</a:t>
             </a:r>
-            <a:endParaRPr lang="en-US" sz="700" dirty="0"/>
-          </a:p>
-        </p:txBody>
-      </p:sp>
-      <p:sp>
-        <p:nvSpPr>
-          <p:cNvPr id="36" name="Text 34"/>
-          <p:cNvSpPr/>
-          <p:nvPr/>
-        </p:nvSpPr>
-        <p:spPr>
+            <a:endParaRPr lang="en-US" sz="700"/>
+          </a:p>
+        </p:txBody>
+      </p:sp>
+      <p:sp>
+        <p:nvSpPr>
+          <p:cNvPr id="146463811" name="Text 34"/>
+          <p:cNvSpPr/>
+          <p:nvPr/>
+        </p:nvSpPr>
+        <p:spPr bwMode="auto">
           <a:xfrm>
             <a:off x="9061704" y="4123944"/>
             <a:ext cx="2057400" cy="164592"/>
@@ -5139,26 +5377,27 @@
           <a:p>
             <a:pPr marL="0" indent="0">
               <a:buNone/>
-            </a:pPr>
-            <a:r>
-              <a:rPr lang="en-US" sz="1050" dirty="0">
+              <a:defRPr/>
+            </a:pPr>
+            <a:r>
+              <a:rPr lang="en-US" sz="1050">
                 <a:solidFill>
                   <a:srgbClr val="16201F"/>
                 </a:solidFill>
               </a:rPr>
               <a:t>Earn principal + yield</a:t>
             </a:r>
-            <a:endParaRPr lang="en-US" sz="1050" dirty="0"/>
-          </a:p>
-        </p:txBody>
-      </p:sp>
-      <p:sp>
-        <p:nvSpPr>
-          <p:cNvPr id="37" name="Shape 35"/>
-          <p:cNvSpPr/>
-          <p:nvPr/>
-        </p:nvSpPr>
-        <p:spPr>
+            <a:endParaRPr lang="en-US" sz="1050"/>
+          </a:p>
+        </p:txBody>
+      </p:sp>
+      <p:sp>
+        <p:nvSpPr>
+          <p:cNvPr id="459567877" name="Shape 35"/>
+          <p:cNvSpPr/>
+          <p:nvPr/>
+        </p:nvSpPr>
+        <p:spPr bwMode="auto">
           <a:xfrm>
             <a:off x="3977640" y="3566160"/>
             <a:ext cx="502920" cy="0"/>
@@ -5180,19 +5419,22 @@
           <a:bodyPr/>
           <a:lstStyle/>
           <a:p>
+            <a:pPr>
+              <a:defRPr/>
+            </a:pPr>
             <a:endParaRPr lang="en-US"/>
           </a:p>
         </p:txBody>
       </p:sp>
       <p:sp>
         <p:nvSpPr>
-          <p:cNvPr id="38" name="Shape 36"/>
-          <p:cNvSpPr/>
-          <p:nvPr/>
-        </p:nvSpPr>
-        <p:spPr>
-          <a:xfrm>
-            <a:off x="7790688" y="3566160"/>
+          <p:cNvPr id="215209501" name="Shape 36"/>
+          <p:cNvSpPr/>
+          <p:nvPr/>
+        </p:nvSpPr>
+        <p:spPr bwMode="auto">
+          <a:xfrm>
+            <a:off x="7790687" y="3566160"/>
             <a:ext cx="502920" cy="0"/>
           </a:xfrm>
           <a:prstGeom prst="line">
@@ -5212,17 +5454,20 @@
           <a:bodyPr/>
           <a:lstStyle/>
           <a:p>
+            <a:pPr>
+              <a:defRPr/>
+            </a:pPr>
             <a:endParaRPr lang="en-US"/>
           </a:p>
         </p:txBody>
       </p:sp>
       <p:sp>
         <p:nvSpPr>
-          <p:cNvPr id="39" name="Text 37"/>
-          <p:cNvSpPr/>
-          <p:nvPr/>
-        </p:nvSpPr>
-        <p:spPr>
+          <p:cNvPr id="1828700495" name="Text 37"/>
+          <p:cNvSpPr/>
+          <p:nvPr/>
+        </p:nvSpPr>
+        <p:spPr bwMode="auto">
           <a:xfrm>
             <a:off x="3749040" y="5953142"/>
             <a:ext cx="1051560" cy="146304"/>
@@ -5239,26 +5484,27 @@
           <a:p>
             <a:pPr marL="0" indent="0">
               <a:buNone/>
-            </a:pPr>
-            <a:r>
-              <a:rPr lang="en-US" sz="800" b="1" dirty="0">
+              <a:defRPr/>
+            </a:pPr>
+            <a:r>
+              <a:rPr lang="en-US" sz="800" b="1">
                 <a:solidFill>
                   <a:srgbClr val="C9533B"/>
                 </a:solidFill>
               </a:rPr>
               <a:t>Control point</a:t>
             </a:r>
-            <a:endParaRPr lang="en-US" sz="800" dirty="0"/>
-          </a:p>
-        </p:txBody>
-      </p:sp>
-      <p:sp>
-        <p:nvSpPr>
-          <p:cNvPr id="40" name="Text 38"/>
-          <p:cNvSpPr/>
-          <p:nvPr/>
-        </p:nvSpPr>
-        <p:spPr>
+            <a:endParaRPr lang="en-US" sz="800"/>
+          </a:p>
+        </p:txBody>
+      </p:sp>
+      <p:sp>
+        <p:nvSpPr>
+          <p:cNvPr id="316200992" name="Text 38"/>
+          <p:cNvSpPr/>
+          <p:nvPr/>
+        </p:nvSpPr>
+        <p:spPr bwMode="auto">
           <a:xfrm>
             <a:off x="4489704" y="5953142"/>
             <a:ext cx="4114800" cy="146304"/>
@@ -5275,26 +5521,27 @@
           <a:p>
             <a:pPr marL="0" indent="0">
               <a:buNone/>
-            </a:pPr>
-            <a:r>
-              <a:rPr lang="en-US" sz="880" dirty="0">
+              <a:defRPr/>
+            </a:pPr>
+            <a:r>
+              <a:rPr lang="en-US" sz="900">
                 <a:solidFill>
                   <a:srgbClr val="5D6A67"/>
                 </a:solidFill>
               </a:rPr>
               <a:t>Accepted value is separated from face value, making the financed asset auditable.</a:t>
             </a:r>
-            <a:endParaRPr lang="en-US" sz="880" dirty="0"/>
-          </a:p>
-        </p:txBody>
-      </p:sp>
-      <p:sp>
-        <p:nvSpPr>
-          <p:cNvPr id="41" name="Shape 39"/>
-          <p:cNvSpPr/>
-          <p:nvPr/>
-        </p:nvSpPr>
-        <p:spPr>
+            <a:endParaRPr lang="en-US" sz="900"/>
+          </a:p>
+        </p:txBody>
+      </p:sp>
+      <p:sp>
+        <p:nvSpPr>
+          <p:cNvPr id="1913567858" name="Shape 39"/>
+          <p:cNvSpPr/>
+          <p:nvPr/>
+        </p:nvSpPr>
+        <p:spPr bwMode="auto">
           <a:xfrm>
             <a:off x="502920" y="6419088"/>
             <a:ext cx="11201400" cy="0"/>
@@ -5314,17 +5561,20 @@
           <a:bodyPr/>
           <a:lstStyle/>
           <a:p>
+            <a:pPr>
+              <a:defRPr/>
+            </a:pPr>
             <a:endParaRPr lang="en-US"/>
           </a:p>
         </p:txBody>
       </p:sp>
       <p:sp>
         <p:nvSpPr>
-          <p:cNvPr id="42" name="Text 40"/>
-          <p:cNvSpPr/>
-          <p:nvPr/>
-        </p:nvSpPr>
-        <p:spPr>
+          <p:cNvPr id="97581207" name="Text 40"/>
+          <p:cNvSpPr/>
+          <p:nvPr/>
+        </p:nvSpPr>
+        <p:spPr bwMode="auto">
           <a:xfrm>
             <a:off x="502920" y="6473952"/>
             <a:ext cx="3840480" cy="201168"/>
@@ -5341,29 +5591,30 @@
           <a:p>
             <a:pPr marL="0" indent="0">
               <a:buNone/>
-            </a:pPr>
-            <a:r>
-              <a:rPr lang="en-US" sz="750" dirty="0">
+              <a:defRPr/>
+            </a:pPr>
+            <a:r>
+              <a:rPr lang="en-US" sz="750">
                 <a:solidFill>
                   <a:srgbClr val="5D6A67"/>
                 </a:solidFill>
-                <a:latin typeface="Aptos" pitchFamily="34" charset="0"/>
-                <a:ea typeface="Aptos" pitchFamily="34" charset="-122"/>
-                <a:cs typeface="Aptos" pitchFamily="34" charset="-120"/>
+                <a:latin typeface="Aptos"/>
+                <a:ea typeface="Aptos"/>
+                <a:cs typeface="Aptos"/>
               </a:rPr>
               <a:t>Smart Finux Labs · Verity SCF</a:t>
             </a:r>
-            <a:endParaRPr lang="en-US" sz="750" dirty="0"/>
-          </a:p>
-        </p:txBody>
-      </p:sp>
-      <p:sp>
-        <p:nvSpPr>
-          <p:cNvPr id="43" name="Text 41"/>
-          <p:cNvSpPr/>
-          <p:nvPr/>
-        </p:nvSpPr>
-        <p:spPr>
+            <a:endParaRPr lang="en-US" sz="750"/>
+          </a:p>
+        </p:txBody>
+      </p:sp>
+      <p:sp>
+        <p:nvSpPr>
+          <p:cNvPr id="529121946" name="Text 41"/>
+          <p:cNvSpPr/>
+          <p:nvPr/>
+        </p:nvSpPr>
+        <p:spPr bwMode="auto">
           <a:xfrm>
             <a:off x="11201400" y="6473952"/>
             <a:ext cx="502920" cy="201168"/>
@@ -5380,19 +5631,20 @@
           <a:p>
             <a:pPr marL="0" indent="0" algn="r">
               <a:buNone/>
-            </a:pPr>
-            <a:r>
-              <a:rPr lang="en-US" sz="750" b="1" dirty="0">
+              <a:defRPr/>
+            </a:pPr>
+            <a:r>
+              <a:rPr lang="en-US" sz="750" b="1">
                 <a:solidFill>
                   <a:srgbClr val="5D6A67"/>
                 </a:solidFill>
-                <a:latin typeface="Aptos" pitchFamily="34" charset="0"/>
-                <a:ea typeface="Aptos" pitchFamily="34" charset="-122"/>
-                <a:cs typeface="Aptos" pitchFamily="34" charset="-120"/>
+                <a:latin typeface="Aptos"/>
+                <a:ea typeface="Aptos"/>
+                <a:cs typeface="Aptos"/>
               </a:rPr>
               <a:t>04</a:t>
             </a:r>
-            <a:endParaRPr lang="en-US" sz="750" dirty="0"/>
+            <a:endParaRPr lang="en-US" sz="750"/>
           </a:p>
         </p:txBody>
       </p:sp>
@@ -5401,18 +5653,25 @@
   <p:clrMapOvr>
     <a:masterClrMapping/>
   </p:clrMapOvr>
+  <mc:AlternateContent xmlns:mc="http://schemas.openxmlformats.org/markup-compatibility/2006">
+    <mc:Choice xmlns:p159="http://schemas.microsoft.com/office/powerpoint/2015/09/main" xmlns:p14="http://schemas.microsoft.com/office/powerpoint/2010/main" Requires="p159">
+      <p:transition p14:dur="2000" advClick="1"/>
+    </mc:Choice>
+    <mc:Fallback>
+      <p:transition advClick="1"/>
+    </mc:Fallback>
+  </mc:AlternateContent>
 </p:sld>
 </file>
 
 <file path=ppt/slides/slide5.xml><?xml version="1.0" encoding="utf-8"?>
-<p:sld xmlns:a="http://schemas.openxmlformats.org/drawingml/2006/main" xmlns:r="http://schemas.openxmlformats.org/officeDocument/2006/relationships" xmlns:p="http://schemas.openxmlformats.org/presentationml/2006/main">
+<p:sld xmlns:a="http://schemas.openxmlformats.org/drawingml/2006/main" xmlns:r="http://schemas.openxmlformats.org/officeDocument/2006/relationships" xmlns:p="http://schemas.openxmlformats.org/presentationml/2006/main" xmlns:m="http://schemas.openxmlformats.org/officeDocument/2006/math" xmlns:w="http://schemas.openxmlformats.org/wordprocessingml/2006/main" xmlns:mc="http://schemas.openxmlformats.org/markup-compatibility/2006" showMasterPhAnim="0" showMasterSp="1" show="1">
   <p:cSld name="Slide 5">
     <p:bg>
-      <p:bgPr>
+      <p:bgPr shadeToTitle="0">
         <a:solidFill>
           <a:srgbClr val="F9FAF7"/>
         </a:solidFill>
-        <a:effectLst/>
       </p:bgPr>
     </p:bg>
     <p:spTree>
@@ -5421,7 +5680,7 @@
         <p:cNvGrpSpPr/>
         <p:nvPr/>
       </p:nvGrpSpPr>
-      <p:grpSpPr>
+      <p:grpSpPr bwMode="auto">
         <a:xfrm>
           <a:off x="0" y="0"/>
           <a:ext cx="0" cy="0"/>
@@ -5431,11 +5690,11 @@
       </p:grpSpPr>
       <p:sp>
         <p:nvSpPr>
-          <p:cNvPr id="2" name="Text 0"/>
-          <p:cNvSpPr/>
-          <p:nvPr/>
-        </p:nvSpPr>
-        <p:spPr>
+          <p:cNvPr id="2105264048" name="Text 0"/>
+          <p:cNvSpPr/>
+          <p:nvPr/>
+        </p:nvSpPr>
+        <p:spPr bwMode="auto">
           <a:xfrm>
             <a:off x="548640" y="347472"/>
             <a:ext cx="4754880" cy="201168"/>
@@ -5452,29 +5711,30 @@
           <a:p>
             <a:pPr marL="0" indent="0">
               <a:buNone/>
-            </a:pPr>
-            <a:r>
-              <a:rPr lang="en-US" sz="800" b="1" dirty="0">
+              <a:defRPr/>
+            </a:pPr>
+            <a:r>
+              <a:rPr lang="en-US" sz="800" b="1">
                 <a:solidFill>
                   <a:srgbClr val="1F7A5C"/>
                 </a:solidFill>
-                <a:latin typeface="Aptos" pitchFamily="34" charset="0"/>
-                <a:ea typeface="Aptos" pitchFamily="34" charset="-122"/>
-                <a:cs typeface="Aptos" pitchFamily="34" charset="-120"/>
+                <a:latin typeface="Aptos"/>
+                <a:ea typeface="Aptos"/>
+                <a:cs typeface="Aptos"/>
               </a:rPr>
               <a:t>ROADMAP</a:t>
             </a:r>
-            <a:endParaRPr lang="en-US" sz="800" dirty="0"/>
-          </a:p>
-        </p:txBody>
-      </p:sp>
-      <p:sp>
-        <p:nvSpPr>
-          <p:cNvPr id="3" name="Text 1"/>
-          <p:cNvSpPr/>
-          <p:nvPr/>
-        </p:nvSpPr>
-        <p:spPr>
+            <a:endParaRPr lang="en-US" sz="800"/>
+          </a:p>
+        </p:txBody>
+      </p:sp>
+      <p:sp>
+        <p:nvSpPr>
+          <p:cNvPr id="1475019780" name="Text 1"/>
+          <p:cNvSpPr/>
+          <p:nvPr/>
+        </p:nvSpPr>
+        <p:spPr bwMode="auto">
           <a:xfrm>
             <a:off x="548640" y="621792"/>
             <a:ext cx="9692640" cy="658368"/>
@@ -5493,29 +5753,30 @@
           <a:p>
             <a:pPr marL="0" indent="0">
               <a:buNone/>
-            </a:pPr>
-            <a:r>
-              <a:rPr lang="en-US" sz="2400" b="1" dirty="0">
+              <a:defRPr/>
+            </a:pPr>
+            <a:r>
+              <a:rPr lang="en-US" sz="2400" b="1">
                 <a:solidFill>
                   <a:srgbClr val="16201F"/>
                 </a:solidFill>
-                <a:latin typeface="Aptos Display" pitchFamily="34" charset="0"/>
-                <a:ea typeface="Aptos Display" pitchFamily="34" charset="-122"/>
-                <a:cs typeface="Aptos Display" pitchFamily="34" charset="-120"/>
+                <a:latin typeface="Aptos Display"/>
+                <a:ea typeface="Aptos Display"/>
+                <a:cs typeface="Aptos Display"/>
               </a:rPr>
               <a:t>MVP delivery proves the full Due Value-to-settlement loop.</a:t>
             </a:r>
-            <a:endParaRPr lang="en-US" sz="2400" dirty="0"/>
-          </a:p>
-        </p:txBody>
-      </p:sp>
-      <p:sp>
-        <p:nvSpPr>
-          <p:cNvPr id="4" name="Shape 2"/>
-          <p:cNvSpPr/>
-          <p:nvPr/>
-        </p:nvSpPr>
-        <p:spPr>
+            <a:endParaRPr lang="en-US" sz="2400"/>
+          </a:p>
+        </p:txBody>
+      </p:sp>
+      <p:sp>
+        <p:nvSpPr>
+          <p:cNvPr id="113695" name="Shape 2"/>
+          <p:cNvSpPr/>
+          <p:nvPr/>
+        </p:nvSpPr>
+        <p:spPr bwMode="auto">
           <a:xfrm>
             <a:off x="1042416" y="2212848"/>
             <a:ext cx="1444752" cy="0"/>
@@ -5535,17 +5796,20 @@
           <a:bodyPr/>
           <a:lstStyle/>
           <a:p>
+            <a:pPr>
+              <a:defRPr/>
+            </a:pPr>
             <a:endParaRPr lang="en-US"/>
           </a:p>
         </p:txBody>
       </p:sp>
       <p:sp>
         <p:nvSpPr>
-          <p:cNvPr id="5" name="Shape 3"/>
-          <p:cNvSpPr/>
-          <p:nvPr/>
-        </p:nvSpPr>
-        <p:spPr>
+          <p:cNvPr id="1055611883" name="Shape 3"/>
+          <p:cNvSpPr/>
+          <p:nvPr/>
+        </p:nvSpPr>
+        <p:spPr bwMode="auto">
           <a:xfrm>
             <a:off x="658368" y="1920240"/>
             <a:ext cx="713232" cy="713232"/>
@@ -5567,17 +5831,20 @@
           <a:bodyPr/>
           <a:lstStyle/>
           <a:p>
+            <a:pPr>
+              <a:defRPr/>
+            </a:pPr>
             <a:endParaRPr lang="en-US"/>
           </a:p>
         </p:txBody>
       </p:sp>
       <p:sp>
         <p:nvSpPr>
-          <p:cNvPr id="6" name="Text 4"/>
-          <p:cNvSpPr/>
-          <p:nvPr/>
-        </p:nvSpPr>
-        <p:spPr>
+          <p:cNvPr id="283139181" name="Text 4"/>
+          <p:cNvSpPr/>
+          <p:nvPr/>
+        </p:nvSpPr>
+        <p:spPr bwMode="auto">
           <a:xfrm>
             <a:off x="658368" y="2121408"/>
             <a:ext cx="713232" cy="164592"/>
@@ -5594,26 +5861,27 @@
           <a:p>
             <a:pPr marL="0" indent="0" algn="ctr">
               <a:buNone/>
-            </a:pPr>
-            <a:r>
-              <a:rPr lang="en-US" sz="1200" b="1" dirty="0">
+              <a:defRPr/>
+            </a:pPr>
+            <a:r>
+              <a:rPr lang="en-US" sz="1200" b="1">
                 <a:solidFill>
                   <a:srgbClr val="FFFFFF"/>
                 </a:solidFill>
               </a:rPr>
               <a:t>0</a:t>
             </a:r>
-            <a:endParaRPr lang="en-US" sz="1200" dirty="0"/>
-          </a:p>
-        </p:txBody>
-      </p:sp>
-      <p:sp>
-        <p:nvSpPr>
-          <p:cNvPr id="7" name="Text 5"/>
-          <p:cNvSpPr/>
-          <p:nvPr/>
-        </p:nvSpPr>
-        <p:spPr>
+            <a:endParaRPr lang="en-US" sz="1200"/>
+          </a:p>
+        </p:txBody>
+      </p:sp>
+      <p:sp>
+        <p:nvSpPr>
+          <p:cNvPr id="374621940" name="Text 5"/>
+          <p:cNvSpPr/>
+          <p:nvPr/>
+        </p:nvSpPr>
+        <p:spPr bwMode="auto">
           <a:xfrm>
             <a:off x="566928" y="2907792"/>
             <a:ext cx="1417320" cy="182880"/>
@@ -5632,26 +5900,27 @@
           <a:p>
             <a:pPr marL="0" indent="0">
               <a:buNone/>
-            </a:pPr>
-            <a:r>
-              <a:rPr lang="en-US" sz="1050" b="1" dirty="0">
+              <a:defRPr/>
+            </a:pPr>
+            <a:r>
+              <a:rPr lang="en-US" sz="1050" b="1">
                 <a:solidFill>
                   <a:srgbClr val="244D73"/>
                 </a:solidFill>
               </a:rPr>
               <a:t>Align</a:t>
             </a:r>
-            <a:endParaRPr lang="en-US" sz="1050" dirty="0"/>
-          </a:p>
-        </p:txBody>
-      </p:sp>
-      <p:sp>
-        <p:nvSpPr>
-          <p:cNvPr id="8" name="Text 6"/>
-          <p:cNvSpPr/>
-          <p:nvPr/>
-        </p:nvSpPr>
-        <p:spPr>
+            <a:endParaRPr lang="en-US" sz="1050"/>
+          </a:p>
+        </p:txBody>
+      </p:sp>
+      <p:sp>
+        <p:nvSpPr>
+          <p:cNvPr id="287808686" name="Text 6"/>
+          <p:cNvSpPr/>
+          <p:nvPr/>
+        </p:nvSpPr>
+        <p:spPr bwMode="auto">
           <a:xfrm>
             <a:off x="566928" y="3236976"/>
             <a:ext cx="1426464" cy="566928"/>
@@ -5670,26 +5939,27 @@
           <a:p>
             <a:pPr marL="0" indent="0">
               <a:buNone/>
-            </a:pPr>
-            <a:r>
-              <a:rPr lang="en-US" sz="840" dirty="0">
+              <a:defRPr/>
+            </a:pPr>
+            <a:r>
+              <a:rPr lang="en-US" sz="850">
                 <a:solidFill>
                   <a:srgbClr val="5D6A67"/>
                 </a:solidFill>
               </a:rPr>
               <a:t>schemas, roles, state machine</a:t>
             </a:r>
-            <a:endParaRPr lang="en-US" sz="840" dirty="0"/>
-          </a:p>
-        </p:txBody>
-      </p:sp>
-      <p:sp>
-        <p:nvSpPr>
-          <p:cNvPr id="9" name="Shape 7"/>
-          <p:cNvSpPr/>
-          <p:nvPr/>
-        </p:nvSpPr>
-        <p:spPr>
+            <a:endParaRPr lang="en-US" sz="850"/>
+          </a:p>
+        </p:txBody>
+      </p:sp>
+      <p:sp>
+        <p:nvSpPr>
+          <p:cNvPr id="28054216" name="Shape 7"/>
+          <p:cNvSpPr/>
+          <p:nvPr/>
+        </p:nvSpPr>
+        <p:spPr bwMode="auto">
           <a:xfrm>
             <a:off x="2916936" y="2212848"/>
             <a:ext cx="1444752" cy="0"/>
@@ -5709,17 +5979,20 @@
           <a:bodyPr/>
           <a:lstStyle/>
           <a:p>
+            <a:pPr>
+              <a:defRPr/>
+            </a:pPr>
             <a:endParaRPr lang="en-US"/>
           </a:p>
         </p:txBody>
       </p:sp>
       <p:sp>
         <p:nvSpPr>
-          <p:cNvPr id="10" name="Shape 8"/>
-          <p:cNvSpPr/>
-          <p:nvPr/>
-        </p:nvSpPr>
-        <p:spPr>
+          <p:cNvPr id="702577956" name="Shape 8"/>
+          <p:cNvSpPr/>
+          <p:nvPr/>
+        </p:nvSpPr>
+        <p:spPr bwMode="auto">
           <a:xfrm>
             <a:off x="2532888" y="1920240"/>
             <a:ext cx="713232" cy="713232"/>
@@ -5741,17 +6014,20 @@
           <a:bodyPr/>
           <a:lstStyle/>
           <a:p>
+            <a:pPr>
+              <a:defRPr/>
+            </a:pPr>
             <a:endParaRPr lang="en-US"/>
           </a:p>
         </p:txBody>
       </p:sp>
       <p:sp>
         <p:nvSpPr>
-          <p:cNvPr id="11" name="Text 9"/>
-          <p:cNvSpPr/>
-          <p:nvPr/>
-        </p:nvSpPr>
-        <p:spPr>
+          <p:cNvPr id="1179368702" name="Text 9"/>
+          <p:cNvSpPr/>
+          <p:nvPr/>
+        </p:nvSpPr>
+        <p:spPr bwMode="auto">
           <a:xfrm>
             <a:off x="2532888" y="2121408"/>
             <a:ext cx="713232" cy="164592"/>
@@ -5768,26 +6044,27 @@
           <a:p>
             <a:pPr marL="0" indent="0" algn="ctr">
               <a:buNone/>
-            </a:pPr>
-            <a:r>
-              <a:rPr lang="en-US" sz="1200" b="1" dirty="0">
+              <a:defRPr/>
+            </a:pPr>
+            <a:r>
+              <a:rPr lang="en-US" sz="1200" b="1">
                 <a:solidFill>
                   <a:srgbClr val="FFFFFF"/>
                 </a:solidFill>
               </a:rPr>
               <a:t>1</a:t>
             </a:r>
-            <a:endParaRPr lang="en-US" sz="1200" dirty="0"/>
-          </a:p>
-        </p:txBody>
-      </p:sp>
-      <p:sp>
-        <p:nvSpPr>
-          <p:cNvPr id="12" name="Text 10"/>
-          <p:cNvSpPr/>
-          <p:nvPr/>
-        </p:nvSpPr>
-        <p:spPr>
+            <a:endParaRPr lang="en-US" sz="1200"/>
+          </a:p>
+        </p:txBody>
+      </p:sp>
+      <p:sp>
+        <p:nvSpPr>
+          <p:cNvPr id="565796830" name="Text 10"/>
+          <p:cNvSpPr/>
+          <p:nvPr/>
+        </p:nvSpPr>
+        <p:spPr bwMode="auto">
           <a:xfrm>
             <a:off x="2441448" y="2907792"/>
             <a:ext cx="1417320" cy="182880"/>
@@ -5806,26 +6083,27 @@
           <a:p>
             <a:pPr marL="0" indent="0">
               <a:buNone/>
-            </a:pPr>
-            <a:r>
-              <a:rPr lang="en-US" sz="1050" b="1" dirty="0">
+              <a:defRPr/>
+            </a:pPr>
+            <a:r>
+              <a:rPr lang="en-US" sz="1050" b="1">
                 <a:solidFill>
                   <a:srgbClr val="1F7A5C"/>
                 </a:solidFill>
               </a:rPr>
               <a:t>Invoice truth</a:t>
             </a:r>
-            <a:endParaRPr lang="en-US" sz="1050" dirty="0"/>
-          </a:p>
-        </p:txBody>
-      </p:sp>
-      <p:sp>
-        <p:nvSpPr>
-          <p:cNvPr id="13" name="Text 11"/>
-          <p:cNvSpPr/>
-          <p:nvPr/>
-        </p:nvSpPr>
-        <p:spPr>
+            <a:endParaRPr lang="en-US" sz="1050"/>
+          </a:p>
+        </p:txBody>
+      </p:sp>
+      <p:sp>
+        <p:nvSpPr>
+          <p:cNvPr id="517767733" name="Text 11"/>
+          <p:cNvSpPr/>
+          <p:nvPr/>
+        </p:nvSpPr>
+        <p:spPr bwMode="auto">
           <a:xfrm>
             <a:off x="2441448" y="3236976"/>
             <a:ext cx="1426464" cy="566928"/>
@@ -5844,26 +6122,27 @@
           <a:p>
             <a:pPr marL="0" indent="0">
               <a:buNone/>
-            </a:pPr>
-            <a:r>
-              <a:rPr lang="en-US" sz="840" dirty="0">
+              <a:defRPr/>
+            </a:pPr>
+            <a:r>
+              <a:rPr lang="en-US" sz="850">
                 <a:solidFill>
                   <a:srgbClr val="5D6A67"/>
                 </a:solidFill>
               </a:rPr>
               <a:t>supplier issue + buyer acceptance</a:t>
             </a:r>
-            <a:endParaRPr lang="en-US" sz="840" dirty="0"/>
-          </a:p>
-        </p:txBody>
-      </p:sp>
-      <p:sp>
-        <p:nvSpPr>
-          <p:cNvPr id="14" name="Shape 12"/>
-          <p:cNvSpPr/>
-          <p:nvPr/>
-        </p:nvSpPr>
-        <p:spPr>
+            <a:endParaRPr lang="en-US" sz="850"/>
+          </a:p>
+        </p:txBody>
+      </p:sp>
+      <p:sp>
+        <p:nvSpPr>
+          <p:cNvPr id="594013839" name="Shape 12"/>
+          <p:cNvSpPr/>
+          <p:nvPr/>
+        </p:nvSpPr>
+        <p:spPr bwMode="auto">
           <a:xfrm>
             <a:off x="4791456" y="2212848"/>
             <a:ext cx="1444752" cy="0"/>
@@ -5883,17 +6162,20 @@
           <a:bodyPr/>
           <a:lstStyle/>
           <a:p>
+            <a:pPr>
+              <a:defRPr/>
+            </a:pPr>
             <a:endParaRPr lang="en-US"/>
           </a:p>
         </p:txBody>
       </p:sp>
       <p:sp>
         <p:nvSpPr>
-          <p:cNvPr id="15" name="Shape 13"/>
-          <p:cNvSpPr/>
-          <p:nvPr/>
-        </p:nvSpPr>
-        <p:spPr>
+          <p:cNvPr id="1184715845" name="Shape 13"/>
+          <p:cNvSpPr/>
+          <p:nvPr/>
+        </p:nvSpPr>
+        <p:spPr bwMode="auto">
           <a:xfrm>
             <a:off x="4407408" y="1920240"/>
             <a:ext cx="713232" cy="713232"/>
@@ -5915,17 +6197,20 @@
           <a:bodyPr/>
           <a:lstStyle/>
           <a:p>
+            <a:pPr>
+              <a:defRPr/>
+            </a:pPr>
             <a:endParaRPr lang="en-US"/>
           </a:p>
         </p:txBody>
       </p:sp>
       <p:sp>
         <p:nvSpPr>
-          <p:cNvPr id="16" name="Text 14"/>
-          <p:cNvSpPr/>
-          <p:nvPr/>
-        </p:nvSpPr>
-        <p:spPr>
+          <p:cNvPr id="1624257559" name="Text 14"/>
+          <p:cNvSpPr/>
+          <p:nvPr/>
+        </p:nvSpPr>
+        <p:spPr bwMode="auto">
           <a:xfrm>
             <a:off x="4407408" y="2121408"/>
             <a:ext cx="713232" cy="164592"/>
@@ -5942,26 +6227,27 @@
           <a:p>
             <a:pPr marL="0" indent="0" algn="ctr">
               <a:buNone/>
-            </a:pPr>
-            <a:r>
-              <a:rPr lang="en-US" sz="1200" b="1" dirty="0">
+              <a:defRPr/>
+            </a:pPr>
+            <a:r>
+              <a:rPr lang="en-US" sz="1200" b="1">
                 <a:solidFill>
                   <a:srgbClr val="FFFFFF"/>
                 </a:solidFill>
               </a:rPr>
               <a:t>2</a:t>
             </a:r>
-            <a:endParaRPr lang="en-US" sz="1200" dirty="0"/>
-          </a:p>
-        </p:txBody>
-      </p:sp>
-      <p:sp>
-        <p:nvSpPr>
-          <p:cNvPr id="17" name="Text 15"/>
-          <p:cNvSpPr/>
-          <p:nvPr/>
-        </p:nvSpPr>
-        <p:spPr>
+            <a:endParaRPr lang="en-US" sz="1200"/>
+          </a:p>
+        </p:txBody>
+      </p:sp>
+      <p:sp>
+        <p:nvSpPr>
+          <p:cNvPr id="1426406597" name="Text 15"/>
+          <p:cNvSpPr/>
+          <p:nvPr/>
+        </p:nvSpPr>
+        <p:spPr bwMode="auto">
           <a:xfrm>
             <a:off x="4315968" y="2907792"/>
             <a:ext cx="1417320" cy="182880"/>
@@ -5980,26 +6266,27 @@
           <a:p>
             <a:pPr marL="0" indent="0">
               <a:buNone/>
-            </a:pPr>
-            <a:r>
-              <a:rPr lang="en-US" sz="1050" b="1" dirty="0">
+              <a:defRPr/>
+            </a:pPr>
+            <a:r>
+              <a:rPr lang="en-US" sz="1050" b="1">
                 <a:solidFill>
                   <a:srgbClr val="B9822D"/>
                 </a:solidFill>
               </a:rPr>
               <a:t>Marketplace</a:t>
             </a:r>
-            <a:endParaRPr lang="en-US" sz="1050" dirty="0"/>
-          </a:p>
-        </p:txBody>
-      </p:sp>
-      <p:sp>
-        <p:nvSpPr>
-          <p:cNvPr id="18" name="Text 16"/>
-          <p:cNvSpPr/>
-          <p:nvPr/>
-        </p:nvSpPr>
-        <p:spPr>
+            <a:endParaRPr lang="en-US" sz="1050"/>
+          </a:p>
+        </p:txBody>
+      </p:sp>
+      <p:sp>
+        <p:nvSpPr>
+          <p:cNvPr id="2064086078" name="Text 16"/>
+          <p:cNvSpPr/>
+          <p:nvPr/>
+        </p:nvSpPr>
+        <p:spPr bwMode="auto">
           <a:xfrm>
             <a:off x="4315968" y="3236976"/>
             <a:ext cx="1426464" cy="566928"/>
@@ -6018,26 +6305,27 @@
           <a:p>
             <a:pPr marL="0" indent="0">
               <a:buNone/>
-            </a:pPr>
-            <a:r>
-              <a:rPr lang="en-US" sz="840" dirty="0">
+              <a:defRPr/>
+            </a:pPr>
+            <a:r>
+              <a:rPr lang="en-US" sz="850">
                 <a:solidFill>
                   <a:srgbClr val="5D6A67"/>
                 </a:solidFill>
               </a:rPr>
               <a:t>factoring request + investor funding</a:t>
             </a:r>
-            <a:endParaRPr lang="en-US" sz="840" dirty="0"/>
-          </a:p>
-        </p:txBody>
-      </p:sp>
-      <p:sp>
-        <p:nvSpPr>
-          <p:cNvPr id="19" name="Shape 17"/>
-          <p:cNvSpPr/>
-          <p:nvPr/>
-        </p:nvSpPr>
-        <p:spPr>
+            <a:endParaRPr lang="en-US" sz="850"/>
+          </a:p>
+        </p:txBody>
+      </p:sp>
+      <p:sp>
+        <p:nvSpPr>
+          <p:cNvPr id="2067052672" name="Shape 17"/>
+          <p:cNvSpPr/>
+          <p:nvPr/>
+        </p:nvSpPr>
+        <p:spPr bwMode="auto">
           <a:xfrm>
             <a:off x="6665976" y="2212848"/>
             <a:ext cx="1444752" cy="0"/>
@@ -6057,17 +6345,20 @@
           <a:bodyPr/>
           <a:lstStyle/>
           <a:p>
+            <a:pPr>
+              <a:defRPr/>
+            </a:pPr>
             <a:endParaRPr lang="en-US"/>
           </a:p>
         </p:txBody>
       </p:sp>
       <p:sp>
         <p:nvSpPr>
-          <p:cNvPr id="20" name="Shape 18"/>
-          <p:cNvSpPr/>
-          <p:nvPr/>
-        </p:nvSpPr>
-        <p:spPr>
+          <p:cNvPr id="229284598" name="Shape 18"/>
+          <p:cNvSpPr/>
+          <p:nvPr/>
+        </p:nvSpPr>
+        <p:spPr bwMode="auto">
           <a:xfrm>
             <a:off x="6281928" y="1920240"/>
             <a:ext cx="713232" cy="713232"/>
@@ -6089,17 +6380,20 @@
           <a:bodyPr/>
           <a:lstStyle/>
           <a:p>
+            <a:pPr>
+              <a:defRPr/>
+            </a:pPr>
             <a:endParaRPr lang="en-US"/>
           </a:p>
         </p:txBody>
       </p:sp>
       <p:sp>
         <p:nvSpPr>
-          <p:cNvPr id="21" name="Text 19"/>
-          <p:cNvSpPr/>
-          <p:nvPr/>
-        </p:nvSpPr>
-        <p:spPr>
+          <p:cNvPr id="35995048" name="Text 19"/>
+          <p:cNvSpPr/>
+          <p:nvPr/>
+        </p:nvSpPr>
+        <p:spPr bwMode="auto">
           <a:xfrm>
             <a:off x="6281928" y="2121408"/>
             <a:ext cx="713232" cy="164592"/>
@@ -6116,26 +6410,27 @@
           <a:p>
             <a:pPr marL="0" indent="0" algn="ctr">
               <a:buNone/>
-            </a:pPr>
-            <a:r>
-              <a:rPr lang="en-US" sz="1200" b="1" dirty="0">
+              <a:defRPr/>
+            </a:pPr>
+            <a:r>
+              <a:rPr lang="en-US" sz="1200" b="1">
                 <a:solidFill>
                   <a:srgbClr val="FFFFFF"/>
                 </a:solidFill>
               </a:rPr>
               <a:t>3</a:t>
             </a:r>
-            <a:endParaRPr lang="en-US" sz="1200" dirty="0"/>
-          </a:p>
-        </p:txBody>
-      </p:sp>
-      <p:sp>
-        <p:nvSpPr>
-          <p:cNvPr id="22" name="Text 20"/>
-          <p:cNvSpPr/>
-          <p:nvPr/>
-        </p:nvSpPr>
-        <p:spPr>
+            <a:endParaRPr lang="en-US" sz="1200"/>
+          </a:p>
+        </p:txBody>
+      </p:sp>
+      <p:sp>
+        <p:nvSpPr>
+          <p:cNvPr id="1644901845" name="Text 20"/>
+          <p:cNvSpPr/>
+          <p:nvPr/>
+        </p:nvSpPr>
+        <p:spPr bwMode="auto">
           <a:xfrm>
             <a:off x="6190488" y="2907792"/>
             <a:ext cx="1417320" cy="182880"/>
@@ -6154,26 +6449,27 @@
           <a:p>
             <a:pPr marL="0" indent="0">
               <a:buNone/>
-            </a:pPr>
-            <a:r>
-              <a:rPr lang="en-US" sz="1050" b="1" dirty="0">
+              <a:defRPr/>
+            </a:pPr>
+            <a:r>
+              <a:rPr lang="en-US" sz="1050" b="1">
                 <a:solidFill>
                   <a:srgbClr val="C9533B"/>
                 </a:solidFill>
               </a:rPr>
               <a:t>Escrow</a:t>
             </a:r>
-            <a:endParaRPr lang="en-US" sz="1050" dirty="0"/>
-          </a:p>
-        </p:txBody>
-      </p:sp>
-      <p:sp>
-        <p:nvSpPr>
-          <p:cNvPr id="23" name="Text 21"/>
-          <p:cNvSpPr/>
-          <p:nvPr/>
-        </p:nvSpPr>
-        <p:spPr>
+            <a:endParaRPr lang="en-US" sz="1050"/>
+          </a:p>
+        </p:txBody>
+      </p:sp>
+      <p:sp>
+        <p:nvSpPr>
+          <p:cNvPr id="482853247" name="Text 21"/>
+          <p:cNvSpPr/>
+          <p:nvPr/>
+        </p:nvSpPr>
+        <p:spPr bwMode="auto">
           <a:xfrm>
             <a:off x="6190488" y="3236976"/>
             <a:ext cx="1426464" cy="566928"/>
@@ -6192,26 +6488,27 @@
           <a:p>
             <a:pPr marL="0" indent="0">
               <a:buNone/>
-            </a:pPr>
-            <a:r>
-              <a:rPr lang="en-US" sz="840" dirty="0">
+              <a:defRPr/>
+            </a:pPr>
+            <a:r>
+              <a:rPr lang="en-US" sz="850">
                 <a:solidFill>
                   <a:srgbClr val="5D6A67"/>
                 </a:solidFill>
               </a:rPr>
               <a:t>advance, retention, maturity settlement</a:t>
             </a:r>
-            <a:endParaRPr lang="en-US" sz="840" dirty="0"/>
-          </a:p>
-        </p:txBody>
-      </p:sp>
-      <p:sp>
-        <p:nvSpPr>
-          <p:cNvPr id="24" name="Shape 22"/>
-          <p:cNvSpPr/>
-          <p:nvPr/>
-        </p:nvSpPr>
-        <p:spPr>
+            <a:endParaRPr lang="en-US" sz="850"/>
+          </a:p>
+        </p:txBody>
+      </p:sp>
+      <p:sp>
+        <p:nvSpPr>
+          <p:cNvPr id="1268259395" name="Shape 22"/>
+          <p:cNvSpPr/>
+          <p:nvPr/>
+        </p:nvSpPr>
+        <p:spPr bwMode="auto">
           <a:xfrm>
             <a:off x="8540496" y="2212848"/>
             <a:ext cx="1444752" cy="0"/>
@@ -6231,17 +6528,20 @@
           <a:bodyPr/>
           <a:lstStyle/>
           <a:p>
+            <a:pPr>
+              <a:defRPr/>
+            </a:pPr>
             <a:endParaRPr lang="en-US"/>
           </a:p>
         </p:txBody>
       </p:sp>
       <p:sp>
         <p:nvSpPr>
-          <p:cNvPr id="25" name="Shape 23"/>
-          <p:cNvSpPr/>
-          <p:nvPr/>
-        </p:nvSpPr>
-        <p:spPr>
+          <p:cNvPr id="143971615" name="Shape 23"/>
+          <p:cNvSpPr/>
+          <p:nvPr/>
+        </p:nvSpPr>
+        <p:spPr bwMode="auto">
           <a:xfrm>
             <a:off x="8156448" y="1920240"/>
             <a:ext cx="713232" cy="713232"/>
@@ -6263,17 +6563,20 @@
           <a:bodyPr/>
           <a:lstStyle/>
           <a:p>
+            <a:pPr>
+              <a:defRPr/>
+            </a:pPr>
             <a:endParaRPr lang="en-US"/>
           </a:p>
         </p:txBody>
       </p:sp>
       <p:sp>
         <p:nvSpPr>
-          <p:cNvPr id="26" name="Text 24"/>
-          <p:cNvSpPr/>
-          <p:nvPr/>
-        </p:nvSpPr>
-        <p:spPr>
+          <p:cNvPr id="558998773" name="Text 24"/>
+          <p:cNvSpPr/>
+          <p:nvPr/>
+        </p:nvSpPr>
+        <p:spPr bwMode="auto">
           <a:xfrm>
             <a:off x="8156448" y="2121408"/>
             <a:ext cx="713232" cy="164592"/>
@@ -6290,26 +6593,27 @@
           <a:p>
             <a:pPr marL="0" indent="0" algn="ctr">
               <a:buNone/>
-            </a:pPr>
-            <a:r>
-              <a:rPr lang="en-US" sz="1200" b="1" dirty="0">
+              <a:defRPr/>
+            </a:pPr>
+            <a:r>
+              <a:rPr lang="en-US" sz="1200" b="1">
                 <a:solidFill>
                   <a:srgbClr val="FFFFFF"/>
                 </a:solidFill>
               </a:rPr>
               <a:t>4</a:t>
             </a:r>
-            <a:endParaRPr lang="en-US" sz="1200" dirty="0"/>
-          </a:p>
-        </p:txBody>
-      </p:sp>
-      <p:sp>
-        <p:nvSpPr>
-          <p:cNvPr id="27" name="Text 25"/>
-          <p:cNvSpPr/>
-          <p:nvPr/>
-        </p:nvSpPr>
-        <p:spPr>
+            <a:endParaRPr lang="en-US" sz="1200"/>
+          </a:p>
+        </p:txBody>
+      </p:sp>
+      <p:sp>
+        <p:nvSpPr>
+          <p:cNvPr id="1661825271" name="Text 25"/>
+          <p:cNvSpPr/>
+          <p:nvPr/>
+        </p:nvSpPr>
+        <p:spPr bwMode="auto">
           <a:xfrm>
             <a:off x="8065008" y="2907792"/>
             <a:ext cx="1417320" cy="182880"/>
@@ -6328,26 +6632,27 @@
           <a:p>
             <a:pPr marL="0" indent="0">
               <a:buNone/>
-            </a:pPr>
-            <a:r>
-              <a:rPr lang="en-US" sz="1050" b="1" dirty="0">
+              <a:defRPr/>
+            </a:pPr>
+            <a:r>
+              <a:rPr lang="en-US" sz="1050" b="1">
                 <a:solidFill>
                   <a:srgbClr val="244D73"/>
                 </a:solidFill>
               </a:rPr>
               <a:t>Risk</a:t>
             </a:r>
-            <a:endParaRPr lang="en-US" sz="1050" dirty="0"/>
-          </a:p>
-        </p:txBody>
-      </p:sp>
-      <p:sp>
-        <p:nvSpPr>
-          <p:cNvPr id="28" name="Text 26"/>
-          <p:cNvSpPr/>
-          <p:nvPr/>
-        </p:nvSpPr>
-        <p:spPr>
+            <a:endParaRPr lang="en-US" sz="1050"/>
+          </a:p>
+        </p:txBody>
+      </p:sp>
+      <p:sp>
+        <p:nvSpPr>
+          <p:cNvPr id="1881374944" name="Text 26"/>
+          <p:cNvSpPr/>
+          <p:nvPr/>
+        </p:nvSpPr>
+        <p:spPr bwMode="auto">
           <a:xfrm>
             <a:off x="8065008" y="3236976"/>
             <a:ext cx="1426464" cy="566928"/>
@@ -6366,26 +6671,27 @@
           <a:p>
             <a:pPr marL="0" indent="0">
               <a:buNone/>
-            </a:pPr>
-            <a:r>
-              <a:rPr lang="en-US" sz="840" dirty="0">
+              <a:defRPr/>
+            </a:pPr>
+            <a:r>
+              <a:rPr lang="en-US" sz="850">
                 <a:solidFill>
                   <a:srgbClr val="5D6A67"/>
                 </a:solidFill>
               </a:rPr>
               <a:t>delinquency + payment profile evidence</a:t>
             </a:r>
-            <a:endParaRPr lang="en-US" sz="840" dirty="0"/>
-          </a:p>
-        </p:txBody>
-      </p:sp>
-      <p:sp>
-        <p:nvSpPr>
-          <p:cNvPr id="29" name="Shape 27"/>
-          <p:cNvSpPr/>
-          <p:nvPr/>
-        </p:nvSpPr>
-        <p:spPr>
+            <a:endParaRPr lang="en-US" sz="850"/>
+          </a:p>
+        </p:txBody>
+      </p:sp>
+      <p:sp>
+        <p:nvSpPr>
+          <p:cNvPr id="1493755211" name="Shape 27"/>
+          <p:cNvSpPr/>
+          <p:nvPr/>
+        </p:nvSpPr>
+        <p:spPr bwMode="auto">
           <a:xfrm>
             <a:off x="10415016" y="2212848"/>
             <a:ext cx="0" cy="0"/>
@@ -6405,17 +6711,20 @@
           <a:bodyPr/>
           <a:lstStyle/>
           <a:p>
+            <a:pPr>
+              <a:defRPr/>
+            </a:pPr>
             <a:endParaRPr lang="en-US"/>
           </a:p>
         </p:txBody>
       </p:sp>
       <p:sp>
         <p:nvSpPr>
-          <p:cNvPr id="30" name="Shape 28"/>
-          <p:cNvSpPr/>
-          <p:nvPr/>
-        </p:nvSpPr>
-        <p:spPr>
+          <p:cNvPr id="1596789578" name="Shape 28"/>
+          <p:cNvSpPr/>
+          <p:nvPr/>
+        </p:nvSpPr>
+        <p:spPr bwMode="auto">
           <a:xfrm>
             <a:off x="10030968" y="1920240"/>
             <a:ext cx="713232" cy="713232"/>
@@ -6437,17 +6746,20 @@
           <a:bodyPr/>
           <a:lstStyle/>
           <a:p>
+            <a:pPr>
+              <a:defRPr/>
+            </a:pPr>
             <a:endParaRPr lang="en-US"/>
           </a:p>
         </p:txBody>
       </p:sp>
       <p:sp>
         <p:nvSpPr>
-          <p:cNvPr id="31" name="Text 29"/>
-          <p:cNvSpPr/>
-          <p:nvPr/>
-        </p:nvSpPr>
-        <p:spPr>
+          <p:cNvPr id="703703032" name="Text 29"/>
+          <p:cNvSpPr/>
+          <p:nvPr/>
+        </p:nvSpPr>
+        <p:spPr bwMode="auto">
           <a:xfrm>
             <a:off x="10030968" y="2121408"/>
             <a:ext cx="713232" cy="164592"/>
@@ -6464,26 +6776,27 @@
           <a:p>
             <a:pPr marL="0" indent="0" algn="ctr">
               <a:buNone/>
-            </a:pPr>
-            <a:r>
-              <a:rPr lang="en-US" sz="1200" b="1" dirty="0">
+              <a:defRPr/>
+            </a:pPr>
+            <a:r>
+              <a:rPr lang="en-US" sz="1200" b="1">
                 <a:solidFill>
                   <a:srgbClr val="FFFFFF"/>
                 </a:solidFill>
               </a:rPr>
               <a:t>5</a:t>
             </a:r>
-            <a:endParaRPr lang="en-US" sz="1200" dirty="0"/>
-          </a:p>
-        </p:txBody>
-      </p:sp>
-      <p:sp>
-        <p:nvSpPr>
-          <p:cNvPr id="32" name="Text 30"/>
-          <p:cNvSpPr/>
-          <p:nvPr/>
-        </p:nvSpPr>
-        <p:spPr>
+            <a:endParaRPr lang="en-US" sz="1200"/>
+          </a:p>
+        </p:txBody>
+      </p:sp>
+      <p:sp>
+        <p:nvSpPr>
+          <p:cNvPr id="1808134933" name="Text 30"/>
+          <p:cNvSpPr/>
+          <p:nvPr/>
+        </p:nvSpPr>
+        <p:spPr bwMode="auto">
           <a:xfrm>
             <a:off x="9939528" y="2907792"/>
             <a:ext cx="1417320" cy="182880"/>
@@ -6502,26 +6815,27 @@
           <a:p>
             <a:pPr marL="0" indent="0">
               <a:buNone/>
-            </a:pPr>
-            <a:r>
-              <a:rPr lang="en-US" sz="1050" b="1" dirty="0">
+              <a:defRPr/>
+            </a:pPr>
+            <a:r>
+              <a:rPr lang="en-US" sz="1050" b="1">
                 <a:solidFill>
                   <a:srgbClr val="1F7A5C"/>
                 </a:solidFill>
               </a:rPr>
               <a:t>Demo</a:t>
             </a:r>
-            <a:endParaRPr lang="en-US" sz="1050" dirty="0"/>
-          </a:p>
-        </p:txBody>
-      </p:sp>
-      <p:sp>
-        <p:nvSpPr>
-          <p:cNvPr id="33" name="Text 31"/>
-          <p:cNvSpPr/>
-          <p:nvPr/>
-        </p:nvSpPr>
-        <p:spPr>
+            <a:endParaRPr lang="en-US" sz="1050"/>
+          </a:p>
+        </p:txBody>
+      </p:sp>
+      <p:sp>
+        <p:nvSpPr>
+          <p:cNvPr id="746602973" name="Text 31"/>
+          <p:cNvSpPr/>
+          <p:nvPr/>
+        </p:nvSpPr>
+        <p:spPr bwMode="auto">
           <a:xfrm>
             <a:off x="9939528" y="3236976"/>
             <a:ext cx="1426464" cy="566928"/>
@@ -6540,26 +6854,27 @@
           <a:p>
             <a:pPr marL="0" indent="0">
               <a:buNone/>
-            </a:pPr>
-            <a:r>
-              <a:rPr lang="en-US" sz="840" dirty="0">
+              <a:defRPr/>
+            </a:pPr>
+            <a:r>
+              <a:rPr lang="en-US" sz="850">
                 <a:solidFill>
                   <a:srgbClr val="5D6A67"/>
                 </a:solidFill>
               </a:rPr>
               <a:t>end-to-end validation and polish</a:t>
             </a:r>
-            <a:endParaRPr lang="en-US" sz="840" dirty="0"/>
-          </a:p>
-        </p:txBody>
-      </p:sp>
-      <p:sp>
-        <p:nvSpPr>
-          <p:cNvPr id="34" name="Shape 32"/>
-          <p:cNvSpPr/>
-          <p:nvPr/>
-        </p:nvSpPr>
-        <p:spPr>
+            <a:endParaRPr lang="en-US" sz="850"/>
+          </a:p>
+        </p:txBody>
+      </p:sp>
+      <p:sp>
+        <p:nvSpPr>
+          <p:cNvPr id="1684127161" name="Shape 32"/>
+          <p:cNvSpPr/>
+          <p:nvPr/>
+        </p:nvSpPr>
+        <p:spPr bwMode="auto">
           <a:xfrm>
             <a:off x="914400" y="4645152"/>
             <a:ext cx="4800600" cy="868680"/>
@@ -6583,17 +6898,20 @@
           <a:bodyPr/>
           <a:lstStyle/>
           <a:p>
+            <a:pPr>
+              <a:defRPr/>
+            </a:pPr>
             <a:endParaRPr lang="en-US"/>
           </a:p>
         </p:txBody>
       </p:sp>
       <p:sp>
         <p:nvSpPr>
-          <p:cNvPr id="35" name="Text 33"/>
-          <p:cNvSpPr/>
-          <p:nvPr/>
-        </p:nvSpPr>
-        <p:spPr>
+          <p:cNvPr id="1023043974" name="Text 33"/>
+          <p:cNvSpPr/>
+          <p:nvPr/>
+        </p:nvSpPr>
+        <p:spPr bwMode="auto">
           <a:xfrm>
             <a:off x="1234440" y="4882896"/>
             <a:ext cx="1554480" cy="164592"/>
@@ -6610,26 +6928,27 @@
           <a:p>
             <a:pPr marL="0" indent="0">
               <a:buNone/>
-            </a:pPr>
-            <a:r>
-              <a:rPr lang="en-US" sz="820" b="1" dirty="0">
+              <a:defRPr/>
+            </a:pPr>
+            <a:r>
+              <a:rPr lang="en-US" sz="800" b="1">
                 <a:solidFill>
                   <a:srgbClr val="9EE2C5"/>
                 </a:solidFill>
               </a:rPr>
               <a:t>MVP acceptance rule</a:t>
             </a:r>
-            <a:endParaRPr lang="en-US" sz="820" dirty="0"/>
-          </a:p>
-        </p:txBody>
-      </p:sp>
-      <p:sp>
-        <p:nvSpPr>
-          <p:cNvPr id="36" name="Text 34"/>
-          <p:cNvSpPr/>
-          <p:nvPr/>
-        </p:nvSpPr>
-        <p:spPr>
+            <a:endParaRPr lang="en-US" sz="800"/>
+          </a:p>
+        </p:txBody>
+      </p:sp>
+      <p:sp>
+        <p:nvSpPr>
+          <p:cNvPr id="1671328867" name="Text 34"/>
+          <p:cNvSpPr/>
+          <p:nvPr/>
+        </p:nvSpPr>
+        <p:spPr bwMode="auto">
           <a:xfrm>
             <a:off x="2816352" y="4809744"/>
             <a:ext cx="2542032" cy="310896"/>
@@ -6648,26 +6967,27 @@
           <a:p>
             <a:pPr marL="0" indent="0">
               <a:buNone/>
-            </a:pPr>
-            <a:r>
-              <a:rPr lang="en-US" sz="1020" b="1" dirty="0">
+              <a:defRPr/>
+            </a:pPr>
+            <a:r>
+              <a:rPr lang="en-US" sz="1000" b="1">
                 <a:solidFill>
                   <a:srgbClr val="FFFFFF"/>
                 </a:solidFill>
               </a:rPr>
               <a:t>End-to-end demo must show accepted Due Value financed, advanced, repaid, and reconciled.</a:t>
             </a:r>
-            <a:endParaRPr lang="en-US" sz="1020" dirty="0"/>
-          </a:p>
-        </p:txBody>
-      </p:sp>
-      <p:sp>
-        <p:nvSpPr>
-          <p:cNvPr id="37" name="Shape 35"/>
-          <p:cNvSpPr/>
-          <p:nvPr/>
-        </p:nvSpPr>
-        <p:spPr>
+            <a:endParaRPr lang="en-US" sz="1000"/>
+          </a:p>
+        </p:txBody>
+      </p:sp>
+      <p:sp>
+        <p:nvSpPr>
+          <p:cNvPr id="244824920" name="Shape 35"/>
+          <p:cNvSpPr/>
+          <p:nvPr/>
+        </p:nvSpPr>
+        <p:spPr bwMode="auto">
           <a:xfrm>
             <a:off x="6144768" y="4645152"/>
             <a:ext cx="5029200" cy="868680"/>
@@ -6691,17 +7011,20 @@
           <a:bodyPr/>
           <a:lstStyle/>
           <a:p>
+            <a:pPr>
+              <a:defRPr/>
+            </a:pPr>
             <a:endParaRPr lang="en-US"/>
           </a:p>
         </p:txBody>
       </p:sp>
       <p:sp>
         <p:nvSpPr>
-          <p:cNvPr id="38" name="Text 36"/>
-          <p:cNvSpPr/>
-          <p:nvPr/>
-        </p:nvSpPr>
-        <p:spPr>
+          <p:cNvPr id="1831880638" name="Text 36"/>
+          <p:cNvSpPr/>
+          <p:nvPr/>
+        </p:nvSpPr>
+        <p:spPr bwMode="auto">
           <a:xfrm>
             <a:off x="6437376" y="4882896"/>
             <a:ext cx="1005840" cy="146304"/>
@@ -6718,26 +7041,27 @@
           <a:p>
             <a:pPr marL="0" indent="0">
               <a:buNone/>
-            </a:pPr>
-            <a:r>
-              <a:rPr lang="en-US" sz="820" b="1" dirty="0">
+              <a:defRPr/>
+            </a:pPr>
+            <a:r>
+              <a:rPr lang="en-US" sz="800" b="1">
                 <a:solidFill>
                   <a:srgbClr val="1F7A5C"/>
                 </a:solidFill>
               </a:rPr>
               <a:t>Traceability</a:t>
             </a:r>
-            <a:endParaRPr lang="en-US" sz="820" dirty="0"/>
-          </a:p>
-        </p:txBody>
-      </p:sp>
-      <p:sp>
-        <p:nvSpPr>
-          <p:cNvPr id="39" name="Text 37"/>
-          <p:cNvSpPr/>
-          <p:nvPr/>
-        </p:nvSpPr>
-        <p:spPr>
+            <a:endParaRPr lang="en-US" sz="800"/>
+          </a:p>
+        </p:txBody>
+      </p:sp>
+      <p:sp>
+        <p:nvSpPr>
+          <p:cNvPr id="2014449773" name="Text 37"/>
+          <p:cNvSpPr/>
+          <p:nvPr/>
+        </p:nvSpPr>
+        <p:spPr bwMode="auto">
           <a:xfrm>
             <a:off x="7388352" y="4809744"/>
             <a:ext cx="3401568" cy="310896"/>
@@ -6756,26 +7080,27 @@
           <a:p>
             <a:pPr marL="0" indent="0">
               <a:buNone/>
-            </a:pPr>
-            <a:r>
-              <a:rPr lang="en-US" sz="1000" dirty="0">
+              <a:defRPr/>
+            </a:pPr>
+            <a:r>
+              <a:rPr lang="en-US" sz="1000">
                 <a:solidFill>
                   <a:srgbClr val="16201F"/>
                 </a:solidFill>
               </a:rPr>
               <a:t>Ideation -&gt; Use Cases -&gt; MVP Roadmap, with UC-001 through UC-014 validating the product thesis.</a:t>
             </a:r>
-            <a:endParaRPr lang="en-US" sz="1000" dirty="0"/>
-          </a:p>
-        </p:txBody>
-      </p:sp>
-      <p:sp>
-        <p:nvSpPr>
-          <p:cNvPr id="40" name="Shape 38"/>
-          <p:cNvSpPr/>
-          <p:nvPr/>
-        </p:nvSpPr>
-        <p:spPr>
+            <a:endParaRPr lang="en-US" sz="1000"/>
+          </a:p>
+        </p:txBody>
+      </p:sp>
+      <p:sp>
+        <p:nvSpPr>
+          <p:cNvPr id="319556874" name="Shape 38"/>
+          <p:cNvSpPr/>
+          <p:nvPr/>
+        </p:nvSpPr>
+        <p:spPr bwMode="auto">
           <a:xfrm>
             <a:off x="502920" y="6419088"/>
             <a:ext cx="11201400" cy="0"/>
@@ -6795,17 +7120,20 @@
           <a:bodyPr/>
           <a:lstStyle/>
           <a:p>
+            <a:pPr>
+              <a:defRPr/>
+            </a:pPr>
             <a:endParaRPr lang="en-US"/>
           </a:p>
         </p:txBody>
       </p:sp>
       <p:sp>
         <p:nvSpPr>
-          <p:cNvPr id="41" name="Text 39"/>
-          <p:cNvSpPr/>
-          <p:nvPr/>
-        </p:nvSpPr>
-        <p:spPr>
+          <p:cNvPr id="1623626611" name="Text 39"/>
+          <p:cNvSpPr/>
+          <p:nvPr/>
+        </p:nvSpPr>
+        <p:spPr bwMode="auto">
           <a:xfrm>
             <a:off x="502920" y="6473952"/>
             <a:ext cx="3840480" cy="201168"/>
@@ -6822,29 +7150,30 @@
           <a:p>
             <a:pPr marL="0" indent="0">
               <a:buNone/>
-            </a:pPr>
-            <a:r>
-              <a:rPr lang="en-US" sz="750" dirty="0">
+              <a:defRPr/>
+            </a:pPr>
+            <a:r>
+              <a:rPr lang="en-US" sz="750">
                 <a:solidFill>
                   <a:srgbClr val="5D6A67"/>
                 </a:solidFill>
-                <a:latin typeface="Aptos" pitchFamily="34" charset="0"/>
-                <a:ea typeface="Aptos" pitchFamily="34" charset="-122"/>
-                <a:cs typeface="Aptos" pitchFamily="34" charset="-120"/>
+                <a:latin typeface="Aptos"/>
+                <a:ea typeface="Aptos"/>
+                <a:cs typeface="Aptos"/>
               </a:rPr>
               <a:t>Smart Finux Labs · Verity SCF</a:t>
             </a:r>
-            <a:endParaRPr lang="en-US" sz="750" dirty="0"/>
-          </a:p>
-        </p:txBody>
-      </p:sp>
-      <p:sp>
-        <p:nvSpPr>
-          <p:cNvPr id="42" name="Text 40"/>
-          <p:cNvSpPr/>
-          <p:nvPr/>
-        </p:nvSpPr>
-        <p:spPr>
+            <a:endParaRPr lang="en-US" sz="750"/>
+          </a:p>
+        </p:txBody>
+      </p:sp>
+      <p:sp>
+        <p:nvSpPr>
+          <p:cNvPr id="951837087" name="Text 40"/>
+          <p:cNvSpPr/>
+          <p:nvPr/>
+        </p:nvSpPr>
+        <p:spPr bwMode="auto">
           <a:xfrm>
             <a:off x="11201400" y="6473952"/>
             <a:ext cx="502920" cy="201168"/>
@@ -6861,19 +7190,20 @@
           <a:p>
             <a:pPr marL="0" indent="0" algn="r">
               <a:buNone/>
-            </a:pPr>
-            <a:r>
-              <a:rPr lang="en-US" sz="750" b="1" dirty="0">
+              <a:defRPr/>
+            </a:pPr>
+            <a:r>
+              <a:rPr lang="en-US" sz="750" b="1">
                 <a:solidFill>
                   <a:srgbClr val="5D6A67"/>
                 </a:solidFill>
-                <a:latin typeface="Aptos" pitchFamily="34" charset="0"/>
-                <a:ea typeface="Aptos" pitchFamily="34" charset="-122"/>
-                <a:cs typeface="Aptos" pitchFamily="34" charset="-120"/>
+                <a:latin typeface="Aptos"/>
+                <a:ea typeface="Aptos"/>
+                <a:cs typeface="Aptos"/>
               </a:rPr>
               <a:t>05</a:t>
             </a:r>
-            <a:endParaRPr lang="en-US" sz="750" dirty="0"/>
+            <a:endParaRPr lang="en-US" sz="750"/>
           </a:p>
         </p:txBody>
       </p:sp>
@@ -6882,11 +7212,19 @@
   <p:clrMapOvr>
     <a:masterClrMapping/>
   </p:clrMapOvr>
+  <mc:AlternateContent xmlns:mc="http://schemas.openxmlformats.org/markup-compatibility/2006">
+    <mc:Choice xmlns:p159="http://schemas.microsoft.com/office/powerpoint/2015/09/main" xmlns:p14="http://schemas.microsoft.com/office/powerpoint/2010/main" Requires="p159">
+      <p:transition p14:dur="2000" advClick="1"/>
+    </mc:Choice>
+    <mc:Fallback>
+      <p:transition advClick="1"/>
+    </mc:Fallback>
+  </mc:AlternateContent>
 </p:sld>
 </file>
 
 <file path=ppt/theme/theme1.xml><?xml version="1.0" encoding="utf-8"?>
-<a:theme xmlns:a="http://schemas.openxmlformats.org/drawingml/2006/main" name="Office Theme">
+<a:theme xmlns:a="http://schemas.openxmlformats.org/drawingml/2006/main" xmlns:r="http://schemas.openxmlformats.org/officeDocument/2006/relationships" xmlns:p="http://schemas.openxmlformats.org/presentationml/2006/main" name="Office Theme">
   <a:themeElements>
     <a:clrScheme name="Office">
       <a:dk1>
@@ -6929,107 +7267,13 @@
     <a:fontScheme name="Office">
       <a:majorFont>
         <a:latin typeface="Aptos Display"/>
-        <a:ea typeface=""/>
-        <a:cs typeface=""/>
-        <a:font script="Jpan" typeface="游ゴシック Light"/>
-        <a:font script="Hang" typeface="맑은 고딕"/>
-        <a:font script="Hans" typeface="等线 Light"/>
-        <a:font script="Hant" typeface="新細明體"/>
-        <a:font script="Arab" typeface="Times New Roman"/>
-        <a:font script="Hebr" typeface="Times New Roman"/>
-        <a:font script="Thai" typeface="Angsana New"/>
-        <a:font script="Ethi" typeface="Nyala"/>
-        <a:font script="Beng" typeface="Vrinda"/>
-        <a:font script="Gujr" typeface="Shruti"/>
-        <a:font script="Khmr" typeface="MoolBoran"/>
-        <a:font script="Knda" typeface="Tunga"/>
-        <a:font script="Guru" typeface="Raavi"/>
-        <a:font script="Cans" typeface="Euphemia"/>
-        <a:font script="Cher" typeface="Plantagenet Cherokee"/>
-        <a:font script="Yiii" typeface="Microsoft Yi Baiti"/>
-        <a:font script="Tibt" typeface="Microsoft Himalaya"/>
-        <a:font script="Thaa" typeface="MV Boli"/>
-        <a:font script="Deva" typeface="Mangal"/>
-        <a:font script="Telu" typeface="Gautami"/>
-        <a:font script="Taml" typeface="Latha"/>
-        <a:font script="Syrc" typeface="Estrangelo Edessa"/>
-        <a:font script="Orya" typeface="Kalinga"/>
-        <a:font script="Mlym" typeface="Kartika"/>
-        <a:font script="Laoo" typeface="DokChampa"/>
-        <a:font script="Sinh" typeface="Iskoola Pota"/>
-        <a:font script="Mong" typeface="Mongolian Baiti"/>
-        <a:font script="Viet" typeface="Times New Roman"/>
-        <a:font script="Uigh" typeface="Microsoft Uighur"/>
-        <a:font script="Geor" typeface="Sylfaen"/>
-        <a:font script="Armn" typeface="Arial"/>
-        <a:font script="Bugi" typeface="Leelawadee UI"/>
-        <a:font script="Bopo" typeface="Microsoft JhengHei"/>
-        <a:font script="Java" typeface="Javanese Text"/>
-        <a:font script="Lisu" typeface="Segoe UI"/>
-        <a:font script="Mymr" typeface="Myanmar Text"/>
-        <a:font script="Nkoo" typeface="Ebrima"/>
-        <a:font script="Olck" typeface="Nirmala UI"/>
-        <a:font script="Osma" typeface="Ebrima"/>
-        <a:font script="Phag" typeface="Phagspa"/>
-        <a:font script="Syrn" typeface="Estrangelo Edessa"/>
-        <a:font script="Syrj" typeface="Estrangelo Edessa"/>
-        <a:font script="Syre" typeface="Estrangelo Edessa"/>
-        <a:font script="Sora" typeface="Nirmala UI"/>
-        <a:font script="Tale" typeface="Microsoft Tai Le"/>
-        <a:font script="Talu" typeface="Microsoft New Tai Lue"/>
-        <a:font script="Tfng" typeface="Ebrima"/>
+        <a:ea typeface="Arial"/>
+        <a:cs typeface="Arial"/>
       </a:majorFont>
       <a:minorFont>
         <a:latin typeface="Aptos"/>
-        <a:ea typeface=""/>
-        <a:cs typeface=""/>
-        <a:font script="Jpan" typeface="游ゴシック"/>
-        <a:font script="Hang" typeface="맑은 고딕"/>
-        <a:font script="Hans" typeface="等线"/>
-        <a:font script="Hant" typeface="新細明體"/>
-        <a:font script="Arab" typeface="Arial"/>
-        <a:font script="Hebr" typeface="Arial"/>
-        <a:font script="Thai" typeface="Cordia New"/>
-        <a:font script="Ethi" typeface="Nyala"/>
-        <a:font script="Beng" typeface="Vrinda"/>
-        <a:font script="Gujr" typeface="Shruti"/>
-        <a:font script="Khmr" typeface="DaunPenh"/>
-        <a:font script="Knda" typeface="Tunga"/>
-        <a:font script="Guru" typeface="Raavi"/>
-        <a:font script="Cans" typeface="Euphemia"/>
-        <a:font script="Cher" typeface="Plantagenet Cherokee"/>
-        <a:font script="Yiii" typeface="Microsoft Yi Baiti"/>
-        <a:font script="Tibt" typeface="Microsoft Himalaya"/>
-        <a:font script="Thaa" typeface="MV Boli"/>
-        <a:font script="Deva" typeface="Mangal"/>
-        <a:font script="Telu" typeface="Gautami"/>
-        <a:font script="Taml" typeface="Latha"/>
-        <a:font script="Syrc" typeface="Estrangelo Edessa"/>
-        <a:font script="Orya" typeface="Kalinga"/>
-        <a:font script="Mlym" typeface="Kartika"/>
-        <a:font script="Laoo" typeface="DokChampa"/>
-        <a:font script="Sinh" typeface="Iskoola Pota"/>
-        <a:font script="Mong" typeface="Mongolian Baiti"/>
-        <a:font script="Viet" typeface="Arial"/>
-        <a:font script="Uigh" typeface="Microsoft Uighur"/>
-        <a:font script="Geor" typeface="Sylfaen"/>
-        <a:font script="Armn" typeface="Arial"/>
-        <a:font script="Bugi" typeface="Leelawadee UI"/>
-        <a:font script="Bopo" typeface="Microsoft JhengHei"/>
-        <a:font script="Java" typeface="Javanese Text"/>
-        <a:font script="Lisu" typeface="Segoe UI"/>
-        <a:font script="Mymr" typeface="Myanmar Text"/>
-        <a:font script="Nkoo" typeface="Ebrima"/>
-        <a:font script="Olck" typeface="Nirmala UI"/>
-        <a:font script="Osma" typeface="Ebrima"/>
-        <a:font script="Phag" typeface="Phagspa"/>
-        <a:font script="Syrn" typeface="Estrangelo Edessa"/>
-        <a:font script="Syrj" typeface="Estrangelo Edessa"/>
-        <a:font script="Syre" typeface="Estrangelo Edessa"/>
-        <a:font script="Sora" typeface="Nirmala UI"/>
-        <a:font script="Tale" typeface="Microsoft Tai Le"/>
-        <a:font script="Talu" typeface="Microsoft New Tai Lue"/>
-        <a:font script="Tfng" typeface="Ebrima"/>
+        <a:ea typeface="Arial"/>
+        <a:cs typeface="Arial"/>
       </a:minorFont>
     </a:fontScheme>
     <a:fmtScheme name="Office">
@@ -7037,7 +7281,7 @@
         <a:solidFill>
           <a:schemeClr val="phClr"/>
         </a:solidFill>
-        <a:gradFill rotWithShape="1">
+        <a:gradFill>
           <a:gsLst>
             <a:gs pos="0">
               <a:schemeClr val="phClr">
@@ -7063,7 +7307,7 @@
           </a:gsLst>
           <a:lin ang="5400000" scaled="0"/>
         </a:gradFill>
-        <a:gradFill rotWithShape="1">
+        <a:gradFill>
           <a:gsLst>
             <a:gs pos="0">
               <a:schemeClr val="phClr">
@@ -7140,7 +7384,7 @@
             <a:satMod val="170000"/>
           </a:schemeClr>
         </a:solidFill>
-        <a:gradFill rotWithShape="1">
+        <a:gradFill>
           <a:gsLst>
             <a:gs pos="0">
               <a:schemeClr val="phClr">
@@ -7171,17 +7415,11 @@
     </a:fmtScheme>
   </a:themeElements>
   <a:objectDefaults/>
-  <a:extraClrSchemeLst/>
-  <a:extLst>
-    <a:ext uri="{05A4C25C-085E-4340-85A3-A5531E510DB2}">
-      <thm15:themeFamily xmlns:thm15="http://schemas.microsoft.com/office/thememl/2012/main" name="Office Theme" id="{62F939B6-93AF-4DB8-9C6B-D6C7DFDC589F}" vid="{4A3C46E8-61CC-4603-A589-7422A47A8E4A}"/>
-    </a:ext>
-  </a:extLst>
 </a:theme>
 </file>
 
 <file path=ppt/theme/theme2.xml><?xml version="1.0" encoding="utf-8"?>
-<a:theme xmlns:a="http://schemas.openxmlformats.org/drawingml/2006/main" name="Office Theme">
+<a:theme xmlns:a="http://schemas.openxmlformats.org/drawingml/2006/main" xmlns:r="http://schemas.openxmlformats.org/officeDocument/2006/relationships" xmlns:p="http://schemas.openxmlformats.org/presentationml/2006/main" name="Office Theme">
   <a:themeElements>
     <a:clrScheme name="Office">
       <a:dk1>
@@ -7223,108 +7461,14 @@
     </a:clrScheme>
     <a:fontScheme name="Office">
       <a:majorFont>
-        <a:latin typeface="Aptos Display" panose="02110004020202020204"/>
-        <a:ea typeface=""/>
-        <a:cs typeface=""/>
-        <a:font script="Jpan" typeface="游ゴシック Light"/>
-        <a:font script="Hang" typeface="맑은 고딕"/>
-        <a:font script="Hans" typeface="等线 Light"/>
-        <a:font script="Hant" typeface="新細明體"/>
-        <a:font script="Arab" typeface="Times New Roman"/>
-        <a:font script="Hebr" typeface="Times New Roman"/>
-        <a:font script="Thai" typeface="Angsana New"/>
-        <a:font script="Ethi" typeface="Nyala"/>
-        <a:font script="Beng" typeface="Vrinda"/>
-        <a:font script="Gujr" typeface="Shruti"/>
-        <a:font script="Khmr" typeface="MoolBoran"/>
-        <a:font script="Knda" typeface="Tunga"/>
-        <a:font script="Guru" typeface="Raavi"/>
-        <a:font script="Cans" typeface="Euphemia"/>
-        <a:font script="Cher" typeface="Plantagenet Cherokee"/>
-        <a:font script="Yiii" typeface="Microsoft Yi Baiti"/>
-        <a:font script="Tibt" typeface="Microsoft Himalaya"/>
-        <a:font script="Thaa" typeface="MV Boli"/>
-        <a:font script="Deva" typeface="Mangal"/>
-        <a:font script="Telu" typeface="Gautami"/>
-        <a:font script="Taml" typeface="Latha"/>
-        <a:font script="Syrc" typeface="Estrangelo Edessa"/>
-        <a:font script="Orya" typeface="Kalinga"/>
-        <a:font script="Mlym" typeface="Kartika"/>
-        <a:font script="Laoo" typeface="DokChampa"/>
-        <a:font script="Sinh" typeface="Iskoola Pota"/>
-        <a:font script="Mong" typeface="Mongolian Baiti"/>
-        <a:font script="Viet" typeface="Times New Roman"/>
-        <a:font script="Uigh" typeface="Microsoft Uighur"/>
-        <a:font script="Geor" typeface="Sylfaen"/>
-        <a:font script="Armn" typeface="Arial"/>
-        <a:font script="Bugi" typeface="Leelawadee UI"/>
-        <a:font script="Bopo" typeface="Microsoft JhengHei"/>
-        <a:font script="Java" typeface="Javanese Text"/>
-        <a:font script="Lisu" typeface="Segoe UI"/>
-        <a:font script="Mymr" typeface="Myanmar Text"/>
-        <a:font script="Nkoo" typeface="Ebrima"/>
-        <a:font script="Olck" typeface="Nirmala UI"/>
-        <a:font script="Osma" typeface="Ebrima"/>
-        <a:font script="Phag" typeface="Phagspa"/>
-        <a:font script="Syrn" typeface="Estrangelo Edessa"/>
-        <a:font script="Syrj" typeface="Estrangelo Edessa"/>
-        <a:font script="Syre" typeface="Estrangelo Edessa"/>
-        <a:font script="Sora" typeface="Nirmala UI"/>
-        <a:font script="Tale" typeface="Microsoft Tai Le"/>
-        <a:font script="Talu" typeface="Microsoft New Tai Lue"/>
-        <a:font script="Tfng" typeface="Ebrima"/>
+        <a:latin typeface="Aptos Display"/>
+        <a:ea typeface="Arial"/>
+        <a:cs typeface="Arial"/>
       </a:majorFont>
       <a:minorFont>
-        <a:latin typeface="Aptos" panose="02110004020202020204"/>
-        <a:ea typeface=""/>
-        <a:cs typeface=""/>
-        <a:font script="Jpan" typeface="游ゴシック"/>
-        <a:font script="Hang" typeface="맑은 고딕"/>
-        <a:font script="Hans" typeface="等线"/>
-        <a:font script="Hant" typeface="新細明體"/>
-        <a:font script="Arab" typeface="Arial"/>
-        <a:font script="Hebr" typeface="Arial"/>
-        <a:font script="Thai" typeface="Cordia New"/>
-        <a:font script="Ethi" typeface="Nyala"/>
-        <a:font script="Beng" typeface="Vrinda"/>
-        <a:font script="Gujr" typeface="Shruti"/>
-        <a:font script="Khmr" typeface="DaunPenh"/>
-        <a:font script="Knda" typeface="Tunga"/>
-        <a:font script="Guru" typeface="Raavi"/>
-        <a:font script="Cans" typeface="Euphemia"/>
-        <a:font script="Cher" typeface="Plantagenet Cherokee"/>
-        <a:font script="Yiii" typeface="Microsoft Yi Baiti"/>
-        <a:font script="Tibt" typeface="Microsoft Himalaya"/>
-        <a:font script="Thaa" typeface="MV Boli"/>
-        <a:font script="Deva" typeface="Mangal"/>
-        <a:font script="Telu" typeface="Gautami"/>
-        <a:font script="Taml" typeface="Latha"/>
-        <a:font script="Syrc" typeface="Estrangelo Edessa"/>
-        <a:font script="Orya" typeface="Kalinga"/>
-        <a:font script="Mlym" typeface="Kartika"/>
-        <a:font script="Laoo" typeface="DokChampa"/>
-        <a:font script="Sinh" typeface="Iskoola Pota"/>
-        <a:font script="Mong" typeface="Mongolian Baiti"/>
-        <a:font script="Viet" typeface="Arial"/>
-        <a:font script="Uigh" typeface="Microsoft Uighur"/>
-        <a:font script="Geor" typeface="Sylfaen"/>
-        <a:font script="Armn" typeface="Arial"/>
-        <a:font script="Bugi" typeface="Leelawadee UI"/>
-        <a:font script="Bopo" typeface="Microsoft JhengHei"/>
-        <a:font script="Java" typeface="Javanese Text"/>
-        <a:font script="Lisu" typeface="Segoe UI"/>
-        <a:font script="Mymr" typeface="Myanmar Text"/>
-        <a:font script="Nkoo" typeface="Ebrima"/>
-        <a:font script="Olck" typeface="Nirmala UI"/>
-        <a:font script="Osma" typeface="Ebrima"/>
-        <a:font script="Phag" typeface="Phagspa"/>
-        <a:font script="Syrn" typeface="Estrangelo Edessa"/>
-        <a:font script="Syrj" typeface="Estrangelo Edessa"/>
-        <a:font script="Syre" typeface="Estrangelo Edessa"/>
-        <a:font script="Sora" typeface="Nirmala UI"/>
-        <a:font script="Tale" typeface="Microsoft Tai Le"/>
-        <a:font script="Talu" typeface="Microsoft New Tai Lue"/>
-        <a:font script="Tfng" typeface="Ebrima"/>
+        <a:latin typeface="Aptos"/>
+        <a:ea typeface="Arial"/>
+        <a:cs typeface="Arial"/>
       </a:minorFont>
     </a:fontScheme>
     <a:fmtScheme name="Office">
@@ -7332,7 +7476,7 @@
         <a:solidFill>
           <a:schemeClr val="phClr"/>
         </a:solidFill>
-        <a:gradFill rotWithShape="1">
+        <a:gradFill>
           <a:gsLst>
             <a:gs pos="0">
               <a:schemeClr val="phClr">
@@ -7358,7 +7502,7 @@
           </a:gsLst>
           <a:lin ang="5400000" scaled="0"/>
         </a:gradFill>
-        <a:gradFill rotWithShape="1">
+        <a:gradFill>
           <a:gsLst>
             <a:gs pos="0">
               <a:schemeClr val="phClr">
@@ -7435,7 +7579,7 @@
             <a:satMod val="170000"/>
           </a:schemeClr>
         </a:solidFill>
-        <a:gradFill rotWithShape="1">
+        <a:gradFill>
           <a:gsLst>
             <a:gs pos="0">
               <a:schemeClr val="phClr">
@@ -7467,7 +7611,7 @@
   </a:themeElements>
   <a:objectDefaults>
     <a:lnDef>
-      <a:spPr/>
+      <a:spPr bwMode="auto"/>
       <a:bodyPr/>
       <a:lstStyle/>
       <a:style>
@@ -7486,11 +7630,5 @@
       </a:style>
     </a:lnDef>
   </a:objectDefaults>
-  <a:extraClrSchemeLst/>
-  <a:extLst>
-    <a:ext uri="{05A4C25C-085E-4340-85A3-A5531E510DB2}">
-      <thm15:themeFamily xmlns:thm15="http://schemas.microsoft.com/office/thememl/2012/main" name="Office Theme" id="{2E142A2C-CD16-42D6-873A-C26D2A0506FA}" vid="{1BDDFF52-6CD6-40A5-AB3C-68EB2F1E4D0A}"/>
-    </a:ext>
-  </a:extLst>
 </a:theme>
 </file>